--- a/docs/pitch/PromptShield_pitch.pptx
+++ b/docs/pitch/PromptShield_pitch.pptx
@@ -3489,7 +3489,7 @@
                 </a:solidFill>
                 <a:latin typeface="Arial"/>
               </a:rPr>
-              <a:t>https://github.com/Sohamsurve/PrmoptShield</a:t>
+              <a:t>https://github.com/Sohamsurve/PromptShield</a:t>
             </a:r>
           </a:p>
         </p:txBody>
@@ -11020,7 +11020,7 @@
                 </a:solidFill>
                 <a:latin typeface="Arial"/>
               </a:rPr>
-              <a:t>https://github.com/Sohamsurve/PrmoptShield</a:t>
+              <a:t>https://github.com/Sohamsurve/PromptShield</a:t>
             </a:r>
           </a:p>
         </p:txBody>

--- a/docs/pitch/PromptShield_pitch.pptx
+++ b/docs/pitch/PromptShield_pitch.pptx
@@ -3489,7 +3489,40 @@
                 </a:solidFill>
                 <a:latin typeface="Arial"/>
               </a:rPr>
-              <a:t>https://github.com/Sohamsurve/PromptShield</a:t>
+              <a:t>https://github.com/Sohamsurve/PromptShield.git</a:t>
+            </a:r>
+          </a:p>
+        </p:txBody>
+      </p:sp>
+      <p:sp>
+        <p:nvSpPr>
+          <p:cNvPr id="13" name="TextBox 12"/>
+          <p:cNvSpPr txBox="1"/>
+          <p:nvPr/>
+        </p:nvSpPr>
+        <p:spPr>
+          <a:xfrm>
+            <a:off x="502920" y="5257800"/>
+            <a:ext cx="9144000" cy="365760"/>
+          </a:xfrm>
+          <a:prstGeom prst="rect">
+            <a:avLst/>
+          </a:prstGeom>
+          <a:noFill/>
+        </p:spPr>
+        <p:txBody>
+          <a:bodyPr wrap="square" anchor="t"/>
+          <a:lstStyle/>
+          <a:p>
+            <a:pPr algn="l"/>
+            <a:r>
+              <a:rPr sz="1800" b="1">
+                <a:solidFill>
+                  <a:srgbClr val="0E1726"/>
+                </a:solidFill>
+                <a:latin typeface="Arial"/>
+              </a:rPr>
+              <a:t>Submitted by: Soham Y. Surve</a:t>
             </a:r>
           </a:p>
         </p:txBody>
@@ -11020,14 +11053,47 @@
                 </a:solidFill>
                 <a:latin typeface="Arial"/>
               </a:rPr>
-              <a:t>https://github.com/Sohamsurve/PromptShield</a:t>
+              <a:t>https://github.com/Sohamsurve/PromptShield.git</a:t>
+            </a:r>
+          </a:p>
+        </p:txBody>
+      </p:sp>
+      <p:sp>
+        <p:nvSpPr>
+          <p:cNvPr id="11" name="TextBox 10"/>
+          <p:cNvSpPr txBox="1"/>
+          <p:nvPr/>
+        </p:nvSpPr>
+        <p:spPr>
+          <a:xfrm>
+            <a:off x="502920" y="4754880"/>
+            <a:ext cx="9144000" cy="365760"/>
+          </a:xfrm>
+          <a:prstGeom prst="rect">
+            <a:avLst/>
+          </a:prstGeom>
+          <a:noFill/>
+        </p:spPr>
+        <p:txBody>
+          <a:bodyPr wrap="square" anchor="t"/>
+          <a:lstStyle/>
+          <a:p>
+            <a:pPr algn="l"/>
+            <a:r>
+              <a:rPr sz="1800" b="1">
+                <a:solidFill>
+                  <a:srgbClr val="0E1726"/>
+                </a:solidFill>
+                <a:latin typeface="Arial"/>
+              </a:rPr>
+              <a:t>Submitted by: Soham Y. Surve</a:t>
             </a:r>
           </a:p>
         </p:txBody>
       </p:sp>
       <p:pic>
         <p:nvPicPr>
-          <p:cNvPr id="11" name="Picture 10" descr="favicon-512.png"/>
+          <p:cNvPr id="12" name="Picture 11" descr="favicon-512.png"/>
           <p:cNvPicPr>
             <a:picLocks noChangeAspect="1"/>
           </p:cNvPicPr>
@@ -11051,7 +11117,7 @@
       </p:pic>
       <p:sp>
         <p:nvSpPr>
-          <p:cNvPr id="12" name="TextBox 11"/>
+          <p:cNvPr id="13" name="TextBox 12"/>
           <p:cNvSpPr txBox="1"/>
           <p:nvPr/>
         </p:nvSpPr>
@@ -11084,7 +11150,7 @@
       </p:sp>
       <p:sp>
         <p:nvSpPr>
-          <p:cNvPr id="13" name="TextBox 12"/>
+          <p:cNvPr id="14" name="TextBox 13"/>
           <p:cNvSpPr txBox="1"/>
           <p:nvPr/>
         </p:nvSpPr>

--- a/docs/pitch/PromptShield_pitch.pptx
+++ b/docs/pitch/PromptShield_pitch.pptx
@@ -13,6 +13,8 @@
     <p:sldId id="261" r:id="rId12"/>
     <p:sldId id="262" r:id="rId13"/>
     <p:sldId id="263" r:id="rId14"/>
+    <p:sldId id="264" r:id="rId15"/>
+    <p:sldId id="265" r:id="rId16"/>
   </p:sldIdLst>
   <p:sldSz cx="12191695" cy="6858000" type="screen4x3"/>
   <p:notesSz cx="6858000" cy="9144000"/>
@@ -3349,7 +3351,7 @@
         <p:spPr>
           <a:xfrm>
             <a:off x="557784" y="4352544"/>
-            <a:ext cx="6949440" cy="777240"/>
+            <a:ext cx="7680960" cy="777240"/>
           </a:xfrm>
           <a:prstGeom prst="rect">
             <a:avLst/>
@@ -3392,7 +3394,7 @@
         <p:spPr>
           <a:xfrm>
             <a:off x="502920" y="4297680"/>
-            <a:ext cx="6949440" cy="777240"/>
+            <a:ext cx="7680960" cy="777240"/>
           </a:xfrm>
           <a:prstGeom prst="rect">
             <a:avLst/>
@@ -3470,7 +3472,7 @@
         <p:spPr>
           <a:xfrm>
             <a:off x="685800" y="4663440"/>
-            <a:ext cx="6492240" cy="320040"/>
+            <a:ext cx="7315200" cy="320040"/>
           </a:xfrm>
           <a:prstGeom prst="rect">
             <a:avLst/>
@@ -3523,6 +3525,1095 @@
                 <a:latin typeface="Arial"/>
               </a:rPr>
               <a:t>Submitted by: Soham Y. Surve</a:t>
+            </a:r>
+          </a:p>
+        </p:txBody>
+      </p:sp>
+    </p:spTree>
+  </p:cSld>
+  <p:clrMapOvr>
+    <a:masterClrMapping/>
+  </p:clrMapOvr>
+</p:sld>
+</file>
+
+<file path=ppt/slides/slide10.xml><?xml version="1.0" encoding="utf-8"?>
+<p:sld xmlns:a="http://schemas.openxmlformats.org/drawingml/2006/main" xmlns:p="http://schemas.openxmlformats.org/presentationml/2006/main" xmlns:r="http://schemas.openxmlformats.org/officeDocument/2006/relationships">
+  <p:cSld>
+    <p:spTree>
+      <p:nvGrpSpPr>
+        <p:cNvPr id="1" name=""/>
+        <p:cNvGrpSpPr/>
+        <p:nvPr/>
+      </p:nvGrpSpPr>
+      <p:grpSpPr/>
+      <p:sp>
+        <p:nvSpPr>
+          <p:cNvPr id="2" name="Rectangle 1"/>
+          <p:cNvSpPr/>
+          <p:nvPr/>
+        </p:nvSpPr>
+        <p:spPr>
+          <a:xfrm>
+            <a:off x="0" y="0"/>
+            <a:ext cx="12191695" cy="6858000"/>
+          </a:xfrm>
+          <a:prstGeom prst="rect">
+            <a:avLst/>
+          </a:prstGeom>
+          <a:solidFill>
+            <a:srgbClr val="F3F5F9"/>
+          </a:solidFill>
+          <a:ln>
+            <a:noFill/>
+          </a:ln>
+        </p:spPr>
+        <p:style>
+          <a:lnRef idx="1">
+            <a:schemeClr val="accent1"/>
+          </a:lnRef>
+          <a:fillRef idx="3">
+            <a:schemeClr val="accent1"/>
+          </a:fillRef>
+          <a:effectRef idx="2">
+            <a:schemeClr val="accent1"/>
+          </a:effectRef>
+          <a:fontRef idx="minor">
+            <a:schemeClr val="lt1"/>
+          </a:fontRef>
+        </p:style>
+        <p:txBody>
+          <a:bodyPr rtlCol="0" anchor="ctr"/>
+          <a:lstStyle/>
+          <a:p>
+            <a:pPr algn="ctr"/>
+          </a:p>
+        </p:txBody>
+      </p:sp>
+      <p:sp>
+        <p:nvSpPr>
+          <p:cNvPr id="3" name="Rectangle 2"/>
+          <p:cNvSpPr/>
+          <p:nvPr/>
+        </p:nvSpPr>
+        <p:spPr>
+          <a:xfrm>
+            <a:off x="0" y="0"/>
+            <a:ext cx="164592" cy="6858000"/>
+          </a:xfrm>
+          <a:prstGeom prst="rect">
+            <a:avLst/>
+          </a:prstGeom>
+          <a:solidFill>
+            <a:srgbClr val="6A4DFF"/>
+          </a:solidFill>
+          <a:ln>
+            <a:solidFill>
+              <a:srgbClr val="6A4DFF"/>
+            </a:solidFill>
+          </a:ln>
+        </p:spPr>
+        <p:style>
+          <a:lnRef idx="1">
+            <a:schemeClr val="accent1"/>
+          </a:lnRef>
+          <a:fillRef idx="3">
+            <a:schemeClr val="accent1"/>
+          </a:fillRef>
+          <a:effectRef idx="2">
+            <a:schemeClr val="accent1"/>
+          </a:effectRef>
+          <a:fontRef idx="minor">
+            <a:schemeClr val="lt1"/>
+          </a:fontRef>
+        </p:style>
+        <p:txBody>
+          <a:bodyPr rtlCol="0" anchor="ctr"/>
+          <a:lstStyle/>
+          <a:p>
+            <a:pPr algn="ctr"/>
+          </a:p>
+        </p:txBody>
+      </p:sp>
+      <p:pic>
+        <p:nvPicPr>
+          <p:cNvPr id="4" name="Picture 3" descr="favicon-512.png"/>
+          <p:cNvPicPr>
+            <a:picLocks noChangeAspect="1"/>
+          </p:cNvPicPr>
+          <p:nvPr/>
+        </p:nvPicPr>
+        <p:blipFill>
+          <a:blip r:embed="rId2"/>
+          <a:stretch>
+            <a:fillRect/>
+          </a:stretch>
+        </p:blipFill>
+        <p:spPr>
+          <a:xfrm>
+            <a:off x="502920" y="411480"/>
+            <a:ext cx="777240" cy="777240"/>
+          </a:xfrm>
+          <a:prstGeom prst="rect">
+            <a:avLst/>
+          </a:prstGeom>
+        </p:spPr>
+      </p:pic>
+      <p:sp>
+        <p:nvSpPr>
+          <p:cNvPr id="5" name="TextBox 4"/>
+          <p:cNvSpPr txBox="1"/>
+          <p:nvPr/>
+        </p:nvSpPr>
+        <p:spPr>
+          <a:xfrm>
+            <a:off x="1463040" y="457200"/>
+            <a:ext cx="7315200" cy="640080"/>
+          </a:xfrm>
+          <a:prstGeom prst="rect">
+            <a:avLst/>
+          </a:prstGeom>
+          <a:noFill/>
+        </p:spPr>
+        <p:txBody>
+          <a:bodyPr wrap="square" anchor="t"/>
+          <a:lstStyle/>
+          <a:p>
+            <a:pPr algn="l"/>
+            <a:r>
+              <a:rPr sz="4000" b="1">
+                <a:solidFill>
+                  <a:srgbClr val="0E1726"/>
+                </a:solidFill>
+                <a:latin typeface="Arial"/>
+              </a:rPr>
+              <a:t>PromptShield</a:t>
+            </a:r>
+          </a:p>
+        </p:txBody>
+      </p:sp>
+      <p:sp>
+        <p:nvSpPr>
+          <p:cNvPr id="6" name="TextBox 5"/>
+          <p:cNvSpPr txBox="1"/>
+          <p:nvPr/>
+        </p:nvSpPr>
+        <p:spPr>
+          <a:xfrm>
+            <a:off x="502920" y="1325880"/>
+            <a:ext cx="10972800" cy="365760"/>
+          </a:xfrm>
+          <a:prstGeom prst="rect">
+            <a:avLst/>
+          </a:prstGeom>
+          <a:noFill/>
+        </p:spPr>
+        <p:txBody>
+          <a:bodyPr wrap="square" anchor="t"/>
+          <a:lstStyle/>
+          <a:p>
+            <a:pPr algn="l"/>
+            <a:r>
+              <a:rPr sz="1800" b="0">
+                <a:solidFill>
+                  <a:srgbClr val="0E1726"/>
+                </a:solidFill>
+                <a:latin typeface="Arial"/>
+              </a:rPr>
+              <a:t>Check the content. Remove the attack. Keep the document.</a:t>
+            </a:r>
+          </a:p>
+        </p:txBody>
+      </p:sp>
+      <p:sp>
+        <p:nvSpPr>
+          <p:cNvPr id="7" name="Rectangle 6"/>
+          <p:cNvSpPr/>
+          <p:nvPr/>
+        </p:nvSpPr>
+        <p:spPr>
+          <a:xfrm>
+            <a:off x="557784" y="2020824"/>
+            <a:ext cx="2743200" cy="1325880"/>
+          </a:xfrm>
+          <a:prstGeom prst="rect">
+            <a:avLst/>
+          </a:prstGeom>
+          <a:solidFill>
+            <a:srgbClr val="0E1726"/>
+          </a:solidFill>
+          <a:ln>
+            <a:noFill/>
+          </a:ln>
+        </p:spPr>
+        <p:style>
+          <a:lnRef idx="1">
+            <a:schemeClr val="accent1"/>
+          </a:lnRef>
+          <a:fillRef idx="3">
+            <a:schemeClr val="accent1"/>
+          </a:fillRef>
+          <a:effectRef idx="2">
+            <a:schemeClr val="accent1"/>
+          </a:effectRef>
+          <a:fontRef idx="minor">
+            <a:schemeClr val="lt1"/>
+          </a:fontRef>
+        </p:style>
+        <p:txBody>
+          <a:bodyPr rtlCol="0" anchor="ctr"/>
+          <a:lstStyle/>
+          <a:p>
+            <a:pPr algn="ctr"/>
+          </a:p>
+        </p:txBody>
+      </p:sp>
+      <p:sp>
+        <p:nvSpPr>
+          <p:cNvPr id="8" name="Rectangle 7"/>
+          <p:cNvSpPr/>
+          <p:nvPr/>
+        </p:nvSpPr>
+        <p:spPr>
+          <a:xfrm>
+            <a:off x="502920" y="1965960"/>
+            <a:ext cx="2743200" cy="1325880"/>
+          </a:xfrm>
+          <a:prstGeom prst="rect">
+            <a:avLst/>
+          </a:prstGeom>
+          <a:solidFill>
+            <a:srgbClr val="FFFFFF"/>
+          </a:solidFill>
+          <a:ln w="19050">
+            <a:solidFill>
+              <a:srgbClr val="0E1726"/>
+            </a:solidFill>
+          </a:ln>
+        </p:spPr>
+        <p:style>
+          <a:lnRef idx="1">
+            <a:schemeClr val="accent1"/>
+          </a:lnRef>
+          <a:fillRef idx="3">
+            <a:schemeClr val="accent1"/>
+          </a:fillRef>
+          <a:effectRef idx="2">
+            <a:schemeClr val="accent1"/>
+          </a:effectRef>
+          <a:fontRef idx="minor">
+            <a:schemeClr val="lt1"/>
+          </a:fontRef>
+        </p:style>
+        <p:txBody>
+          <a:bodyPr rtlCol="0" anchor="ctr"/>
+          <a:lstStyle/>
+          <a:p>
+            <a:pPr algn="ctr"/>
+          </a:p>
+        </p:txBody>
+      </p:sp>
+      <p:sp>
+        <p:nvSpPr>
+          <p:cNvPr id="9" name="TextBox 8"/>
+          <p:cNvSpPr txBox="1"/>
+          <p:nvPr/>
+        </p:nvSpPr>
+        <p:spPr>
+          <a:xfrm>
+            <a:off x="685800" y="2103120"/>
+            <a:ext cx="2377440" cy="320040"/>
+          </a:xfrm>
+          <a:prstGeom prst="rect">
+            <a:avLst/>
+          </a:prstGeom>
+          <a:noFill/>
+        </p:spPr>
+        <p:txBody>
+          <a:bodyPr wrap="square" anchor="t"/>
+          <a:lstStyle/>
+          <a:p>
+            <a:pPr algn="l"/>
+            <a:r>
+              <a:rPr sz="1400" b="1">
+                <a:solidFill>
+                  <a:srgbClr val="6A4DFF"/>
+                </a:solidFill>
+                <a:latin typeface="Arial"/>
+              </a:rPr>
+              <a:t>API</a:t>
+            </a:r>
+          </a:p>
+        </p:txBody>
+      </p:sp>
+      <p:sp>
+        <p:nvSpPr>
+          <p:cNvPr id="10" name="TextBox 9"/>
+          <p:cNvSpPr txBox="1"/>
+          <p:nvPr/>
+        </p:nvSpPr>
+        <p:spPr>
+          <a:xfrm>
+            <a:off x="685800" y="2514600"/>
+            <a:ext cx="2377440" cy="594360"/>
+          </a:xfrm>
+          <a:prstGeom prst="rect">
+            <a:avLst/>
+          </a:prstGeom>
+          <a:noFill/>
+        </p:spPr>
+        <p:txBody>
+          <a:bodyPr wrap="square" anchor="t"/>
+          <a:lstStyle/>
+          <a:p>
+            <a:pPr algn="l"/>
+            <a:r>
+              <a:rPr sz="1500" b="0">
+                <a:solidFill>
+                  <a:srgbClr val="0E1726"/>
+                </a:solidFill>
+                <a:latin typeface="Arial"/>
+              </a:rPr>
+              <a:t>Python and FastAPI</a:t>
+            </a:r>
+          </a:p>
+        </p:txBody>
+      </p:sp>
+      <p:sp>
+        <p:nvSpPr>
+          <p:cNvPr id="11" name="Rectangle 10"/>
+          <p:cNvSpPr/>
+          <p:nvPr/>
+        </p:nvSpPr>
+        <p:spPr>
+          <a:xfrm>
+            <a:off x="3438144" y="2020824"/>
+            <a:ext cx="2743200" cy="1325880"/>
+          </a:xfrm>
+          <a:prstGeom prst="rect">
+            <a:avLst/>
+          </a:prstGeom>
+          <a:solidFill>
+            <a:srgbClr val="0E1726"/>
+          </a:solidFill>
+          <a:ln>
+            <a:noFill/>
+          </a:ln>
+        </p:spPr>
+        <p:style>
+          <a:lnRef idx="1">
+            <a:schemeClr val="accent1"/>
+          </a:lnRef>
+          <a:fillRef idx="3">
+            <a:schemeClr val="accent1"/>
+          </a:fillRef>
+          <a:effectRef idx="2">
+            <a:schemeClr val="accent1"/>
+          </a:effectRef>
+          <a:fontRef idx="minor">
+            <a:schemeClr val="lt1"/>
+          </a:fontRef>
+        </p:style>
+        <p:txBody>
+          <a:bodyPr rtlCol="0" anchor="ctr"/>
+          <a:lstStyle/>
+          <a:p>
+            <a:pPr algn="ctr"/>
+          </a:p>
+        </p:txBody>
+      </p:sp>
+      <p:sp>
+        <p:nvSpPr>
+          <p:cNvPr id="12" name="Rectangle 11"/>
+          <p:cNvSpPr/>
+          <p:nvPr/>
+        </p:nvSpPr>
+        <p:spPr>
+          <a:xfrm>
+            <a:off x="3383280" y="1965960"/>
+            <a:ext cx="2743200" cy="1325880"/>
+          </a:xfrm>
+          <a:prstGeom prst="rect">
+            <a:avLst/>
+          </a:prstGeom>
+          <a:solidFill>
+            <a:srgbClr val="FFFFFF"/>
+          </a:solidFill>
+          <a:ln w="19050">
+            <a:solidFill>
+              <a:srgbClr val="0E1726"/>
+            </a:solidFill>
+          </a:ln>
+        </p:spPr>
+        <p:style>
+          <a:lnRef idx="1">
+            <a:schemeClr val="accent1"/>
+          </a:lnRef>
+          <a:fillRef idx="3">
+            <a:schemeClr val="accent1"/>
+          </a:fillRef>
+          <a:effectRef idx="2">
+            <a:schemeClr val="accent1"/>
+          </a:effectRef>
+          <a:fontRef idx="minor">
+            <a:schemeClr val="lt1"/>
+          </a:fontRef>
+        </p:style>
+        <p:txBody>
+          <a:bodyPr rtlCol="0" anchor="ctr"/>
+          <a:lstStyle/>
+          <a:p>
+            <a:pPr algn="ctr"/>
+          </a:p>
+        </p:txBody>
+      </p:sp>
+      <p:sp>
+        <p:nvSpPr>
+          <p:cNvPr id="13" name="TextBox 12"/>
+          <p:cNvSpPr txBox="1"/>
+          <p:nvPr/>
+        </p:nvSpPr>
+        <p:spPr>
+          <a:xfrm>
+            <a:off x="3566160" y="2103120"/>
+            <a:ext cx="2377440" cy="320040"/>
+          </a:xfrm>
+          <a:prstGeom prst="rect">
+            <a:avLst/>
+          </a:prstGeom>
+          <a:noFill/>
+        </p:spPr>
+        <p:txBody>
+          <a:bodyPr wrap="square" anchor="t"/>
+          <a:lstStyle/>
+          <a:p>
+            <a:pPr algn="l"/>
+            <a:r>
+              <a:rPr sz="1400" b="1">
+                <a:solidFill>
+                  <a:srgbClr val="6A4DFF"/>
+                </a:solidFill>
+                <a:latin typeface="Arial"/>
+              </a:rPr>
+              <a:t>Console</a:t>
+            </a:r>
+          </a:p>
+        </p:txBody>
+      </p:sp>
+      <p:sp>
+        <p:nvSpPr>
+          <p:cNvPr id="14" name="TextBox 13"/>
+          <p:cNvSpPr txBox="1"/>
+          <p:nvPr/>
+        </p:nvSpPr>
+        <p:spPr>
+          <a:xfrm>
+            <a:off x="3566160" y="2514600"/>
+            <a:ext cx="2377440" cy="594360"/>
+          </a:xfrm>
+          <a:prstGeom prst="rect">
+            <a:avLst/>
+          </a:prstGeom>
+          <a:noFill/>
+        </p:spPr>
+        <p:txBody>
+          <a:bodyPr wrap="square" anchor="t"/>
+          <a:lstStyle/>
+          <a:p>
+            <a:pPr algn="l"/>
+            <a:r>
+              <a:rPr sz="1500" b="0">
+                <a:solidFill>
+                  <a:srgbClr val="0E1726"/>
+                </a:solidFill>
+                <a:latin typeface="Arial"/>
+              </a:rPr>
+              <a:t>Next.js</a:t>
+            </a:r>
+          </a:p>
+        </p:txBody>
+      </p:sp>
+      <p:sp>
+        <p:nvSpPr>
+          <p:cNvPr id="15" name="Rectangle 14"/>
+          <p:cNvSpPr/>
+          <p:nvPr/>
+        </p:nvSpPr>
+        <p:spPr>
+          <a:xfrm>
+            <a:off x="6318503" y="2020824"/>
+            <a:ext cx="2743200" cy="1325880"/>
+          </a:xfrm>
+          <a:prstGeom prst="rect">
+            <a:avLst/>
+          </a:prstGeom>
+          <a:solidFill>
+            <a:srgbClr val="0E1726"/>
+          </a:solidFill>
+          <a:ln>
+            <a:noFill/>
+          </a:ln>
+        </p:spPr>
+        <p:style>
+          <a:lnRef idx="1">
+            <a:schemeClr val="accent1"/>
+          </a:lnRef>
+          <a:fillRef idx="3">
+            <a:schemeClr val="accent1"/>
+          </a:fillRef>
+          <a:effectRef idx="2">
+            <a:schemeClr val="accent1"/>
+          </a:effectRef>
+          <a:fontRef idx="minor">
+            <a:schemeClr val="lt1"/>
+          </a:fontRef>
+        </p:style>
+        <p:txBody>
+          <a:bodyPr rtlCol="0" anchor="ctr"/>
+          <a:lstStyle/>
+          <a:p>
+            <a:pPr algn="ctr"/>
+          </a:p>
+        </p:txBody>
+      </p:sp>
+      <p:sp>
+        <p:nvSpPr>
+          <p:cNvPr id="16" name="Rectangle 15"/>
+          <p:cNvSpPr/>
+          <p:nvPr/>
+        </p:nvSpPr>
+        <p:spPr>
+          <a:xfrm>
+            <a:off x="6263640" y="1965960"/>
+            <a:ext cx="2743200" cy="1325880"/>
+          </a:xfrm>
+          <a:prstGeom prst="rect">
+            <a:avLst/>
+          </a:prstGeom>
+          <a:solidFill>
+            <a:srgbClr val="FFFFFF"/>
+          </a:solidFill>
+          <a:ln w="19050">
+            <a:solidFill>
+              <a:srgbClr val="0E1726"/>
+            </a:solidFill>
+          </a:ln>
+        </p:spPr>
+        <p:style>
+          <a:lnRef idx="1">
+            <a:schemeClr val="accent1"/>
+          </a:lnRef>
+          <a:fillRef idx="3">
+            <a:schemeClr val="accent1"/>
+          </a:fillRef>
+          <a:effectRef idx="2">
+            <a:schemeClr val="accent1"/>
+          </a:effectRef>
+          <a:fontRef idx="minor">
+            <a:schemeClr val="lt1"/>
+          </a:fontRef>
+        </p:style>
+        <p:txBody>
+          <a:bodyPr rtlCol="0" anchor="ctr"/>
+          <a:lstStyle/>
+          <a:p>
+            <a:pPr algn="ctr"/>
+          </a:p>
+        </p:txBody>
+      </p:sp>
+      <p:sp>
+        <p:nvSpPr>
+          <p:cNvPr id="17" name="TextBox 16"/>
+          <p:cNvSpPr txBox="1"/>
+          <p:nvPr/>
+        </p:nvSpPr>
+        <p:spPr>
+          <a:xfrm>
+            <a:off x="6446520" y="2103120"/>
+            <a:ext cx="2377440" cy="320040"/>
+          </a:xfrm>
+          <a:prstGeom prst="rect">
+            <a:avLst/>
+          </a:prstGeom>
+          <a:noFill/>
+        </p:spPr>
+        <p:txBody>
+          <a:bodyPr wrap="square" anchor="t"/>
+          <a:lstStyle/>
+          <a:p>
+            <a:pPr algn="l"/>
+            <a:r>
+              <a:rPr sz="1400" b="1">
+                <a:solidFill>
+                  <a:srgbClr val="6A4DFF"/>
+                </a:solidFill>
+                <a:latin typeface="Arial"/>
+              </a:rPr>
+              <a:t>Detection</a:t>
+            </a:r>
+          </a:p>
+        </p:txBody>
+      </p:sp>
+      <p:sp>
+        <p:nvSpPr>
+          <p:cNvPr id="18" name="TextBox 17"/>
+          <p:cNvSpPr txBox="1"/>
+          <p:nvPr/>
+        </p:nvSpPr>
+        <p:spPr>
+          <a:xfrm>
+            <a:off x="6446520" y="2514600"/>
+            <a:ext cx="2377440" cy="594360"/>
+          </a:xfrm>
+          <a:prstGeom prst="rect">
+            <a:avLst/>
+          </a:prstGeom>
+          <a:noFill/>
+        </p:spPr>
+        <p:txBody>
+          <a:bodyPr wrap="square" anchor="t"/>
+          <a:lstStyle/>
+          <a:p>
+            <a:pPr algn="l"/>
+            <a:r>
+              <a:rPr sz="1500" b="0">
+                <a:solidFill>
+                  <a:srgbClr val="0E1726"/>
+                </a:solidFill>
+                <a:latin typeface="Arial"/>
+              </a:rPr>
+              <a:t>Signatures, then a small classifier</a:t>
+            </a:r>
+          </a:p>
+        </p:txBody>
+      </p:sp>
+      <p:sp>
+        <p:nvSpPr>
+          <p:cNvPr id="19" name="Rectangle 18"/>
+          <p:cNvSpPr/>
+          <p:nvPr/>
+        </p:nvSpPr>
+        <p:spPr>
+          <a:xfrm>
+            <a:off x="9198864" y="2020824"/>
+            <a:ext cx="2743200" cy="1325880"/>
+          </a:xfrm>
+          <a:prstGeom prst="rect">
+            <a:avLst/>
+          </a:prstGeom>
+          <a:solidFill>
+            <a:srgbClr val="0E1726"/>
+          </a:solidFill>
+          <a:ln>
+            <a:noFill/>
+          </a:ln>
+        </p:spPr>
+        <p:style>
+          <a:lnRef idx="1">
+            <a:schemeClr val="accent1"/>
+          </a:lnRef>
+          <a:fillRef idx="3">
+            <a:schemeClr val="accent1"/>
+          </a:fillRef>
+          <a:effectRef idx="2">
+            <a:schemeClr val="accent1"/>
+          </a:effectRef>
+          <a:fontRef idx="minor">
+            <a:schemeClr val="lt1"/>
+          </a:fontRef>
+        </p:style>
+        <p:txBody>
+          <a:bodyPr rtlCol="0" anchor="ctr"/>
+          <a:lstStyle/>
+          <a:p>
+            <a:pPr algn="ctr"/>
+          </a:p>
+        </p:txBody>
+      </p:sp>
+      <p:sp>
+        <p:nvSpPr>
+          <p:cNvPr id="20" name="Rectangle 19"/>
+          <p:cNvSpPr/>
+          <p:nvPr/>
+        </p:nvSpPr>
+        <p:spPr>
+          <a:xfrm>
+            <a:off x="9144000" y="1965960"/>
+            <a:ext cx="2743200" cy="1325880"/>
+          </a:xfrm>
+          <a:prstGeom prst="rect">
+            <a:avLst/>
+          </a:prstGeom>
+          <a:solidFill>
+            <a:srgbClr val="FFFFFF"/>
+          </a:solidFill>
+          <a:ln w="19050">
+            <a:solidFill>
+              <a:srgbClr val="0E1726"/>
+            </a:solidFill>
+          </a:ln>
+        </p:spPr>
+        <p:style>
+          <a:lnRef idx="1">
+            <a:schemeClr val="accent1"/>
+          </a:lnRef>
+          <a:fillRef idx="3">
+            <a:schemeClr val="accent1"/>
+          </a:fillRef>
+          <a:effectRef idx="2">
+            <a:schemeClr val="accent1"/>
+          </a:effectRef>
+          <a:fontRef idx="minor">
+            <a:schemeClr val="lt1"/>
+          </a:fontRef>
+        </p:style>
+        <p:txBody>
+          <a:bodyPr rtlCol="0" anchor="ctr"/>
+          <a:lstStyle/>
+          <a:p>
+            <a:pPr algn="ctr"/>
+          </a:p>
+        </p:txBody>
+      </p:sp>
+      <p:sp>
+        <p:nvSpPr>
+          <p:cNvPr id="21" name="TextBox 20"/>
+          <p:cNvSpPr txBox="1"/>
+          <p:nvPr/>
+        </p:nvSpPr>
+        <p:spPr>
+          <a:xfrm>
+            <a:off x="9326880" y="2103120"/>
+            <a:ext cx="2377440" cy="320040"/>
+          </a:xfrm>
+          <a:prstGeom prst="rect">
+            <a:avLst/>
+          </a:prstGeom>
+          <a:noFill/>
+        </p:spPr>
+        <p:txBody>
+          <a:bodyPr wrap="square" anchor="t"/>
+          <a:lstStyle/>
+          <a:p>
+            <a:pPr algn="l"/>
+            <a:r>
+              <a:rPr sz="1400" b="1">
+                <a:solidFill>
+                  <a:srgbClr val="6A4DFF"/>
+                </a:solidFill>
+                <a:latin typeface="Arial"/>
+              </a:rPr>
+              <a:t>Demo store</a:t>
+            </a:r>
+          </a:p>
+        </p:txBody>
+      </p:sp>
+      <p:sp>
+        <p:nvSpPr>
+          <p:cNvPr id="22" name="TextBox 21"/>
+          <p:cNvSpPr txBox="1"/>
+          <p:nvPr/>
+        </p:nvSpPr>
+        <p:spPr>
+          <a:xfrm>
+            <a:off x="9326880" y="2514600"/>
+            <a:ext cx="2377440" cy="594360"/>
+          </a:xfrm>
+          <a:prstGeom prst="rect">
+            <a:avLst/>
+          </a:prstGeom>
+          <a:noFill/>
+        </p:spPr>
+        <p:txBody>
+          <a:bodyPr wrap="square" anchor="t"/>
+          <a:lstStyle/>
+          <a:p>
+            <a:pPr algn="l"/>
+            <a:r>
+              <a:rPr sz="1500" b="0">
+                <a:solidFill>
+                  <a:srgbClr val="0E1726"/>
+                </a:solidFill>
+                <a:latin typeface="Arial"/>
+              </a:rPr>
+              <a:t>SQLite</a:t>
+            </a:r>
+          </a:p>
+        </p:txBody>
+      </p:sp>
+      <p:sp>
+        <p:nvSpPr>
+          <p:cNvPr id="23" name="Rectangle 22"/>
+          <p:cNvSpPr/>
+          <p:nvPr/>
+        </p:nvSpPr>
+        <p:spPr>
+          <a:xfrm>
+            <a:off x="557784" y="3621024"/>
+            <a:ext cx="7680960" cy="777240"/>
+          </a:xfrm>
+          <a:prstGeom prst="rect">
+            <a:avLst/>
+          </a:prstGeom>
+          <a:solidFill>
+            <a:srgbClr val="0E1726"/>
+          </a:solidFill>
+          <a:ln>
+            <a:noFill/>
+          </a:ln>
+        </p:spPr>
+        <p:style>
+          <a:lnRef idx="1">
+            <a:schemeClr val="accent1"/>
+          </a:lnRef>
+          <a:fillRef idx="3">
+            <a:schemeClr val="accent1"/>
+          </a:fillRef>
+          <a:effectRef idx="2">
+            <a:schemeClr val="accent1"/>
+          </a:effectRef>
+          <a:fontRef idx="minor">
+            <a:schemeClr val="lt1"/>
+          </a:fontRef>
+        </p:style>
+        <p:txBody>
+          <a:bodyPr rtlCol="0" anchor="ctr"/>
+          <a:lstStyle/>
+          <a:p>
+            <a:pPr algn="ctr"/>
+          </a:p>
+        </p:txBody>
+      </p:sp>
+      <p:sp>
+        <p:nvSpPr>
+          <p:cNvPr id="24" name="Rectangle 23"/>
+          <p:cNvSpPr/>
+          <p:nvPr/>
+        </p:nvSpPr>
+        <p:spPr>
+          <a:xfrm>
+            <a:off x="502920" y="3566160"/>
+            <a:ext cx="7680960" cy="777240"/>
+          </a:xfrm>
+          <a:prstGeom prst="rect">
+            <a:avLst/>
+          </a:prstGeom>
+          <a:solidFill>
+            <a:srgbClr val="FFFFFF"/>
+          </a:solidFill>
+          <a:ln w="19050">
+            <a:solidFill>
+              <a:srgbClr val="0E1726"/>
+            </a:solidFill>
+          </a:ln>
+        </p:spPr>
+        <p:style>
+          <a:lnRef idx="1">
+            <a:schemeClr val="accent1"/>
+          </a:lnRef>
+          <a:fillRef idx="3">
+            <a:schemeClr val="accent1"/>
+          </a:fillRef>
+          <a:effectRef idx="2">
+            <a:schemeClr val="accent1"/>
+          </a:effectRef>
+          <a:fontRef idx="minor">
+            <a:schemeClr val="lt1"/>
+          </a:fontRef>
+        </p:style>
+        <p:txBody>
+          <a:bodyPr rtlCol="0" anchor="ctr"/>
+          <a:lstStyle/>
+          <a:p>
+            <a:pPr algn="ctr"/>
+          </a:p>
+        </p:txBody>
+      </p:sp>
+      <p:sp>
+        <p:nvSpPr>
+          <p:cNvPr id="25" name="TextBox 24"/>
+          <p:cNvSpPr txBox="1"/>
+          <p:nvPr/>
+        </p:nvSpPr>
+        <p:spPr>
+          <a:xfrm>
+            <a:off x="685800" y="3675887"/>
+            <a:ext cx="1188720" cy="256032"/>
+          </a:xfrm>
+          <a:prstGeom prst="rect">
+            <a:avLst/>
+          </a:prstGeom>
+          <a:noFill/>
+        </p:spPr>
+        <p:txBody>
+          <a:bodyPr wrap="square" anchor="t"/>
+          <a:lstStyle/>
+          <a:p>
+            <a:pPr algn="l"/>
+            <a:r>
+              <a:rPr sz="1200" b="1">
+                <a:solidFill>
+                  <a:srgbClr val="5B667A"/>
+                </a:solidFill>
+                <a:latin typeface="Arial"/>
+              </a:rPr>
+              <a:t>GitHub</a:t>
+            </a:r>
+          </a:p>
+        </p:txBody>
+      </p:sp>
+      <p:sp>
+        <p:nvSpPr>
+          <p:cNvPr id="26" name="TextBox 25"/>
+          <p:cNvSpPr txBox="1"/>
+          <p:nvPr/>
+        </p:nvSpPr>
+        <p:spPr>
+          <a:xfrm>
+            <a:off x="685800" y="3931920"/>
+            <a:ext cx="7315200" cy="320040"/>
+          </a:xfrm>
+          <a:prstGeom prst="rect">
+            <a:avLst/>
+          </a:prstGeom>
+          <a:noFill/>
+        </p:spPr>
+        <p:txBody>
+          <a:bodyPr wrap="square" anchor="t"/>
+          <a:lstStyle/>
+          <a:p>
+            <a:pPr algn="l"/>
+            <a:r>
+              <a:rPr sz="1600" b="1">
+                <a:solidFill>
+                  <a:srgbClr val="0E1726"/>
+                </a:solidFill>
+                <a:latin typeface="Arial"/>
+              </a:rPr>
+              <a:t>https://github.com/Sohamsurve/PromptShield.git</a:t>
+            </a:r>
+          </a:p>
+        </p:txBody>
+      </p:sp>
+      <p:sp>
+        <p:nvSpPr>
+          <p:cNvPr id="27" name="TextBox 26"/>
+          <p:cNvSpPr txBox="1"/>
+          <p:nvPr/>
+        </p:nvSpPr>
+        <p:spPr>
+          <a:xfrm>
+            <a:off x="502920" y="4526280"/>
+            <a:ext cx="9144000" cy="365760"/>
+          </a:xfrm>
+          <a:prstGeom prst="rect">
+            <a:avLst/>
+          </a:prstGeom>
+          <a:noFill/>
+        </p:spPr>
+        <p:txBody>
+          <a:bodyPr wrap="square" anchor="t"/>
+          <a:lstStyle/>
+          <a:p>
+            <a:pPr algn="l"/>
+            <a:r>
+              <a:rPr sz="1800" b="1">
+                <a:solidFill>
+                  <a:srgbClr val="0E1726"/>
+                </a:solidFill>
+                <a:latin typeface="Arial"/>
+              </a:rPr>
+              <a:t>Submitted by: Soham Y. Surve</a:t>
+            </a:r>
+          </a:p>
+        </p:txBody>
+      </p:sp>
+      <p:pic>
+        <p:nvPicPr>
+          <p:cNvPr id="28" name="Picture 27" descr="favicon-512.png"/>
+          <p:cNvPicPr>
+            <a:picLocks noChangeAspect="1"/>
+          </p:cNvPicPr>
+          <p:nvPr/>
+        </p:nvPicPr>
+        <p:blipFill>
+          <a:blip r:embed="rId2"/>
+          <a:stretch>
+            <a:fillRect/>
+          </a:stretch>
+        </p:blipFill>
+        <p:spPr>
+          <a:xfrm>
+            <a:off x="384048" y="6446520"/>
+            <a:ext cx="292608" cy="292608"/>
+          </a:xfrm>
+          <a:prstGeom prst="rect">
+            <a:avLst/>
+          </a:prstGeom>
+        </p:spPr>
+      </p:pic>
+      <p:sp>
+        <p:nvSpPr>
+          <p:cNvPr id="29" name="TextBox 28"/>
+          <p:cNvSpPr txBox="1"/>
+          <p:nvPr/>
+        </p:nvSpPr>
+        <p:spPr>
+          <a:xfrm>
+            <a:off x="768096" y="6510528"/>
+            <a:ext cx="7315200" cy="256032"/>
+          </a:xfrm>
+          <a:prstGeom prst="rect">
+            <a:avLst/>
+          </a:prstGeom>
+          <a:noFill/>
+        </p:spPr>
+        <p:txBody>
+          <a:bodyPr wrap="square" anchor="t"/>
+          <a:lstStyle/>
+          <a:p>
+            <a:pPr algn="l"/>
+            <a:r>
+              <a:rPr sz="1100" b="0">
+                <a:solidFill>
+                  <a:srgbClr val="5B667A"/>
+                </a:solidFill>
+                <a:latin typeface="Arial"/>
+              </a:rPr>
+              <a:t>PromptShield  ·  ET AI Hackathon  ·  Problem 2</a:t>
+            </a:r>
+          </a:p>
+        </p:txBody>
+      </p:sp>
+      <p:sp>
+        <p:nvSpPr>
+          <p:cNvPr id="30" name="TextBox 29"/>
+          <p:cNvSpPr txBox="1"/>
+          <p:nvPr/>
+        </p:nvSpPr>
+        <p:spPr>
+          <a:xfrm>
+            <a:off x="10424160" y="6510528"/>
+            <a:ext cx="1371600" cy="256032"/>
+          </a:xfrm>
+          <a:prstGeom prst="rect">
+            <a:avLst/>
+          </a:prstGeom>
+          <a:noFill/>
+        </p:spPr>
+        <p:txBody>
+          <a:bodyPr wrap="square" anchor="t"/>
+          <a:lstStyle/>
+          <a:p>
+            <a:pPr algn="ctr"/>
+            <a:r>
+              <a:rPr sz="1100" b="0">
+                <a:solidFill>
+                  <a:srgbClr val="5B667A"/>
+                </a:solidFill>
+                <a:latin typeface="Arial"/>
+              </a:rPr>
+              <a:t>10  /  10</a:t>
             </a:r>
           </a:p>
         </p:txBody>
@@ -4300,7 +5391,7 @@
                 </a:solidFill>
                 <a:latin typeface="Arial"/>
               </a:rPr>
-              <a:t>2  /  8</a:t>
+              <a:t>2  /  10</a:t>
             </a:r>
           </a:p>
         </p:txBody>
@@ -4394,7 +5485,7 @@
                 </a:solidFill>
                 <a:latin typeface="Arial"/>
               </a:rPr>
-              <a:t>What the prototype does</a:t>
+              <a:t>Key features</a:t>
             </a:r>
           </a:p>
         </p:txBody>
@@ -5963,7 +7054,7 @@
                 </a:solidFill>
                 <a:latin typeface="Arial"/>
               </a:rPr>
-              <a:t>3  /  8</a:t>
+              <a:t>3  /  10</a:t>
             </a:r>
           </a:p>
         </p:txBody>
@@ -6037,8 +7128,8 @@
         </p:nvSpPr>
         <p:spPr>
           <a:xfrm>
-            <a:off x="457200" y="292608"/>
-            <a:ext cx="10972800" cy="457200"/>
+            <a:off x="457200" y="256032"/>
+            <a:ext cx="10972800" cy="411480"/>
           </a:xfrm>
           <a:prstGeom prst="rect">
             <a:avLst/>
@@ -6057,20 +7148,53 @@
                 </a:solidFill>
                 <a:latin typeface="Arial"/>
               </a:rPr>
-              <a:t>How one scan works</a:t>
-            </a:r>
-          </a:p>
-        </p:txBody>
-      </p:sp>
-      <p:sp>
-        <p:nvSpPr>
-          <p:cNvPr id="4" name="Rectangle 3"/>
+              <a:t>Architecture</a:t>
+            </a:r>
+          </a:p>
+        </p:txBody>
+      </p:sp>
+      <p:sp>
+        <p:nvSpPr>
+          <p:cNvPr id="4" name="TextBox 3"/>
+          <p:cNvSpPr txBox="1"/>
+          <p:nvPr/>
+        </p:nvSpPr>
+        <p:spPr>
+          <a:xfrm>
+            <a:off x="457200" y="777240"/>
+            <a:ext cx="10972800" cy="274320"/>
+          </a:xfrm>
+          <a:prstGeom prst="rect">
+            <a:avLst/>
+          </a:prstGeom>
+          <a:noFill/>
+        </p:spPr>
+        <p:txBody>
+          <a:bodyPr wrap="square" anchor="t"/>
+          <a:lstStyle/>
+          <a:p>
+            <a:pPr algn="l"/>
+            <a:r>
+              <a:rPr sz="1500" b="0">
+                <a:solidFill>
+                  <a:srgbClr val="5B667A"/>
+                </a:solidFill>
+                <a:latin typeface="Arial"/>
+              </a:rPr>
+              <a:t>Each step is an action, a decision, and the part of the demo that shows it.</a:t>
+            </a:r>
+          </a:p>
+        </p:txBody>
+      </p:sp>
+      <p:sp>
+        <p:nvSpPr>
+          <p:cNvPr id="5" name="Rectangle 4"/>
           <p:cNvSpPr/>
           <p:nvPr/>
         </p:nvSpPr>
         <p:spPr>
           <a:xfrm>
-            <a:off x="512064" y="1106424"/>
+            <a:off x="512064" y="1197864"/>
             <a:ext cx="11247120" cy="841248"/>
           </a:xfrm>
           <a:prstGeom prst="rect">
@@ -6107,13 +7231,13 @@
       </p:sp>
       <p:sp>
         <p:nvSpPr>
-          <p:cNvPr id="5" name="Rectangle 4"/>
+          <p:cNvPr id="6" name="Rectangle 5"/>
           <p:cNvSpPr/>
           <p:nvPr/>
         </p:nvSpPr>
         <p:spPr>
           <a:xfrm>
-            <a:off x="457200" y="1051560"/>
+            <a:off x="457200" y="1143000"/>
             <a:ext cx="11247120" cy="841248"/>
           </a:xfrm>
           <a:prstGeom prst="rect">
@@ -6152,13 +7276,13 @@
       </p:sp>
       <p:sp>
         <p:nvSpPr>
-          <p:cNvPr id="6" name="TextBox 5"/>
-          <p:cNvSpPr txBox="1"/>
-          <p:nvPr/>
-        </p:nvSpPr>
-        <p:spPr>
-          <a:xfrm>
-            <a:off x="640080" y="1252728"/>
+          <p:cNvPr id="7" name="TextBox 6"/>
+          <p:cNvSpPr txBox="1"/>
+          <p:nvPr/>
+        </p:nvSpPr>
+        <p:spPr>
+          <a:xfrm>
+            <a:off x="640080" y="1344168"/>
             <a:ext cx="457200" cy="411480"/>
           </a:xfrm>
           <a:prstGeom prst="rect">
@@ -6185,14 +7309,14 @@
       </p:sp>
       <p:sp>
         <p:nvSpPr>
-          <p:cNvPr id="7" name="TextBox 6"/>
-          <p:cNvSpPr txBox="1"/>
-          <p:nvPr/>
-        </p:nvSpPr>
-        <p:spPr>
-          <a:xfrm>
-            <a:off x="1234440" y="1161288"/>
-            <a:ext cx="2194560" cy="594360"/>
+          <p:cNvPr id="8" name="TextBox 7"/>
+          <p:cNvSpPr txBox="1"/>
+          <p:nvPr/>
+        </p:nvSpPr>
+        <p:spPr>
+          <a:xfrm>
+            <a:off x="1234440" y="1344168"/>
+            <a:ext cx="2011680" cy="457200"/>
           </a:xfrm>
           <a:prstGeom prst="rect">
             <a:avLst/>
@@ -6218,14 +7342,14 @@
       </p:sp>
       <p:sp>
         <p:nvSpPr>
-          <p:cNvPr id="8" name="TextBox 7"/>
-          <p:cNvSpPr txBox="1"/>
-          <p:nvPr/>
-        </p:nvSpPr>
-        <p:spPr>
-          <a:xfrm>
-            <a:off x="3566160" y="1280160"/>
-            <a:ext cx="7863840" cy="457200"/>
+          <p:cNvPr id="9" name="TextBox 8"/>
+          <p:cNvSpPr txBox="1"/>
+          <p:nvPr/>
+        </p:nvSpPr>
+        <p:spPr>
+          <a:xfrm>
+            <a:off x="3383280" y="1344168"/>
+            <a:ext cx="8046720" cy="502920"/>
           </a:xfrm>
           <a:prstGeom prst="rect">
             <a:avLst/>
@@ -6238,26 +7362,26 @@
           <a:p>
             <a:pPr algn="l"/>
             <a:r>
-              <a:rPr sz="1500" b="0">
+              <a:rPr sz="1400" b="0">
                 <a:solidFill>
                   <a:srgbClr val="5B667A"/>
                 </a:solidFill>
                 <a:latin typeface="Arial"/>
               </a:rPr>
-              <a:t>Text, HTML, PDF, Word, email, Markdown, JSON, source, and images. Hidden text is surfaced.</a:t>
-            </a:r>
-          </a:p>
-        </p:txBody>
-      </p:sp>
-      <p:sp>
-        <p:nvSpPr>
-          <p:cNvPr id="9" name="Rectangle 8"/>
+              <a:t>Hidden text is surfaced. No model. The specimen email marks only the hidden sentence.</a:t>
+            </a:r>
+          </a:p>
+        </p:txBody>
+      </p:sp>
+      <p:sp>
+        <p:nvSpPr>
+          <p:cNvPr id="10" name="Rectangle 9"/>
           <p:cNvSpPr/>
           <p:nvPr/>
         </p:nvSpPr>
         <p:spPr>
           <a:xfrm>
-            <a:off x="512064" y="2066544"/>
+            <a:off x="512064" y="2157984"/>
             <a:ext cx="11247120" cy="841248"/>
           </a:xfrm>
           <a:prstGeom prst="rect">
@@ -6294,13 +7418,13 @@
       </p:sp>
       <p:sp>
         <p:nvSpPr>
-          <p:cNvPr id="10" name="Rectangle 9"/>
+          <p:cNvPr id="11" name="Rectangle 10"/>
           <p:cNvSpPr/>
           <p:nvPr/>
         </p:nvSpPr>
         <p:spPr>
           <a:xfrm>
-            <a:off x="457200" y="2011680"/>
+            <a:off x="457200" y="2103120"/>
             <a:ext cx="11247120" cy="841248"/>
           </a:xfrm>
           <a:prstGeom prst="rect">
@@ -6339,13 +7463,13 @@
       </p:sp>
       <p:sp>
         <p:nvSpPr>
-          <p:cNvPr id="11" name="TextBox 10"/>
-          <p:cNvSpPr txBox="1"/>
-          <p:nvPr/>
-        </p:nvSpPr>
-        <p:spPr>
-          <a:xfrm>
-            <a:off x="640080" y="2212848"/>
+          <p:cNvPr id="12" name="TextBox 11"/>
+          <p:cNvSpPr txBox="1"/>
+          <p:nvPr/>
+        </p:nvSpPr>
+        <p:spPr>
+          <a:xfrm>
+            <a:off x="640080" y="2304288"/>
             <a:ext cx="457200" cy="411480"/>
           </a:xfrm>
           <a:prstGeom prst="rect">
@@ -6372,14 +7496,14 @@
       </p:sp>
       <p:sp>
         <p:nvSpPr>
-          <p:cNvPr id="12" name="TextBox 11"/>
-          <p:cNvSpPr txBox="1"/>
-          <p:nvPr/>
-        </p:nvSpPr>
-        <p:spPr>
-          <a:xfrm>
-            <a:off x="1234440" y="2121408"/>
-            <a:ext cx="2194560" cy="594360"/>
+          <p:cNvPr id="13" name="TextBox 12"/>
+          <p:cNvSpPr txBox="1"/>
+          <p:nvPr/>
+        </p:nvSpPr>
+        <p:spPr>
+          <a:xfrm>
+            <a:off x="1234440" y="2304288"/>
+            <a:ext cx="2011680" cy="457200"/>
           </a:xfrm>
           <a:prstGeom prst="rect">
             <a:avLst/>
@@ -6405,14 +7529,14 @@
       </p:sp>
       <p:sp>
         <p:nvSpPr>
-          <p:cNvPr id="13" name="TextBox 12"/>
-          <p:cNvSpPr txBox="1"/>
-          <p:nvPr/>
-        </p:nvSpPr>
-        <p:spPr>
-          <a:xfrm>
-            <a:off x="3566160" y="2240280"/>
-            <a:ext cx="7863840" cy="457200"/>
+          <p:cNvPr id="14" name="TextBox 13"/>
+          <p:cNvSpPr txBox="1"/>
+          <p:nvPr/>
+        </p:nvSpPr>
+        <p:spPr>
+          <a:xfrm>
+            <a:off x="3383280" y="2304288"/>
+            <a:ext cx="8046720" cy="502920"/>
           </a:xfrm>
           <a:prstGeom prst="rect">
             <a:avLst/>
@@ -6425,26 +7549,26 @@
           <a:p>
             <a:pPr algn="l"/>
             <a:r>
-              <a:rPr sz="1500" b="0">
+              <a:rPr sz="1400" b="0">
                 <a:solidFill>
                   <a:srgbClr val="5B667A"/>
                 </a:solidFill>
                 <a:latin typeface="Arial"/>
               </a:rPr>
-              <a:t>Signatures first, then a small classifier. Encoded text is decoded, with a depth cap.</a:t>
-            </a:r>
-          </a:p>
-        </p:txBody>
-      </p:sp>
-      <p:sp>
-        <p:nvSpPr>
-          <p:cNvPr id="14" name="Rectangle 13"/>
+              <a:t>Signatures, then a small classifier. The judge may add a finding and never decides alone. X-ray shows the reason.</a:t>
+            </a:r>
+          </a:p>
+        </p:txBody>
+      </p:sp>
+      <p:sp>
+        <p:nvSpPr>
+          <p:cNvPr id="15" name="Rectangle 14"/>
           <p:cNvSpPr/>
           <p:nvPr/>
         </p:nvSpPr>
         <p:spPr>
           <a:xfrm>
-            <a:off x="512064" y="3026664"/>
+            <a:off x="512064" y="3118104"/>
             <a:ext cx="11247120" cy="841248"/>
           </a:xfrm>
           <a:prstGeom prst="rect">
@@ -6481,13 +7605,13 @@
       </p:sp>
       <p:sp>
         <p:nvSpPr>
-          <p:cNvPr id="15" name="Rectangle 14"/>
+          <p:cNvPr id="16" name="Rectangle 15"/>
           <p:cNvSpPr/>
           <p:nvPr/>
         </p:nvSpPr>
         <p:spPr>
           <a:xfrm>
-            <a:off x="457200" y="2971800"/>
+            <a:off x="457200" y="3063240"/>
             <a:ext cx="11247120" cy="841248"/>
           </a:xfrm>
           <a:prstGeom prst="rect">
@@ -6526,13 +7650,13 @@
       </p:sp>
       <p:sp>
         <p:nvSpPr>
-          <p:cNvPr id="16" name="TextBox 15"/>
-          <p:cNvSpPr txBox="1"/>
-          <p:nvPr/>
-        </p:nvSpPr>
-        <p:spPr>
-          <a:xfrm>
-            <a:off x="640080" y="3172968"/>
+          <p:cNvPr id="17" name="TextBox 16"/>
+          <p:cNvSpPr txBox="1"/>
+          <p:nvPr/>
+        </p:nvSpPr>
+        <p:spPr>
+          <a:xfrm>
+            <a:off x="640080" y="3264408"/>
             <a:ext cx="457200" cy="411480"/>
           </a:xfrm>
           <a:prstGeom prst="rect">
@@ -6559,14 +7683,14 @@
       </p:sp>
       <p:sp>
         <p:nvSpPr>
-          <p:cNvPr id="17" name="TextBox 16"/>
-          <p:cNvSpPr txBox="1"/>
-          <p:nvPr/>
-        </p:nvSpPr>
-        <p:spPr>
-          <a:xfrm>
-            <a:off x="1234440" y="3081528"/>
-            <a:ext cx="2194560" cy="594360"/>
+          <p:cNvPr id="18" name="TextBox 17"/>
+          <p:cNvSpPr txBox="1"/>
+          <p:nvPr/>
+        </p:nvSpPr>
+        <p:spPr>
+          <a:xfrm>
+            <a:off x="1234440" y="3264408"/>
+            <a:ext cx="2011680" cy="457200"/>
           </a:xfrm>
           <a:prstGeom prst="rect">
             <a:avLst/>
@@ -6592,14 +7716,14 @@
       </p:sp>
       <p:sp>
         <p:nvSpPr>
-          <p:cNvPr id="18" name="TextBox 17"/>
-          <p:cNvSpPr txBox="1"/>
-          <p:nvPr/>
-        </p:nvSpPr>
-        <p:spPr>
-          <a:xfrm>
-            <a:off x="3566160" y="3200400"/>
-            <a:ext cx="7863840" cy="457200"/>
+          <p:cNvPr id="19" name="TextBox 18"/>
+          <p:cNvSpPr txBox="1"/>
+          <p:nvPr/>
+        </p:nvSpPr>
+        <p:spPr>
+          <a:xfrm>
+            <a:off x="3383280" y="3264408"/>
+            <a:ext cx="8046720" cy="502920"/>
           </a:xfrm>
           <a:prstGeom prst="rect">
             <a:avLst/>
@@ -6612,26 +7736,26 @@
           <a:p>
             <a:pPr algn="l"/>
             <a:r>
-              <a:rPr sz="1500" b="0">
+              <a:rPr sz="1400" b="0">
                 <a:solidFill>
                   <a:srgbClr val="5B667A"/>
                 </a:solidFill>
                 <a:latin typeface="Arial"/>
               </a:rPr>
-              <a:t>Fusion picks the verdict. The language-model judge never decides alone.</a:t>
-            </a:r>
-          </a:p>
-        </p:txBody>
-      </p:sp>
-      <p:sp>
-        <p:nvSpPr>
-          <p:cNvPr id="19" name="Rectangle 18"/>
+              <a:t>Fusion picks Allowed, Sanitised, Quarantined, Blocked, or Needs review. A quoted attack stays Allowed.</a:t>
+            </a:r>
+          </a:p>
+        </p:txBody>
+      </p:sp>
+      <p:sp>
+        <p:nvSpPr>
+          <p:cNvPr id="20" name="Rectangle 19"/>
           <p:cNvSpPr/>
           <p:nvPr/>
         </p:nvSpPr>
         <p:spPr>
           <a:xfrm>
-            <a:off x="512064" y="3986784"/>
+            <a:off x="512064" y="4078224"/>
             <a:ext cx="11247120" cy="841248"/>
           </a:xfrm>
           <a:prstGeom prst="rect">
@@ -6668,13 +7792,13 @@
       </p:sp>
       <p:sp>
         <p:nvSpPr>
-          <p:cNvPr id="20" name="Rectangle 19"/>
+          <p:cNvPr id="21" name="Rectangle 20"/>
           <p:cNvSpPr/>
           <p:nvPr/>
         </p:nvSpPr>
         <p:spPr>
           <a:xfrm>
-            <a:off x="457200" y="3931920"/>
+            <a:off x="457200" y="4023360"/>
             <a:ext cx="11247120" cy="841248"/>
           </a:xfrm>
           <a:prstGeom prst="rect">
@@ -6713,13 +7837,13 @@
       </p:sp>
       <p:sp>
         <p:nvSpPr>
-          <p:cNvPr id="21" name="TextBox 20"/>
-          <p:cNvSpPr txBox="1"/>
-          <p:nvPr/>
-        </p:nvSpPr>
-        <p:spPr>
-          <a:xfrm>
-            <a:off x="640080" y="4133088"/>
+          <p:cNvPr id="22" name="TextBox 21"/>
+          <p:cNvSpPr txBox="1"/>
+          <p:nvPr/>
+        </p:nvSpPr>
+        <p:spPr>
+          <a:xfrm>
+            <a:off x="640080" y="4224528"/>
             <a:ext cx="457200" cy="411480"/>
           </a:xfrm>
           <a:prstGeom prst="rect">
@@ -6746,14 +7870,14 @@
       </p:sp>
       <p:sp>
         <p:nvSpPr>
-          <p:cNvPr id="22" name="TextBox 21"/>
-          <p:cNvSpPr txBox="1"/>
-          <p:nvPr/>
-        </p:nvSpPr>
-        <p:spPr>
-          <a:xfrm>
-            <a:off x="1234440" y="4041648"/>
-            <a:ext cx="2194560" cy="594360"/>
+          <p:cNvPr id="23" name="TextBox 22"/>
+          <p:cNvSpPr txBox="1"/>
+          <p:nvPr/>
+        </p:nvSpPr>
+        <p:spPr>
+          <a:xfrm>
+            <a:off x="1234440" y="4224528"/>
+            <a:ext cx="2011680" cy="457200"/>
           </a:xfrm>
           <a:prstGeom prst="rect">
             <a:avLst/>
@@ -6779,14 +7903,14 @@
       </p:sp>
       <p:sp>
         <p:nvSpPr>
-          <p:cNvPr id="23" name="TextBox 22"/>
-          <p:cNvSpPr txBox="1"/>
-          <p:nvPr/>
-        </p:nvSpPr>
-        <p:spPr>
-          <a:xfrm>
-            <a:off x="3566160" y="4160520"/>
-            <a:ext cx="7863840" cy="457200"/>
+          <p:cNvPr id="24" name="TextBox 23"/>
+          <p:cNvSpPr txBox="1"/>
+          <p:nvPr/>
+        </p:nvSpPr>
+        <p:spPr>
+          <a:xfrm>
+            <a:off x="3383280" y="4224528"/>
+            <a:ext cx="8046720" cy="502920"/>
           </a:xfrm>
           <a:prstGeom prst="rect">
             <a:avLst/>
@@ -6799,26 +7923,26 @@
           <a:p>
             <a:pPr algn="l"/>
             <a:r>
-              <a:rPr sz="1500" b="0">
+              <a:rPr sz="1400" b="0">
                 <a:solidFill>
                   <a:srgbClr val="5B667A"/>
                 </a:solidFill>
                 <a:latin typeface="Arial"/>
               </a:rPr>
-              <a:t>The span is redacted in the original text. A second scan checks the result.</a:t>
-            </a:r>
-          </a:p>
-        </p:txBody>
-      </p:sp>
-      <p:sp>
-        <p:nvSpPr>
-          <p:cNvPr id="24" name="Rectangle 23"/>
+              <a:t>Only the bad span is removed. The protected Arena lane keeps the ordinary mail.</a:t>
+            </a:r>
+          </a:p>
+        </p:txBody>
+      </p:sp>
+      <p:sp>
+        <p:nvSpPr>
+          <p:cNvPr id="25" name="Rectangle 24"/>
           <p:cNvSpPr/>
           <p:nvPr/>
         </p:nvSpPr>
         <p:spPr>
           <a:xfrm>
-            <a:off x="512064" y="4946903"/>
+            <a:off x="512064" y="5038344"/>
             <a:ext cx="11247120" cy="841248"/>
           </a:xfrm>
           <a:prstGeom prst="rect">
@@ -6855,13 +7979,13 @@
       </p:sp>
       <p:sp>
         <p:nvSpPr>
-          <p:cNvPr id="25" name="Rectangle 24"/>
+          <p:cNvPr id="26" name="Rectangle 25"/>
           <p:cNvSpPr/>
           <p:nvPr/>
         </p:nvSpPr>
         <p:spPr>
           <a:xfrm>
-            <a:off x="457200" y="4892040"/>
+            <a:off x="457200" y="4983480"/>
             <a:ext cx="11247120" cy="841248"/>
           </a:xfrm>
           <a:prstGeom prst="rect">
@@ -6900,13 +8024,13 @@
       </p:sp>
       <p:sp>
         <p:nvSpPr>
-          <p:cNvPr id="26" name="TextBox 25"/>
-          <p:cNvSpPr txBox="1"/>
-          <p:nvPr/>
-        </p:nvSpPr>
-        <p:spPr>
-          <a:xfrm>
-            <a:off x="640080" y="5093207"/>
+          <p:cNvPr id="27" name="TextBox 26"/>
+          <p:cNvSpPr txBox="1"/>
+          <p:nvPr/>
+        </p:nvSpPr>
+        <p:spPr>
+          <a:xfrm>
+            <a:off x="640080" y="5184648"/>
             <a:ext cx="457200" cy="411480"/>
           </a:xfrm>
           <a:prstGeom prst="rect">
@@ -6933,14 +8057,14 @@
       </p:sp>
       <p:sp>
         <p:nvSpPr>
-          <p:cNvPr id="27" name="TextBox 26"/>
-          <p:cNvSpPr txBox="1"/>
-          <p:nvPr/>
-        </p:nvSpPr>
-        <p:spPr>
-          <a:xfrm>
-            <a:off x="1234440" y="5001768"/>
-            <a:ext cx="2194560" cy="594360"/>
+          <p:cNvPr id="28" name="TextBox 27"/>
+          <p:cNvSpPr txBox="1"/>
+          <p:nvPr/>
+        </p:nvSpPr>
+        <p:spPr>
+          <a:xfrm>
+            <a:off x="1234440" y="5184648"/>
+            <a:ext cx="2011680" cy="457200"/>
           </a:xfrm>
           <a:prstGeom prst="rect">
             <a:avLst/>
@@ -6959,21 +8083,21 @@
                 </a:solidFill>
                 <a:latin typeface="Arial"/>
               </a:rPr>
-              <a:t>Guard tools</a:t>
-            </a:r>
-          </a:p>
-        </p:txBody>
-      </p:sp>
-      <p:sp>
-        <p:nvSpPr>
-          <p:cNvPr id="28" name="TextBox 27"/>
-          <p:cNvSpPr txBox="1"/>
-          <p:nvPr/>
-        </p:nvSpPr>
-        <p:spPr>
-          <a:xfrm>
-            <a:off x="3566160" y="5120640"/>
-            <a:ext cx="7863840" cy="457200"/>
+              <a:t>Guard</a:t>
+            </a:r>
+          </a:p>
+        </p:txBody>
+      </p:sp>
+      <p:sp>
+        <p:nvSpPr>
+          <p:cNvPr id="29" name="TextBox 28"/>
+          <p:cNvSpPr txBox="1"/>
+          <p:nvPr/>
+        </p:nvSpPr>
+        <p:spPr>
+          <a:xfrm>
+            <a:off x="3383280" y="5184648"/>
+            <a:ext cx="8046720" cy="502920"/>
           </a:xfrm>
           <a:prstGeom prst="rect">
             <a:avLst/>
@@ -6986,20 +8110,20 @@
           <a:p>
             <a:pPr algn="l"/>
             <a:r>
-              <a:rPr sz="1500" b="0">
+              <a:rPr sz="1400" b="0">
                 <a:solidFill>
                   <a:srgbClr val="5B667A"/>
                 </a:solidFill>
                 <a:latin typeface="Arial"/>
               </a:rPr>
-              <a:t>Before a side effect, the tool firewall checks taint, destination, and canaries.</a:t>
+              <a:t>The tool firewall denies a tainted send-email even when text scanning is off.</a:t>
             </a:r>
           </a:p>
         </p:txBody>
       </p:sp>
       <p:pic>
         <p:nvPicPr>
-          <p:cNvPr id="29" name="Picture 28" descr="favicon-512.png"/>
+          <p:cNvPr id="30" name="Picture 29" descr="favicon-512.png"/>
           <p:cNvPicPr>
             <a:picLocks noChangeAspect="1"/>
           </p:cNvPicPr>
@@ -7023,7 +8147,7 @@
       </p:pic>
       <p:sp>
         <p:nvSpPr>
-          <p:cNvPr id="30" name="TextBox 29"/>
+          <p:cNvPr id="31" name="TextBox 30"/>
           <p:cNvSpPr txBox="1"/>
           <p:nvPr/>
         </p:nvSpPr>
@@ -7056,7 +8180,7 @@
       </p:sp>
       <p:sp>
         <p:nvSpPr>
-          <p:cNvPr id="31" name="TextBox 30"/>
+          <p:cNvPr id="32" name="TextBox 31"/>
           <p:cNvSpPr txBox="1"/>
           <p:nvPr/>
         </p:nvSpPr>
@@ -7082,7 +8206,7 @@
                 </a:solidFill>
                 <a:latin typeface="Arial"/>
               </a:rPr>
-              <a:t>4  /  8</a:t>
+              <a:t>4  /  10</a:t>
             </a:r>
           </a:p>
         </p:txBody>
@@ -7176,21 +8300,54 @@
                 </a:solidFill>
                 <a:latin typeface="Arial"/>
               </a:rPr>
-              <a:t>What the video shows</a:t>
-            </a:r>
-          </a:p>
-        </p:txBody>
-      </p:sp>
-      <p:sp>
-        <p:nvSpPr>
-          <p:cNvPr id="4" name="Rectangle 3"/>
+              <a:t>AI capabilities</a:t>
+            </a:r>
+          </a:p>
+        </p:txBody>
+      </p:sp>
+      <p:sp>
+        <p:nvSpPr>
+          <p:cNvPr id="4" name="TextBox 3"/>
+          <p:cNvSpPr txBox="1"/>
+          <p:nvPr/>
+        </p:nvSpPr>
+        <p:spPr>
+          <a:xfrm>
+            <a:off x="457200" y="868680"/>
+            <a:ext cx="10972800" cy="320040"/>
+          </a:xfrm>
+          <a:prstGeom prst="rect">
+            <a:avLst/>
+          </a:prstGeom>
+          <a:noFill/>
+        </p:spPr>
+        <p:txBody>
+          <a:bodyPr wrap="square" anchor="t"/>
+          <a:lstStyle/>
+          <a:p>
+            <a:pPr algn="l"/>
+            <a:r>
+              <a:rPr sz="1600" b="0">
+                <a:solidFill>
+                  <a:srgbClr val="5B667A"/>
+                </a:solidFill>
+                <a:latin typeface="Arial"/>
+              </a:rPr>
+              <a:t>What actually decides, and what the demo measured.</a:t>
+            </a:r>
+          </a:p>
+        </p:txBody>
+      </p:sp>
+      <p:sp>
+        <p:nvSpPr>
+          <p:cNvPr id="5" name="Rectangle 4"/>
           <p:cNvSpPr/>
           <p:nvPr/>
         </p:nvSpPr>
         <p:spPr>
           <a:xfrm>
-            <a:off x="512064" y="1197864"/>
-            <a:ext cx="3611880" cy="2103120"/>
+            <a:off x="512064" y="1472184"/>
+            <a:ext cx="5577840" cy="1965960"/>
           </a:xfrm>
           <a:prstGeom prst="rect">
             <a:avLst/>
@@ -7226,14 +8383,14 @@
       </p:sp>
       <p:sp>
         <p:nvSpPr>
-          <p:cNvPr id="5" name="Rectangle 4"/>
+          <p:cNvPr id="6" name="Rectangle 5"/>
           <p:cNvSpPr/>
           <p:nvPr/>
         </p:nvSpPr>
         <p:spPr>
           <a:xfrm>
-            <a:off x="457200" y="1143000"/>
-            <a:ext cx="3611880" cy="2103120"/>
+            <a:off x="457200" y="1417320"/>
+            <a:ext cx="5577840" cy="1965960"/>
           </a:xfrm>
           <a:prstGeom prst="rect">
             <a:avLst/>
@@ -7271,14 +8428,14 @@
       </p:sp>
       <p:sp>
         <p:nvSpPr>
-          <p:cNvPr id="6" name="TextBox 5"/>
-          <p:cNvSpPr txBox="1"/>
-          <p:nvPr/>
-        </p:nvSpPr>
-        <p:spPr>
-          <a:xfrm>
-            <a:off x="685800" y="1371600"/>
-            <a:ext cx="3108960" cy="365760"/>
+          <p:cNvPr id="7" name="TextBox 6"/>
+          <p:cNvSpPr txBox="1"/>
+          <p:nvPr/>
+        </p:nvSpPr>
+        <p:spPr>
+          <a:xfrm>
+            <a:off x="731520" y="1645920"/>
+            <a:ext cx="1097280" cy="365760"/>
           </a:xfrm>
           <a:prstGeom prst="rect">
             <a:avLst/>
@@ -7304,14 +8461,14 @@
       </p:sp>
       <p:sp>
         <p:nvSpPr>
-          <p:cNvPr id="7" name="TextBox 6"/>
-          <p:cNvSpPr txBox="1"/>
-          <p:nvPr/>
-        </p:nvSpPr>
-        <p:spPr>
-          <a:xfrm>
-            <a:off x="685800" y="1783080"/>
-            <a:ext cx="3154680" cy="411480"/>
+          <p:cNvPr id="8" name="TextBox 7"/>
+          <p:cNvSpPr txBox="1"/>
+          <p:nvPr/>
+        </p:nvSpPr>
+        <p:spPr>
+          <a:xfrm>
+            <a:off x="731520" y="2057400"/>
+            <a:ext cx="5029200" cy="411480"/>
           </a:xfrm>
           <a:prstGeom prst="rect">
             <a:avLst/>
@@ -7324,27 +8481,27 @@
           <a:p>
             <a:pPr algn="l"/>
             <a:r>
-              <a:rPr sz="2000" b="1">
+              <a:rPr sz="2200" b="1">
                 <a:solidFill>
                   <a:srgbClr val="0E1726"/>
                 </a:solidFill>
                 <a:latin typeface="Arial"/>
               </a:rPr>
-              <a:t>Landing</a:t>
-            </a:r>
-          </a:p>
-        </p:txBody>
-      </p:sp>
-      <p:sp>
-        <p:nvSpPr>
-          <p:cNvPr id="8" name="TextBox 7"/>
-          <p:cNvSpPr txBox="1"/>
-          <p:nvPr/>
-        </p:nvSpPr>
-        <p:spPr>
-          <a:xfrm>
-            <a:off x="685800" y="2286000"/>
-            <a:ext cx="3154680" cy="731520"/>
+              <a:t>Signatures</a:t>
+            </a:r>
+          </a:p>
+        </p:txBody>
+      </p:sp>
+      <p:sp>
+        <p:nvSpPr>
+          <p:cNvPr id="9" name="TextBox 8"/>
+          <p:cNvSpPr txBox="1"/>
+          <p:nvPr/>
+        </p:nvSpPr>
+        <p:spPr>
+          <a:xfrm>
+            <a:off x="731520" y="2560320"/>
+            <a:ext cx="5029200" cy="640080"/>
           </a:xfrm>
           <a:prstGeom prst="rect">
             <a:avLst/>
@@ -7357,27 +8514,27 @@
           <a:p>
             <a:pPr algn="l"/>
             <a:r>
-              <a:rPr sz="1400" b="0">
+              <a:rPr sz="1500" b="0">
                 <a:solidFill>
                   <a:srgbClr val="5B667A"/>
                 </a:solidFill>
                 <a:latin typeface="Arial"/>
               </a:rPr>
-              <a:t>One specimen email. Ultraviolet marks only the hidden instruction.</a:t>
-            </a:r>
-          </a:p>
-        </p:txBody>
-      </p:sp>
-      <p:sp>
-        <p:nvSpPr>
-          <p:cNvPr id="9" name="Rectangle 8"/>
+              <a:t>Deterministic rules run first. They name the span and the reason code.</a:t>
+            </a:r>
+          </a:p>
+        </p:txBody>
+      </p:sp>
+      <p:sp>
+        <p:nvSpPr>
+          <p:cNvPr id="10" name="Rectangle 9"/>
           <p:cNvSpPr/>
           <p:nvPr/>
         </p:nvSpPr>
         <p:spPr>
           <a:xfrm>
-            <a:off x="4352544" y="1197864"/>
-            <a:ext cx="3611880" cy="2103120"/>
+            <a:off x="6364224" y="1472184"/>
+            <a:ext cx="5577840" cy="1965960"/>
           </a:xfrm>
           <a:prstGeom prst="rect">
             <a:avLst/>
@@ -7413,14 +8570,14 @@
       </p:sp>
       <p:sp>
         <p:nvSpPr>
-          <p:cNvPr id="10" name="Rectangle 9"/>
+          <p:cNvPr id="11" name="Rectangle 10"/>
           <p:cNvSpPr/>
           <p:nvPr/>
         </p:nvSpPr>
         <p:spPr>
           <a:xfrm>
-            <a:off x="4297680" y="1143000"/>
-            <a:ext cx="3611880" cy="2103120"/>
+            <a:off x="6309360" y="1417320"/>
+            <a:ext cx="5577840" cy="1965960"/>
           </a:xfrm>
           <a:prstGeom prst="rect">
             <a:avLst/>
@@ -7458,14 +8615,14 @@
       </p:sp>
       <p:sp>
         <p:nvSpPr>
-          <p:cNvPr id="11" name="TextBox 10"/>
-          <p:cNvSpPr txBox="1"/>
-          <p:nvPr/>
-        </p:nvSpPr>
-        <p:spPr>
-          <a:xfrm>
-            <a:off x="4526280" y="1371600"/>
-            <a:ext cx="3108960" cy="365760"/>
+          <p:cNvPr id="12" name="TextBox 11"/>
+          <p:cNvSpPr txBox="1"/>
+          <p:nvPr/>
+        </p:nvSpPr>
+        <p:spPr>
+          <a:xfrm>
+            <a:off x="6583680" y="1645920"/>
+            <a:ext cx="1097280" cy="365760"/>
           </a:xfrm>
           <a:prstGeom prst="rect">
             <a:avLst/>
@@ -7491,14 +8648,14 @@
       </p:sp>
       <p:sp>
         <p:nvSpPr>
-          <p:cNvPr id="12" name="TextBox 11"/>
-          <p:cNvSpPr txBox="1"/>
-          <p:nvPr/>
-        </p:nvSpPr>
-        <p:spPr>
-          <a:xfrm>
-            <a:off x="4526280" y="1783080"/>
-            <a:ext cx="3154680" cy="411480"/>
+          <p:cNvPr id="13" name="TextBox 12"/>
+          <p:cNvSpPr txBox="1"/>
+          <p:nvPr/>
+        </p:nvSpPr>
+        <p:spPr>
+          <a:xfrm>
+            <a:off x="6583680" y="2057400"/>
+            <a:ext cx="5029200" cy="411480"/>
           </a:xfrm>
           <a:prstGeom prst="rect">
             <a:avLst/>
@@ -7511,27 +8668,27 @@
           <a:p>
             <a:pPr algn="l"/>
             <a:r>
-              <a:rPr sz="2000" b="1">
+              <a:rPr sz="2200" b="1">
                 <a:solidFill>
                   <a:srgbClr val="0E1726"/>
                 </a:solidFill>
                 <a:latin typeface="Arial"/>
               </a:rPr>
-              <a:t>Arena</a:t>
-            </a:r>
-          </a:p>
-        </p:txBody>
-      </p:sp>
-      <p:sp>
-        <p:nvSpPr>
-          <p:cNvPr id="13" name="TextBox 12"/>
-          <p:cNvSpPr txBox="1"/>
-          <p:nvPr/>
-        </p:nvSpPr>
-        <p:spPr>
-          <a:xfrm>
-            <a:off x="4526280" y="2286000"/>
-            <a:ext cx="3154680" cy="731520"/>
+              <a:t>Classifier</a:t>
+            </a:r>
+          </a:p>
+        </p:txBody>
+      </p:sp>
+      <p:sp>
+        <p:nvSpPr>
+          <p:cNvPr id="14" name="TextBox 13"/>
+          <p:cNvSpPr txBox="1"/>
+          <p:nvPr/>
+        </p:nvSpPr>
+        <p:spPr>
+          <a:xfrm>
+            <a:off x="6583680" y="2560320"/>
+            <a:ext cx="5029200" cy="640080"/>
           </a:xfrm>
           <a:prstGeom prst="rect">
             <a:avLst/>
@@ -7544,27 +8701,27 @@
           <a:p>
             <a:pPr algn="l"/>
             <a:r>
-              <a:rPr sz="1400" b="0">
+              <a:rPr sz="1500" b="0">
                 <a:solidFill>
                   <a:srgbClr val="5B667A"/>
                 </a:solidFill>
                 <a:latin typeface="Arial"/>
               </a:rPr>
-              <a:t>The same email, firewall off and on. The unprotected agent follows the hidden line.</a:t>
-            </a:r>
-          </a:p>
-        </p:txBody>
-      </p:sp>
-      <p:sp>
-        <p:nvSpPr>
-          <p:cNvPr id="14" name="Rectangle 13"/>
+              <a:t>A small local model runs next. It is not a large language model.</a:t>
+            </a:r>
+          </a:p>
+        </p:txBody>
+      </p:sp>
+      <p:sp>
+        <p:nvSpPr>
+          <p:cNvPr id="15" name="Rectangle 14"/>
           <p:cNvSpPr/>
           <p:nvPr/>
         </p:nvSpPr>
         <p:spPr>
           <a:xfrm>
-            <a:off x="8193024" y="1197864"/>
-            <a:ext cx="3611880" cy="2103120"/>
+            <a:off x="512064" y="3666744"/>
+            <a:ext cx="5577840" cy="1965960"/>
           </a:xfrm>
           <a:prstGeom prst="rect">
             <a:avLst/>
@@ -7600,14 +8757,14 @@
       </p:sp>
       <p:sp>
         <p:nvSpPr>
-          <p:cNvPr id="15" name="Rectangle 14"/>
+          <p:cNvPr id="16" name="Rectangle 15"/>
           <p:cNvSpPr/>
           <p:nvPr/>
         </p:nvSpPr>
         <p:spPr>
           <a:xfrm>
-            <a:off x="8138160" y="1143000"/>
-            <a:ext cx="3611880" cy="2103120"/>
+            <a:off x="457200" y="3611880"/>
+            <a:ext cx="5577840" cy="1965960"/>
           </a:xfrm>
           <a:prstGeom prst="rect">
             <a:avLst/>
@@ -7645,14 +8802,14 @@
       </p:sp>
       <p:sp>
         <p:nvSpPr>
-          <p:cNvPr id="16" name="TextBox 15"/>
-          <p:cNvSpPr txBox="1"/>
-          <p:nvPr/>
-        </p:nvSpPr>
-        <p:spPr>
-          <a:xfrm>
-            <a:off x="8366760" y="1371600"/>
-            <a:ext cx="3108960" cy="365760"/>
+          <p:cNvPr id="17" name="TextBox 16"/>
+          <p:cNvSpPr txBox="1"/>
+          <p:nvPr/>
+        </p:nvSpPr>
+        <p:spPr>
+          <a:xfrm>
+            <a:off x="731520" y="3840480"/>
+            <a:ext cx="1097280" cy="365760"/>
           </a:xfrm>
           <a:prstGeom prst="rect">
             <a:avLst/>
@@ -7678,14 +8835,14 @@
       </p:sp>
       <p:sp>
         <p:nvSpPr>
-          <p:cNvPr id="17" name="TextBox 16"/>
-          <p:cNvSpPr txBox="1"/>
-          <p:nvPr/>
-        </p:nvSpPr>
-        <p:spPr>
-          <a:xfrm>
-            <a:off x="8366760" y="1783080"/>
-            <a:ext cx="3154680" cy="411480"/>
+          <p:cNvPr id="18" name="TextBox 17"/>
+          <p:cNvSpPr txBox="1"/>
+          <p:nvPr/>
+        </p:nvSpPr>
+        <p:spPr>
+          <a:xfrm>
+            <a:off x="731520" y="4251960"/>
+            <a:ext cx="5029200" cy="411480"/>
           </a:xfrm>
           <a:prstGeom prst="rect">
             <a:avLst/>
@@ -7698,27 +8855,27 @@
           <a:p>
             <a:pPr algn="l"/>
             <a:r>
-              <a:rPr sz="2000" b="1">
+              <a:rPr sz="2200" b="1">
                 <a:solidFill>
                   <a:srgbClr val="0E1726"/>
                 </a:solidFill>
                 <a:latin typeface="Arial"/>
               </a:rPr>
-              <a:t>X-ray</a:t>
-            </a:r>
-          </a:p>
-        </p:txBody>
-      </p:sp>
-      <p:sp>
-        <p:nvSpPr>
-          <p:cNvPr id="18" name="TextBox 17"/>
-          <p:cNvSpPr txBox="1"/>
-          <p:nvPr/>
-        </p:nvSpPr>
-        <p:spPr>
-          <a:xfrm>
-            <a:off x="8366760" y="2286000"/>
-            <a:ext cx="3154680" cy="731520"/>
+              <a:t>Judge</a:t>
+            </a:r>
+          </a:p>
+        </p:txBody>
+      </p:sp>
+      <p:sp>
+        <p:nvSpPr>
+          <p:cNvPr id="19" name="TextBox 18"/>
+          <p:cNvSpPr txBox="1"/>
+          <p:nvPr/>
+        </p:nvSpPr>
+        <p:spPr>
+          <a:xfrm>
+            <a:off x="731520" y="4754880"/>
+            <a:ext cx="5029200" cy="640080"/>
           </a:xfrm>
           <a:prstGeom prst="rect">
             <a:avLst/>
@@ -7731,27 +8888,27 @@
           <a:p>
             <a:pPr algn="l"/>
             <a:r>
-              <a:rPr sz="1400" b="0">
+              <a:rPr sz="1500" b="0">
                 <a:solidFill>
                   <a:srgbClr val="5B667A"/>
                 </a:solidFill>
                 <a:latin typeface="Arial"/>
               </a:rPr>
-              <a:t>Revealed view, reason codes, and the safe alternative without the canary.</a:t>
-            </a:r>
-          </a:p>
-        </p:txBody>
-      </p:sp>
-      <p:sp>
-        <p:nvSpPr>
-          <p:cNvPr id="19" name="Rectangle 18"/>
+              <a:t>An optional language model may add a finding in the gray zone. It cannot block a document by itself.</a:t>
+            </a:r>
+          </a:p>
+        </p:txBody>
+      </p:sp>
+      <p:sp>
+        <p:nvSpPr>
+          <p:cNvPr id="20" name="Rectangle 19"/>
           <p:cNvSpPr/>
           <p:nvPr/>
         </p:nvSpPr>
         <p:spPr>
           <a:xfrm>
-            <a:off x="512064" y="3529584"/>
-            <a:ext cx="3611880" cy="2103120"/>
+            <a:off x="6364224" y="3666744"/>
+            <a:ext cx="5577840" cy="1965960"/>
           </a:xfrm>
           <a:prstGeom prst="rect">
             <a:avLst/>
@@ -7787,14 +8944,14 @@
       </p:sp>
       <p:sp>
         <p:nvSpPr>
-          <p:cNvPr id="20" name="Rectangle 19"/>
+          <p:cNvPr id="21" name="Rectangle 20"/>
           <p:cNvSpPr/>
           <p:nvPr/>
         </p:nvSpPr>
         <p:spPr>
           <a:xfrm>
-            <a:off x="457200" y="3474720"/>
-            <a:ext cx="3611880" cy="2103120"/>
+            <a:off x="6309360" y="3611880"/>
+            <a:ext cx="5577840" cy="1965960"/>
           </a:xfrm>
           <a:prstGeom prst="rect">
             <a:avLst/>
@@ -7832,14 +8989,14 @@
       </p:sp>
       <p:sp>
         <p:nvSpPr>
-          <p:cNvPr id="21" name="TextBox 20"/>
-          <p:cNvSpPr txBox="1"/>
-          <p:nvPr/>
-        </p:nvSpPr>
-        <p:spPr>
-          <a:xfrm>
-            <a:off x="685800" y="3703320"/>
-            <a:ext cx="3108960" cy="365760"/>
+          <p:cNvPr id="22" name="TextBox 21"/>
+          <p:cNvSpPr txBox="1"/>
+          <p:nvPr/>
+        </p:nvSpPr>
+        <p:spPr>
+          <a:xfrm>
+            <a:off x="6583680" y="3840480"/>
+            <a:ext cx="1097280" cy="365760"/>
           </a:xfrm>
           <a:prstGeom prst="rect">
             <a:avLst/>
@@ -7865,14 +9022,14 @@
       </p:sp>
       <p:sp>
         <p:nvSpPr>
-          <p:cNvPr id="22" name="TextBox 21"/>
-          <p:cNvSpPr txBox="1"/>
-          <p:nvPr/>
-        </p:nvSpPr>
-        <p:spPr>
-          <a:xfrm>
-            <a:off x="685800" y="4114800"/>
-            <a:ext cx="3154680" cy="411480"/>
+          <p:cNvPr id="23" name="TextBox 22"/>
+          <p:cNvSpPr txBox="1"/>
+          <p:nvPr/>
+        </p:nvSpPr>
+        <p:spPr>
+          <a:xfrm>
+            <a:off x="6583680" y="4251960"/>
+            <a:ext cx="5029200" cy="411480"/>
           </a:xfrm>
           <a:prstGeom prst="rect">
             <a:avLst/>
@@ -7885,27 +9042,27 @@
           <a:p>
             <a:pPr algn="l"/>
             <a:r>
-              <a:rPr sz="2000" b="1">
+              <a:rPr sz="2200" b="1">
                 <a:solidFill>
                   <a:srgbClr val="0E1726"/>
                 </a:solidFill>
                 <a:latin typeface="Arial"/>
               </a:rPr>
-              <a:t>Clean pass</a:t>
-            </a:r>
-          </a:p>
-        </p:txBody>
-      </p:sp>
-      <p:sp>
-        <p:nvSpPr>
-          <p:cNvPr id="23" name="TextBox 22"/>
-          <p:cNvSpPr txBox="1"/>
-          <p:nvPr/>
-        </p:nvSpPr>
-        <p:spPr>
-          <a:xfrm>
-            <a:off x="685800" y="4617720"/>
-            <a:ext cx="3154680" cy="731520"/>
+              <a:t>Demo agent</a:t>
+            </a:r>
+          </a:p>
+        </p:txBody>
+      </p:sp>
+      <p:sp>
+        <p:nvSpPr>
+          <p:cNvPr id="24" name="TextBox 23"/>
+          <p:cNvSpPr txBox="1"/>
+          <p:nvPr/>
+        </p:nvSpPr>
+        <p:spPr>
+          <a:xfrm>
+            <a:off x="6583680" y="4754880"/>
+            <a:ext cx="5029200" cy="640080"/>
           </a:xfrm>
           <a:prstGeom prst="rect">
             <a:avLst/>
@@ -7918,394 +9075,20 @@
           <a:p>
             <a:pPr algn="l"/>
             <a:r>
-              <a:rPr sz="1400" b="0">
+              <a:rPr sz="1500" b="0">
                 <a:solidFill>
                   <a:srgbClr val="5B667A"/>
                 </a:solidFill>
                 <a:latin typeface="Arial"/>
               </a:rPr>
-              <a:t>A normal security article stays Allowed.</a:t>
-            </a:r>
-          </a:p>
-        </p:txBody>
-      </p:sp>
-      <p:sp>
-        <p:nvSpPr>
-          <p:cNvPr id="24" name="Rectangle 23"/>
-          <p:cNvSpPr/>
-          <p:nvPr/>
-        </p:nvSpPr>
-        <p:spPr>
-          <a:xfrm>
-            <a:off x="4352544" y="3529584"/>
-            <a:ext cx="3611880" cy="2103120"/>
-          </a:xfrm>
-          <a:prstGeom prst="rect">
-            <a:avLst/>
-          </a:prstGeom>
-          <a:solidFill>
-            <a:srgbClr val="0E1726"/>
-          </a:solidFill>
-          <a:ln>
-            <a:noFill/>
-          </a:ln>
-        </p:spPr>
-        <p:style>
-          <a:lnRef idx="1">
-            <a:schemeClr val="accent1"/>
-          </a:lnRef>
-          <a:fillRef idx="3">
-            <a:schemeClr val="accent1"/>
-          </a:fillRef>
-          <a:effectRef idx="2">
-            <a:schemeClr val="accent1"/>
-          </a:effectRef>
-          <a:fontRef idx="minor">
-            <a:schemeClr val="lt1"/>
-          </a:fontRef>
-        </p:style>
-        <p:txBody>
-          <a:bodyPr rtlCol="0" anchor="ctr"/>
-          <a:lstStyle/>
-          <a:p>
-            <a:pPr algn="ctr"/>
-          </a:p>
-        </p:txBody>
-      </p:sp>
-      <p:sp>
-        <p:nvSpPr>
-          <p:cNvPr id="25" name="Rectangle 24"/>
-          <p:cNvSpPr/>
-          <p:nvPr/>
-        </p:nvSpPr>
-        <p:spPr>
-          <a:xfrm>
-            <a:off x="4297680" y="3474720"/>
-            <a:ext cx="3611880" cy="2103120"/>
-          </a:xfrm>
-          <a:prstGeom prst="rect">
-            <a:avLst/>
-          </a:prstGeom>
-          <a:solidFill>
-            <a:srgbClr val="FFFFFF"/>
-          </a:solidFill>
-          <a:ln w="19050">
-            <a:solidFill>
-              <a:srgbClr val="0E1726"/>
-            </a:solidFill>
-          </a:ln>
-        </p:spPr>
-        <p:style>
-          <a:lnRef idx="1">
-            <a:schemeClr val="accent1"/>
-          </a:lnRef>
-          <a:fillRef idx="3">
-            <a:schemeClr val="accent1"/>
-          </a:fillRef>
-          <a:effectRef idx="2">
-            <a:schemeClr val="accent1"/>
-          </a:effectRef>
-          <a:fontRef idx="minor">
-            <a:schemeClr val="lt1"/>
-          </a:fontRef>
-        </p:style>
-        <p:txBody>
-          <a:bodyPr rtlCol="0" anchor="ctr"/>
-          <a:lstStyle/>
-          <a:p>
-            <a:pPr algn="ctr"/>
-          </a:p>
-        </p:txBody>
-      </p:sp>
-      <p:sp>
-        <p:nvSpPr>
-          <p:cNvPr id="26" name="TextBox 25"/>
-          <p:cNvSpPr txBox="1"/>
-          <p:nvPr/>
-        </p:nvSpPr>
-        <p:spPr>
-          <a:xfrm>
-            <a:off x="4526280" y="3703320"/>
-            <a:ext cx="3108960" cy="365760"/>
-          </a:xfrm>
-          <a:prstGeom prst="rect">
-            <a:avLst/>
-          </a:prstGeom>
-          <a:noFill/>
-        </p:spPr>
-        <p:txBody>
-          <a:bodyPr wrap="square" anchor="t"/>
-          <a:lstStyle/>
-          <a:p>
-            <a:pPr algn="l"/>
-            <a:r>
-              <a:rPr sz="1600" b="1">
-                <a:solidFill>
-                  <a:srgbClr val="6A4DFF"/>
-                </a:solidFill>
-                <a:latin typeface="Arial"/>
-              </a:rPr>
-              <a:t>05</a:t>
-            </a:r>
-          </a:p>
-        </p:txBody>
-      </p:sp>
-      <p:sp>
-        <p:nvSpPr>
-          <p:cNvPr id="27" name="TextBox 26"/>
-          <p:cNvSpPr txBox="1"/>
-          <p:nvPr/>
-        </p:nvSpPr>
-        <p:spPr>
-          <a:xfrm>
-            <a:off x="4526280" y="4114800"/>
-            <a:ext cx="3154680" cy="411480"/>
-          </a:xfrm>
-          <a:prstGeom prst="rect">
-            <a:avLst/>
-          </a:prstGeom>
-          <a:noFill/>
-        </p:spPr>
-        <p:txBody>
-          <a:bodyPr wrap="square" anchor="t"/>
-          <a:lstStyle/>
-          <a:p>
-            <a:pPr algn="l"/>
-            <a:r>
-              <a:rPr sz="2000" b="1">
-                <a:solidFill>
-                  <a:srgbClr val="0E1726"/>
-                </a:solidFill>
-                <a:latin typeface="Arial"/>
-              </a:rPr>
-              <a:t>Last line</a:t>
-            </a:r>
-          </a:p>
-        </p:txBody>
-      </p:sp>
-      <p:sp>
-        <p:nvSpPr>
-          <p:cNvPr id="28" name="TextBox 27"/>
-          <p:cNvSpPr txBox="1"/>
-          <p:nvPr/>
-        </p:nvSpPr>
-        <p:spPr>
-          <a:xfrm>
-            <a:off x="4526280" y="4617720"/>
-            <a:ext cx="3154680" cy="731520"/>
-          </a:xfrm>
-          <a:prstGeom prst="rect">
-            <a:avLst/>
-          </a:prstGeom>
-          <a:noFill/>
-        </p:spPr>
-        <p:txBody>
-          <a:bodyPr wrap="square" anchor="t"/>
-          <a:lstStyle/>
-          <a:p>
-            <a:pPr algn="l"/>
-            <a:r>
-              <a:rPr sz="1400" b="0">
-                <a:solidFill>
-                  <a:srgbClr val="5B667A"/>
-                </a:solidFill>
-                <a:latin typeface="Arial"/>
-              </a:rPr>
-              <a:t>Text scanning off. A tainted send-email is still denied.</a:t>
-            </a:r>
-          </a:p>
-        </p:txBody>
-      </p:sp>
-      <p:sp>
-        <p:nvSpPr>
-          <p:cNvPr id="29" name="Rectangle 28"/>
-          <p:cNvSpPr/>
-          <p:nvPr/>
-        </p:nvSpPr>
-        <p:spPr>
-          <a:xfrm>
-            <a:off x="8193024" y="3529584"/>
-            <a:ext cx="3611880" cy="2103120"/>
-          </a:xfrm>
-          <a:prstGeom prst="rect">
-            <a:avLst/>
-          </a:prstGeom>
-          <a:solidFill>
-            <a:srgbClr val="0E1726"/>
-          </a:solidFill>
-          <a:ln>
-            <a:noFill/>
-          </a:ln>
-        </p:spPr>
-        <p:style>
-          <a:lnRef idx="1">
-            <a:schemeClr val="accent1"/>
-          </a:lnRef>
-          <a:fillRef idx="3">
-            <a:schemeClr val="accent1"/>
-          </a:fillRef>
-          <a:effectRef idx="2">
-            <a:schemeClr val="accent1"/>
-          </a:effectRef>
-          <a:fontRef idx="minor">
-            <a:schemeClr val="lt1"/>
-          </a:fontRef>
-        </p:style>
-        <p:txBody>
-          <a:bodyPr rtlCol="0" anchor="ctr"/>
-          <a:lstStyle/>
-          <a:p>
-            <a:pPr algn="ctr"/>
-          </a:p>
-        </p:txBody>
-      </p:sp>
-      <p:sp>
-        <p:nvSpPr>
-          <p:cNvPr id="30" name="Rectangle 29"/>
-          <p:cNvSpPr/>
-          <p:nvPr/>
-        </p:nvSpPr>
-        <p:spPr>
-          <a:xfrm>
-            <a:off x="8138160" y="3474720"/>
-            <a:ext cx="3611880" cy="2103120"/>
-          </a:xfrm>
-          <a:prstGeom prst="rect">
-            <a:avLst/>
-          </a:prstGeom>
-          <a:solidFill>
-            <a:srgbClr val="FFFFFF"/>
-          </a:solidFill>
-          <a:ln w="19050">
-            <a:solidFill>
-              <a:srgbClr val="0E1726"/>
-            </a:solidFill>
-          </a:ln>
-        </p:spPr>
-        <p:style>
-          <a:lnRef idx="1">
-            <a:schemeClr val="accent1"/>
-          </a:lnRef>
-          <a:fillRef idx="3">
-            <a:schemeClr val="accent1"/>
-          </a:fillRef>
-          <a:effectRef idx="2">
-            <a:schemeClr val="accent1"/>
-          </a:effectRef>
-          <a:fontRef idx="minor">
-            <a:schemeClr val="lt1"/>
-          </a:fontRef>
-        </p:style>
-        <p:txBody>
-          <a:bodyPr rtlCol="0" anchor="ctr"/>
-          <a:lstStyle/>
-          <a:p>
-            <a:pPr algn="ctr"/>
-          </a:p>
-        </p:txBody>
-      </p:sp>
-      <p:sp>
-        <p:nvSpPr>
-          <p:cNvPr id="31" name="TextBox 30"/>
-          <p:cNvSpPr txBox="1"/>
-          <p:nvPr/>
-        </p:nvSpPr>
-        <p:spPr>
-          <a:xfrm>
-            <a:off x="8366760" y="3703320"/>
-            <a:ext cx="3108960" cy="365760"/>
-          </a:xfrm>
-          <a:prstGeom prst="rect">
-            <a:avLst/>
-          </a:prstGeom>
-          <a:noFill/>
-        </p:spPr>
-        <p:txBody>
-          <a:bodyPr wrap="square" anchor="t"/>
-          <a:lstStyle/>
-          <a:p>
-            <a:pPr algn="l"/>
-            <a:r>
-              <a:rPr sz="1600" b="1">
-                <a:solidFill>
-                  <a:srgbClr val="6A4DFF"/>
-                </a:solidFill>
-                <a:latin typeface="Arial"/>
-              </a:rPr>
-              <a:t>06</a:t>
-            </a:r>
-          </a:p>
-        </p:txBody>
-      </p:sp>
-      <p:sp>
-        <p:nvSpPr>
-          <p:cNvPr id="32" name="TextBox 31"/>
-          <p:cNvSpPr txBox="1"/>
-          <p:nvPr/>
-        </p:nvSpPr>
-        <p:spPr>
-          <a:xfrm>
-            <a:off x="8366760" y="4114800"/>
-            <a:ext cx="3154680" cy="411480"/>
-          </a:xfrm>
-          <a:prstGeom prst="rect">
-            <a:avLst/>
-          </a:prstGeom>
-          <a:noFill/>
-        </p:spPr>
-        <p:txBody>
-          <a:bodyPr wrap="square" anchor="t"/>
-          <a:lstStyle/>
-          <a:p>
-            <a:pPr algn="l"/>
-            <a:r>
-              <a:rPr sz="2000" b="1">
-                <a:solidFill>
-                  <a:srgbClr val="0E1726"/>
-                </a:solidFill>
-                <a:latin typeface="Arial"/>
-              </a:rPr>
-              <a:t>Accounts</a:t>
-            </a:r>
-          </a:p>
-        </p:txBody>
-      </p:sp>
-      <p:sp>
-        <p:nvSpPr>
-          <p:cNvPr id="33" name="TextBox 32"/>
-          <p:cNvSpPr txBox="1"/>
-          <p:nvPr/>
-        </p:nvSpPr>
-        <p:spPr>
-          <a:xfrm>
-            <a:off x="8366760" y="4617720"/>
-            <a:ext cx="3154680" cy="731520"/>
-          </a:xfrm>
-          <a:prstGeom prst="rect">
-            <a:avLst/>
-          </a:prstGeom>
-          <a:noFill/>
-        </p:spPr>
-        <p:txBody>
-          <a:bodyPr wrap="square" anchor="t"/>
-          <a:lstStyle/>
-          <a:p>
-            <a:pPr algn="l"/>
-            <a:r>
-              <a:rPr sz="1400" b="0">
-                <a:solidFill>
-                  <a:srgbClr val="5B667A"/>
-                </a:solidFill>
-                <a:latin typeface="Arial"/>
-              </a:rPr>
-              <a:t>A caller scans a file. An admin sees each account’s usage.</a:t>
+              <a:t>The Arena agent is scripted, so the result repeats. A live model agent was not the measured subject.</a:t>
             </a:r>
           </a:p>
         </p:txBody>
       </p:sp>
       <p:pic>
         <p:nvPicPr>
-          <p:cNvPr id="34" name="Picture 33" descr="favicon-512.png"/>
+          <p:cNvPr id="25" name="Picture 24" descr="favicon-512.png"/>
           <p:cNvPicPr>
             <a:picLocks noChangeAspect="1"/>
           </p:cNvPicPr>
@@ -8329,7 +9112,7 @@
       </p:pic>
       <p:sp>
         <p:nvSpPr>
-          <p:cNvPr id="35" name="TextBox 34"/>
+          <p:cNvPr id="26" name="TextBox 25"/>
           <p:cNvSpPr txBox="1"/>
           <p:nvPr/>
         </p:nvSpPr>
@@ -8362,7 +9145,7 @@
       </p:sp>
       <p:sp>
         <p:nvSpPr>
-          <p:cNvPr id="36" name="TextBox 35"/>
+          <p:cNvPr id="27" name="TextBox 26"/>
           <p:cNvSpPr txBox="1"/>
           <p:nvPr/>
         </p:nvSpPr>
@@ -8388,7 +9171,7 @@
                 </a:solidFill>
                 <a:latin typeface="Arial"/>
               </a:rPr>
-              <a:t>5  /  8</a:t>
+              <a:t>5  /  10</a:t>
             </a:r>
           </a:p>
         </p:txBody>
@@ -8462,8 +9245,8 @@
         </p:nvSpPr>
         <p:spPr>
           <a:xfrm>
-            <a:off x="457200" y="256032"/>
-            <a:ext cx="10972800" cy="411480"/>
+            <a:off x="457200" y="292608"/>
+            <a:ext cx="10972800" cy="457200"/>
           </a:xfrm>
           <a:prstGeom prst="rect">
             <a:avLst/>
@@ -8476,13 +9259,13 @@
           <a:p>
             <a:pPr algn="l"/>
             <a:r>
-              <a:rPr sz="2800" b="1">
+              <a:rPr sz="3200" b="1">
                 <a:solidFill>
                   <a:srgbClr val="0E1726"/>
                 </a:solidFill>
                 <a:latin typeface="Arial"/>
               </a:rPr>
-              <a:t>Measured on the frozen golden suite</a:t>
+              <a:t>Live cases</a:t>
             </a:r>
           </a:p>
         </p:txBody>
@@ -8495,8 +9278,8 @@
         </p:nvSpPr>
         <p:spPr>
           <a:xfrm>
-            <a:off x="457200" y="731520"/>
-            <a:ext cx="10972800" cy="274320"/>
+            <a:off x="457200" y="868680"/>
+            <a:ext cx="10972800" cy="320040"/>
           </a:xfrm>
           <a:prstGeom prst="rect">
             <a:avLst/>
@@ -8509,13 +9292,13 @@
           <a:p>
             <a:pPr algn="l"/>
             <a:r>
-              <a:rPr sz="1400" b="0">
+              <a:rPr sz="1600" b="0">
                 <a:solidFill>
                   <a:srgbClr val="5B667A"/>
                 </a:solidFill>
                 <a:latin typeface="Arial"/>
               </a:rPr>
-              <a:t>Judge off. Shipped policy. 11 October 2026. Not tuned on these rows.</a:t>
+              <a:t>The working demo. Each case is a claim the prototype is allowed to show.</a:t>
             </a:r>
           </a:p>
         </p:txBody>
@@ -8528,8 +9311,8 @@
         </p:nvSpPr>
         <p:spPr>
           <a:xfrm>
-            <a:off x="512064" y="1289304"/>
-            <a:ext cx="2743200" cy="1965960"/>
+            <a:off x="512064" y="1472184"/>
+            <a:ext cx="5577840" cy="1965960"/>
           </a:xfrm>
           <a:prstGeom prst="rect">
             <a:avLst/>
@@ -8571,8 +9354,8 @@
         </p:nvSpPr>
         <p:spPr>
           <a:xfrm>
-            <a:off x="457200" y="1234440"/>
-            <a:ext cx="2743200" cy="1965960"/>
+            <a:off x="457200" y="1417320"/>
+            <a:ext cx="5577840" cy="1965960"/>
           </a:xfrm>
           <a:prstGeom prst="rect">
             <a:avLst/>
@@ -8616,60 +9399,60 @@
         </p:nvSpPr>
         <p:spPr>
           <a:xfrm>
-            <a:off x="594360" y="1417320"/>
-            <a:ext cx="2468880" cy="640080"/>
-          </a:xfrm>
-          <a:prstGeom prst="rect">
-            <a:avLst/>
-          </a:prstGeom>
-          <a:noFill/>
-        </p:spPr>
-        <p:txBody>
-          <a:bodyPr wrap="square" anchor="t"/>
-          <a:lstStyle/>
-          <a:p>
-            <a:pPr algn="ctr"/>
-            <a:r>
-              <a:rPr sz="3200" b="1">
+            <a:off x="731520" y="1645920"/>
+            <a:ext cx="1097280" cy="365760"/>
+          </a:xfrm>
+          <a:prstGeom prst="rect">
+            <a:avLst/>
+          </a:prstGeom>
+          <a:noFill/>
+        </p:spPr>
+        <p:txBody>
+          <a:bodyPr wrap="square" anchor="t"/>
+          <a:lstStyle/>
+          <a:p>
+            <a:pPr algn="l"/>
+            <a:r>
+              <a:rPr sz="1600" b="1">
+                <a:solidFill>
+                  <a:srgbClr val="6A4DFF"/>
+                </a:solidFill>
+                <a:latin typeface="Arial"/>
+              </a:rPr>
+              <a:t>01</a:t>
+            </a:r>
+          </a:p>
+        </p:txBody>
+      </p:sp>
+      <p:sp>
+        <p:nvSpPr>
+          <p:cNvPr id="8" name="TextBox 7"/>
+          <p:cNvSpPr txBox="1"/>
+          <p:nvPr/>
+        </p:nvSpPr>
+        <p:spPr>
+          <a:xfrm>
+            <a:off x="731520" y="2057400"/>
+            <a:ext cx="5029200" cy="411480"/>
+          </a:xfrm>
+          <a:prstGeom prst="rect">
+            <a:avLst/>
+          </a:prstGeom>
+          <a:noFill/>
+        </p:spPr>
+        <p:txBody>
+          <a:bodyPr wrap="square" anchor="t"/>
+          <a:lstStyle/>
+          <a:p>
+            <a:pPr algn="l"/>
+            <a:r>
+              <a:rPr sz="2200" b="1">
                 <a:solidFill>
                   <a:srgbClr val="0E1726"/>
                 </a:solidFill>
                 <a:latin typeface="Arial"/>
               </a:rPr>
-              <a:t>0.61</a:t>
-            </a:r>
-          </a:p>
-        </p:txBody>
-      </p:sp>
-      <p:sp>
-        <p:nvSpPr>
-          <p:cNvPr id="8" name="TextBox 7"/>
-          <p:cNvSpPr txBox="1"/>
-          <p:nvPr/>
-        </p:nvSpPr>
-        <p:spPr>
-          <a:xfrm>
-            <a:off x="594360" y="2148840"/>
-            <a:ext cx="2468880" cy="365760"/>
-          </a:xfrm>
-          <a:prstGeom prst="rect">
-            <a:avLst/>
-          </a:prstGeom>
-          <a:noFill/>
-        </p:spPr>
-        <p:txBody>
-          <a:bodyPr wrap="square" anchor="t"/>
-          <a:lstStyle/>
-          <a:p>
-            <a:pPr algn="ctr"/>
-            <a:r>
-              <a:rPr sz="1400" b="1">
-                <a:solidFill>
-                  <a:srgbClr val="0E1726"/>
-                </a:solidFill>
-                <a:latin typeface="Arial"/>
-              </a:rPr>
-              <a:t>Acted recall</a:t>
+              <a:t>Arena</a:t>
             </a:r>
           </a:p>
         </p:txBody>
@@ -8682,27 +9465,27 @@
         </p:nvSpPr>
         <p:spPr>
           <a:xfrm>
-            <a:off x="594360" y="2560320"/>
-            <a:ext cx="2468880" cy="365760"/>
-          </a:xfrm>
-          <a:prstGeom prst="rect">
-            <a:avLst/>
-          </a:prstGeom>
-          <a:noFill/>
-        </p:spPr>
-        <p:txBody>
-          <a:bodyPr wrap="square" anchor="t"/>
-          <a:lstStyle/>
-          <a:p>
-            <a:pPr algn="ctr"/>
-            <a:r>
-              <a:rPr sz="1200" b="0">
+            <a:off x="731520" y="2560320"/>
+            <a:ext cx="5029200" cy="640080"/>
+          </a:xfrm>
+          <a:prstGeom prst="rect">
+            <a:avLst/>
+          </a:prstGeom>
+          <a:noFill/>
+        </p:spPr>
+        <p:txBody>
+          <a:bodyPr wrap="square" anchor="t"/>
+          <a:lstStyle/>
+          <a:p>
+            <a:pPr algn="l"/>
+            <a:r>
+              <a:rPr sz="1500" b="0">
                 <a:solidFill>
                   <a:srgbClr val="5B667A"/>
                 </a:solidFill>
                 <a:latin typeface="Arial"/>
               </a:rPr>
-              <a:t>900 attacks</a:t>
+              <a:t>The same email, firewall off and on. The unprotected agent follows the hidden line.</a:t>
             </a:r>
           </a:p>
         </p:txBody>
@@ -8715,8 +9498,8 @@
         </p:nvSpPr>
         <p:spPr>
           <a:xfrm>
-            <a:off x="3438144" y="1289304"/>
-            <a:ext cx="2743200" cy="1965960"/>
+            <a:off x="6364224" y="1472184"/>
+            <a:ext cx="5577840" cy="1965960"/>
           </a:xfrm>
           <a:prstGeom prst="rect">
             <a:avLst/>
@@ -8758,8 +9541,8 @@
         </p:nvSpPr>
         <p:spPr>
           <a:xfrm>
-            <a:off x="3383280" y="1234440"/>
-            <a:ext cx="2743200" cy="1965960"/>
+            <a:off x="6309360" y="1417320"/>
+            <a:ext cx="5577840" cy="1965960"/>
           </a:xfrm>
           <a:prstGeom prst="rect">
             <a:avLst/>
@@ -8803,60 +9586,60 @@
         </p:nvSpPr>
         <p:spPr>
           <a:xfrm>
-            <a:off x="3520440" y="1417320"/>
-            <a:ext cx="2468880" cy="640080"/>
-          </a:xfrm>
-          <a:prstGeom prst="rect">
-            <a:avLst/>
-          </a:prstGeom>
-          <a:noFill/>
-        </p:spPr>
-        <p:txBody>
-          <a:bodyPr wrap="square" anchor="t"/>
-          <a:lstStyle/>
-          <a:p>
-            <a:pPr algn="ctr"/>
-            <a:r>
-              <a:rPr sz="3200" b="1">
+            <a:off x="6583680" y="1645920"/>
+            <a:ext cx="1097280" cy="365760"/>
+          </a:xfrm>
+          <a:prstGeom prst="rect">
+            <a:avLst/>
+          </a:prstGeom>
+          <a:noFill/>
+        </p:spPr>
+        <p:txBody>
+          <a:bodyPr wrap="square" anchor="t"/>
+          <a:lstStyle/>
+          <a:p>
+            <a:pPr algn="l"/>
+            <a:r>
+              <a:rPr sz="1600" b="1">
+                <a:solidFill>
+                  <a:srgbClr val="6A4DFF"/>
+                </a:solidFill>
+                <a:latin typeface="Arial"/>
+              </a:rPr>
+              <a:t>02</a:t>
+            </a:r>
+          </a:p>
+        </p:txBody>
+      </p:sp>
+      <p:sp>
+        <p:nvSpPr>
+          <p:cNvPr id="13" name="TextBox 12"/>
+          <p:cNvSpPr txBox="1"/>
+          <p:nvPr/>
+        </p:nvSpPr>
+        <p:spPr>
+          <a:xfrm>
+            <a:off x="6583680" y="2057400"/>
+            <a:ext cx="5029200" cy="411480"/>
+          </a:xfrm>
+          <a:prstGeom prst="rect">
+            <a:avLst/>
+          </a:prstGeom>
+          <a:noFill/>
+        </p:spPr>
+        <p:txBody>
+          <a:bodyPr wrap="square" anchor="t"/>
+          <a:lstStyle/>
+          <a:p>
+            <a:pPr algn="l"/>
+            <a:r>
+              <a:rPr sz="2200" b="1">
                 <a:solidFill>
                   <a:srgbClr val="0E1726"/>
                 </a:solidFill>
                 <a:latin typeface="Arial"/>
               </a:rPr>
-              <a:t>0.48</a:t>
-            </a:r>
-          </a:p>
-        </p:txBody>
-      </p:sp>
-      <p:sp>
-        <p:nvSpPr>
-          <p:cNvPr id="13" name="TextBox 12"/>
-          <p:cNvSpPr txBox="1"/>
-          <p:nvPr/>
-        </p:nvSpPr>
-        <p:spPr>
-          <a:xfrm>
-            <a:off x="3520440" y="2148840"/>
-            <a:ext cx="2468880" cy="365760"/>
-          </a:xfrm>
-          <a:prstGeom prst="rect">
-            <a:avLst/>
-          </a:prstGeom>
-          <a:noFill/>
-        </p:spPr>
-        <p:txBody>
-          <a:bodyPr wrap="square" anchor="t"/>
-          <a:lstStyle/>
-          <a:p>
-            <a:pPr algn="ctr"/>
-            <a:r>
-              <a:rPr sz="1400" b="1">
-                <a:solidFill>
-                  <a:srgbClr val="0E1726"/>
-                </a:solidFill>
-                <a:latin typeface="Arial"/>
-              </a:rPr>
-              <a:t>Correct type</a:t>
+              <a:t>X-ray</a:t>
             </a:r>
           </a:p>
         </p:txBody>
@@ -8869,27 +9652,27 @@
         </p:nvSpPr>
         <p:spPr>
           <a:xfrm>
-            <a:off x="3520440" y="2560320"/>
-            <a:ext cx="2468880" cy="365760"/>
-          </a:xfrm>
-          <a:prstGeom prst="rect">
-            <a:avLst/>
-          </a:prstGeom>
-          <a:noFill/>
-        </p:spPr>
-        <p:txBody>
-          <a:bodyPr wrap="square" anchor="t"/>
-          <a:lstStyle/>
-          <a:p>
-            <a:pPr algn="ctr"/>
-            <a:r>
-              <a:rPr sz="1200" b="0">
+            <a:off x="6583680" y="2560320"/>
+            <a:ext cx="5029200" cy="640080"/>
+          </a:xfrm>
+          <a:prstGeom prst="rect">
+            <a:avLst/>
+          </a:prstGeom>
+          <a:noFill/>
+        </p:spPr>
+        <p:txBody>
+          <a:bodyPr wrap="square" anchor="t"/>
+          <a:lstStyle/>
+          <a:p>
+            <a:pPr algn="l"/>
+            <a:r>
+              <a:rPr sz="1500" b="0">
                 <a:solidFill>
                   <a:srgbClr val="5B667A"/>
                 </a:solidFill>
                 <a:latin typeface="Arial"/>
               </a:rPr>
-              <a:t>900 attacks</a:t>
+              <a:t>Revealed view, a reason code, and a safe alternative that does not keep the canary.</a:t>
             </a:r>
           </a:p>
         </p:txBody>
@@ -8902,8 +9685,8 @@
         </p:nvSpPr>
         <p:spPr>
           <a:xfrm>
-            <a:off x="6364224" y="1289304"/>
-            <a:ext cx="2743200" cy="1965960"/>
+            <a:off x="512064" y="3666744"/>
+            <a:ext cx="5577840" cy="1965960"/>
           </a:xfrm>
           <a:prstGeom prst="rect">
             <a:avLst/>
@@ -8945,8 +9728,8 @@
         </p:nvSpPr>
         <p:spPr>
           <a:xfrm>
-            <a:off x="6309360" y="1234440"/>
-            <a:ext cx="2743200" cy="1965960"/>
+            <a:off x="457200" y="3611880"/>
+            <a:ext cx="5577840" cy="1965960"/>
           </a:xfrm>
           <a:prstGeom prst="rect">
             <a:avLst/>
@@ -8990,60 +9773,60 @@
         </p:nvSpPr>
         <p:spPr>
           <a:xfrm>
-            <a:off x="6446520" y="1417320"/>
-            <a:ext cx="2468880" cy="640080"/>
-          </a:xfrm>
-          <a:prstGeom prst="rect">
-            <a:avLst/>
-          </a:prstGeom>
-          <a:noFill/>
-        </p:spPr>
-        <p:txBody>
-          <a:bodyPr wrap="square" anchor="t"/>
-          <a:lstStyle/>
-          <a:p>
-            <a:pPr algn="ctr"/>
-            <a:r>
-              <a:rPr sz="3200" b="1">
+            <a:off x="731520" y="3840480"/>
+            <a:ext cx="1097280" cy="365760"/>
+          </a:xfrm>
+          <a:prstGeom prst="rect">
+            <a:avLst/>
+          </a:prstGeom>
+          <a:noFill/>
+        </p:spPr>
+        <p:txBody>
+          <a:bodyPr wrap="square" anchor="t"/>
+          <a:lstStyle/>
+          <a:p>
+            <a:pPr algn="l"/>
+            <a:r>
+              <a:rPr sz="1600" b="1">
+                <a:solidFill>
+                  <a:srgbClr val="6A4DFF"/>
+                </a:solidFill>
+                <a:latin typeface="Arial"/>
+              </a:rPr>
+              <a:t>03</a:t>
+            </a:r>
+          </a:p>
+        </p:txBody>
+      </p:sp>
+      <p:sp>
+        <p:nvSpPr>
+          <p:cNvPr id="18" name="TextBox 17"/>
+          <p:cNvSpPr txBox="1"/>
+          <p:nvPr/>
+        </p:nvSpPr>
+        <p:spPr>
+          <a:xfrm>
+            <a:off x="731520" y="4251960"/>
+            <a:ext cx="5029200" cy="411480"/>
+          </a:xfrm>
+          <a:prstGeom prst="rect">
+            <a:avLst/>
+          </a:prstGeom>
+          <a:noFill/>
+        </p:spPr>
+        <p:txBody>
+          <a:bodyPr wrap="square" anchor="t"/>
+          <a:lstStyle/>
+          <a:p>
+            <a:pPr algn="l"/>
+            <a:r>
+              <a:rPr sz="2200" b="1">
                 <a:solidFill>
                   <a:srgbClr val="0E1726"/>
                 </a:solidFill>
                 <a:latin typeface="Arial"/>
               </a:rPr>
-              <a:t>0 / 500</a:t>
-            </a:r>
-          </a:p>
-        </p:txBody>
-      </p:sp>
-      <p:sp>
-        <p:nvSpPr>
-          <p:cNvPr id="18" name="TextBox 17"/>
-          <p:cNvSpPr txBox="1"/>
-          <p:nvPr/>
-        </p:nvSpPr>
-        <p:spPr>
-          <a:xfrm>
-            <a:off x="6446520" y="2148840"/>
-            <a:ext cx="2468880" cy="365760"/>
-          </a:xfrm>
-          <a:prstGeom prst="rect">
-            <a:avLst/>
-          </a:prstGeom>
-          <a:noFill/>
-        </p:spPr>
-        <p:txBody>
-          <a:bodyPr wrap="square" anchor="t"/>
-          <a:lstStyle/>
-          <a:p>
-            <a:pPr algn="ctr"/>
-            <a:r>
-              <a:rPr sz="1400" b="1">
-                <a:solidFill>
-                  <a:srgbClr val="0E1726"/>
-                </a:solidFill>
-                <a:latin typeface="Arial"/>
-              </a:rPr>
-              <a:t>False positives</a:t>
+              <a:t>Clean pass</a:t>
             </a:r>
           </a:p>
         </p:txBody>
@@ -9056,27 +9839,27 @@
         </p:nvSpPr>
         <p:spPr>
           <a:xfrm>
-            <a:off x="6446520" y="2560320"/>
-            <a:ext cx="2468880" cy="365760"/>
-          </a:xfrm>
-          <a:prstGeom prst="rect">
-            <a:avLst/>
-          </a:prstGeom>
-          <a:noFill/>
-        </p:spPr>
-        <p:txBody>
-          <a:bodyPr wrap="square" anchor="t"/>
-          <a:lstStyle/>
-          <a:p>
-            <a:pPr algn="ctr"/>
-            <a:r>
-              <a:rPr sz="1200" b="0">
+            <a:off x="731520" y="4754880"/>
+            <a:ext cx="5029200" cy="640080"/>
+          </a:xfrm>
+          <a:prstGeom prst="rect">
+            <a:avLst/>
+          </a:prstGeom>
+          <a:noFill/>
+        </p:spPr>
+        <p:txBody>
+          <a:bodyPr wrap="square" anchor="t"/>
+          <a:lstStyle/>
+          <a:p>
+            <a:pPr algn="l"/>
+            <a:r>
+              <a:rPr sz="1500" b="0">
                 <a:solidFill>
                   <a:srgbClr val="5B667A"/>
                 </a:solidFill>
                 <a:latin typeface="Arial"/>
               </a:rPr>
-              <a:t>Ordinary documents</a:t>
+              <a:t>A security article that only quotes an attack stays Allowed.</a:t>
             </a:r>
           </a:p>
         </p:txBody>
@@ -9089,8 +9872,8 @@
         </p:nvSpPr>
         <p:spPr>
           <a:xfrm>
-            <a:off x="9290304" y="1289304"/>
-            <a:ext cx="2743200" cy="1965960"/>
+            <a:off x="6364224" y="3666744"/>
+            <a:ext cx="5577840" cy="1965960"/>
           </a:xfrm>
           <a:prstGeom prst="rect">
             <a:avLst/>
@@ -9132,8 +9915,8 @@
         </p:nvSpPr>
         <p:spPr>
           <a:xfrm>
-            <a:off x="9235440" y="1234440"/>
-            <a:ext cx="2743200" cy="1965960"/>
+            <a:off x="6309360" y="3611880"/>
+            <a:ext cx="5577840" cy="1965960"/>
           </a:xfrm>
           <a:prstGeom prst="rect">
             <a:avLst/>
@@ -9177,60 +9960,60 @@
         </p:nvSpPr>
         <p:spPr>
           <a:xfrm>
-            <a:off x="9372600" y="1417320"/>
-            <a:ext cx="2468880" cy="640080"/>
-          </a:xfrm>
-          <a:prstGeom prst="rect">
-            <a:avLst/>
-          </a:prstGeom>
-          <a:noFill/>
-        </p:spPr>
-        <p:txBody>
-          <a:bodyPr wrap="square" anchor="t"/>
-          <a:lstStyle/>
-          <a:p>
-            <a:pPr algn="ctr"/>
-            <a:r>
-              <a:rPr sz="3200" b="1">
+            <a:off x="6583680" y="3840480"/>
+            <a:ext cx="1097280" cy="365760"/>
+          </a:xfrm>
+          <a:prstGeom prst="rect">
+            <a:avLst/>
+          </a:prstGeom>
+          <a:noFill/>
+        </p:spPr>
+        <p:txBody>
+          <a:bodyPr wrap="square" anchor="t"/>
+          <a:lstStyle/>
+          <a:p>
+            <a:pPr algn="l"/>
+            <a:r>
+              <a:rPr sz="1600" b="1">
+                <a:solidFill>
+                  <a:srgbClr val="6A4DFF"/>
+                </a:solidFill>
+                <a:latin typeface="Arial"/>
+              </a:rPr>
+              <a:t>04</a:t>
+            </a:r>
+          </a:p>
+        </p:txBody>
+      </p:sp>
+      <p:sp>
+        <p:nvSpPr>
+          <p:cNvPr id="23" name="TextBox 22"/>
+          <p:cNvSpPr txBox="1"/>
+          <p:nvPr/>
+        </p:nvSpPr>
+        <p:spPr>
+          <a:xfrm>
+            <a:off x="6583680" y="4251960"/>
+            <a:ext cx="5029200" cy="411480"/>
+          </a:xfrm>
+          <a:prstGeom prst="rect">
+            <a:avLst/>
+          </a:prstGeom>
+          <a:noFill/>
+        </p:spPr>
+        <p:txBody>
+          <a:bodyPr wrap="square" anchor="t"/>
+          <a:lstStyle/>
+          <a:p>
+            <a:pPr algn="l"/>
+            <a:r>
+              <a:rPr sz="2200" b="1">
                 <a:solidFill>
                   <a:srgbClr val="0E1726"/>
                 </a:solidFill>
                 <a:latin typeface="Arial"/>
               </a:rPr>
-              <a:t>26 ms</a:t>
-            </a:r>
-          </a:p>
-        </p:txBody>
-      </p:sp>
-      <p:sp>
-        <p:nvSpPr>
-          <p:cNvPr id="23" name="TextBox 22"/>
-          <p:cNvSpPr txBox="1"/>
-          <p:nvPr/>
-        </p:nvSpPr>
-        <p:spPr>
-          <a:xfrm>
-            <a:off x="9372600" y="2148840"/>
-            <a:ext cx="2468880" cy="365760"/>
-          </a:xfrm>
-          <a:prstGeom prst="rect">
-            <a:avLst/>
-          </a:prstGeom>
-          <a:noFill/>
-        </p:spPr>
-        <p:txBody>
-          <a:bodyPr wrap="square" anchor="t"/>
-          <a:lstStyle/>
-          <a:p>
-            <a:pPr algn="ctr"/>
-            <a:r>
-              <a:rPr sz="1400" b="1">
-                <a:solidFill>
-                  <a:srgbClr val="0E1726"/>
-                </a:solidFill>
-                <a:latin typeface="Arial"/>
-              </a:rPr>
-              <a:t>Latency p95</a:t>
+              <a:t>Tool firewall</a:t>
             </a:r>
           </a:p>
         </p:txBody>
@@ -9243,529 +10026,34 @@
         </p:nvSpPr>
         <p:spPr>
           <a:xfrm>
-            <a:off x="9372600" y="2560320"/>
-            <a:ext cx="2468880" cy="365760"/>
-          </a:xfrm>
-          <a:prstGeom prst="rect">
-            <a:avLst/>
-          </a:prstGeom>
-          <a:noFill/>
-        </p:spPr>
-        <p:txBody>
-          <a:bodyPr wrap="square" anchor="t"/>
-          <a:lstStyle/>
-          <a:p>
-            <a:pPr algn="ctr"/>
-            <a:r>
-              <a:rPr sz="1200" b="0">
+            <a:off x="6583680" y="4754880"/>
+            <a:ext cx="5029200" cy="640080"/>
+          </a:xfrm>
+          <a:prstGeom prst="rect">
+            <a:avLst/>
+          </a:prstGeom>
+          <a:noFill/>
+        </p:spPr>
+        <p:txBody>
+          <a:bodyPr wrap="square" anchor="t"/>
+          <a:lstStyle/>
+          <a:p>
+            <a:pPr algn="l"/>
+            <a:r>
+              <a:rPr sz="1500" b="0">
                 <a:solidFill>
                   <a:srgbClr val="5B667A"/>
                 </a:solidFill>
                 <a:latin typeface="Arial"/>
               </a:rPr>
-              <a:t>Without the judge</a:t>
-            </a:r>
-          </a:p>
-        </p:txBody>
-      </p:sp>
-      <p:sp>
-        <p:nvSpPr>
-          <p:cNvPr id="25" name="Rectangle 24"/>
-          <p:cNvSpPr/>
-          <p:nvPr/>
-        </p:nvSpPr>
-        <p:spPr>
-          <a:xfrm>
-            <a:off x="512064" y="3529584"/>
-            <a:ext cx="3611880" cy="1554480"/>
-          </a:xfrm>
-          <a:prstGeom prst="rect">
-            <a:avLst/>
-          </a:prstGeom>
-          <a:solidFill>
-            <a:srgbClr val="0E1726"/>
-          </a:solidFill>
-          <a:ln>
-            <a:noFill/>
-          </a:ln>
-        </p:spPr>
-        <p:style>
-          <a:lnRef idx="1">
-            <a:schemeClr val="accent1"/>
-          </a:lnRef>
-          <a:fillRef idx="3">
-            <a:schemeClr val="accent1"/>
-          </a:fillRef>
-          <a:effectRef idx="2">
-            <a:schemeClr val="accent1"/>
-          </a:effectRef>
-          <a:fontRef idx="minor">
-            <a:schemeClr val="lt1"/>
-          </a:fontRef>
-        </p:style>
-        <p:txBody>
-          <a:bodyPr rtlCol="0" anchor="ctr"/>
-          <a:lstStyle/>
-          <a:p>
-            <a:pPr algn="ctr"/>
-          </a:p>
-        </p:txBody>
-      </p:sp>
-      <p:sp>
-        <p:nvSpPr>
-          <p:cNvPr id="26" name="Rectangle 25"/>
-          <p:cNvSpPr/>
-          <p:nvPr/>
-        </p:nvSpPr>
-        <p:spPr>
-          <a:xfrm>
-            <a:off x="457200" y="3474720"/>
-            <a:ext cx="3611880" cy="1554480"/>
-          </a:xfrm>
-          <a:prstGeom prst="rect">
-            <a:avLst/>
-          </a:prstGeom>
-          <a:solidFill>
-            <a:srgbClr val="FFFFFF"/>
-          </a:solidFill>
-          <a:ln w="19050">
-            <a:solidFill>
-              <a:srgbClr val="0E1726"/>
-            </a:solidFill>
-          </a:ln>
-        </p:spPr>
-        <p:style>
-          <a:lnRef idx="1">
-            <a:schemeClr val="accent1"/>
-          </a:lnRef>
-          <a:fillRef idx="3">
-            <a:schemeClr val="accent1"/>
-          </a:fillRef>
-          <a:effectRef idx="2">
-            <a:schemeClr val="accent1"/>
-          </a:effectRef>
-          <a:fontRef idx="minor">
-            <a:schemeClr val="lt1"/>
-          </a:fontRef>
-        </p:style>
-        <p:txBody>
-          <a:bodyPr rtlCol="0" anchor="ctr"/>
-          <a:lstStyle/>
-          <a:p>
-            <a:pPr algn="ctr"/>
-          </a:p>
-        </p:txBody>
-      </p:sp>
-      <p:sp>
-        <p:nvSpPr>
-          <p:cNvPr id="27" name="TextBox 26"/>
-          <p:cNvSpPr txBox="1"/>
-          <p:nvPr/>
-        </p:nvSpPr>
-        <p:spPr>
-          <a:xfrm>
-            <a:off x="685800" y="3657600"/>
-            <a:ext cx="3154680" cy="365760"/>
-          </a:xfrm>
-          <a:prstGeom prst="rect">
-            <a:avLst/>
-          </a:prstGeom>
-          <a:noFill/>
-        </p:spPr>
-        <p:txBody>
-          <a:bodyPr wrap="square" anchor="t"/>
-          <a:lstStyle/>
-          <a:p>
-            <a:pPr algn="l"/>
-            <a:r>
-              <a:rPr sz="1600" b="1">
-                <a:solidFill>
-                  <a:srgbClr val="0E1726"/>
-                </a:solidFill>
-                <a:latin typeface="Arial"/>
-              </a:rPr>
-              <a:t>Caught in full</a:t>
-            </a:r>
-          </a:p>
-        </p:txBody>
-      </p:sp>
-      <p:sp>
-        <p:nvSpPr>
-          <p:cNvPr id="28" name="TextBox 27"/>
-          <p:cNvSpPr txBox="1"/>
-          <p:nvPr/>
-        </p:nvSpPr>
-        <p:spPr>
-          <a:xfrm>
-            <a:off x="685800" y="4114800"/>
-            <a:ext cx="3154680" cy="685800"/>
-          </a:xfrm>
-          <a:prstGeom prst="rect">
-            <a:avLst/>
-          </a:prstGeom>
-          <a:noFill/>
-        </p:spPr>
-        <p:txBody>
-          <a:bodyPr wrap="square" anchor="t"/>
-          <a:lstStyle/>
-          <a:p>
-            <a:pPr algn="l"/>
-            <a:r>
-              <a:rPr sz="1400" b="0">
-                <a:solidFill>
-                  <a:srgbClr val="5B667A"/>
-                </a:solidFill>
-                <a:latin typeface="Arial"/>
-              </a:rPr>
-              <a:t>Indirect injection, 100 of 100 on this suite.</a:t>
-            </a:r>
-          </a:p>
-        </p:txBody>
-      </p:sp>
-      <p:sp>
-        <p:nvSpPr>
-          <p:cNvPr id="29" name="Rectangle 28"/>
-          <p:cNvSpPr/>
-          <p:nvPr/>
-        </p:nvSpPr>
-        <p:spPr>
-          <a:xfrm>
-            <a:off x="4352544" y="3529584"/>
-            <a:ext cx="3611880" cy="1554480"/>
-          </a:xfrm>
-          <a:prstGeom prst="rect">
-            <a:avLst/>
-          </a:prstGeom>
-          <a:solidFill>
-            <a:srgbClr val="0E1726"/>
-          </a:solidFill>
-          <a:ln>
-            <a:noFill/>
-          </a:ln>
-        </p:spPr>
-        <p:style>
-          <a:lnRef idx="1">
-            <a:schemeClr val="accent1"/>
-          </a:lnRef>
-          <a:fillRef idx="3">
-            <a:schemeClr val="accent1"/>
-          </a:fillRef>
-          <a:effectRef idx="2">
-            <a:schemeClr val="accent1"/>
-          </a:effectRef>
-          <a:fontRef idx="minor">
-            <a:schemeClr val="lt1"/>
-          </a:fontRef>
-        </p:style>
-        <p:txBody>
-          <a:bodyPr rtlCol="0" anchor="ctr"/>
-          <a:lstStyle/>
-          <a:p>
-            <a:pPr algn="ctr"/>
-          </a:p>
-        </p:txBody>
-      </p:sp>
-      <p:sp>
-        <p:nvSpPr>
-          <p:cNvPr id="30" name="Rectangle 29"/>
-          <p:cNvSpPr/>
-          <p:nvPr/>
-        </p:nvSpPr>
-        <p:spPr>
-          <a:xfrm>
-            <a:off x="4297680" y="3474720"/>
-            <a:ext cx="3611880" cy="1554480"/>
-          </a:xfrm>
-          <a:prstGeom prst="rect">
-            <a:avLst/>
-          </a:prstGeom>
-          <a:solidFill>
-            <a:srgbClr val="FFFFFF"/>
-          </a:solidFill>
-          <a:ln w="19050">
-            <a:solidFill>
-              <a:srgbClr val="0E1726"/>
-            </a:solidFill>
-          </a:ln>
-        </p:spPr>
-        <p:style>
-          <a:lnRef idx="1">
-            <a:schemeClr val="accent1"/>
-          </a:lnRef>
-          <a:fillRef idx="3">
-            <a:schemeClr val="accent1"/>
-          </a:fillRef>
-          <a:effectRef idx="2">
-            <a:schemeClr val="accent1"/>
-          </a:effectRef>
-          <a:fontRef idx="minor">
-            <a:schemeClr val="lt1"/>
-          </a:fontRef>
-        </p:style>
-        <p:txBody>
-          <a:bodyPr rtlCol="0" anchor="ctr"/>
-          <a:lstStyle/>
-          <a:p>
-            <a:pPr algn="ctr"/>
-          </a:p>
-        </p:txBody>
-      </p:sp>
-      <p:sp>
-        <p:nvSpPr>
-          <p:cNvPr id="31" name="TextBox 30"/>
-          <p:cNvSpPr txBox="1"/>
-          <p:nvPr/>
-        </p:nvSpPr>
-        <p:spPr>
-          <a:xfrm>
-            <a:off x="4526280" y="3657600"/>
-            <a:ext cx="3154680" cy="365760"/>
-          </a:xfrm>
-          <a:prstGeom prst="rect">
-            <a:avLst/>
-          </a:prstGeom>
-          <a:noFill/>
-        </p:spPr>
-        <p:txBody>
-          <a:bodyPr wrap="square" anchor="t"/>
-          <a:lstStyle/>
-          <a:p>
-            <a:pPr algn="l"/>
-            <a:r>
-              <a:rPr sz="1600" b="1">
-                <a:solidFill>
-                  <a:srgbClr val="0E1726"/>
-                </a:solidFill>
-                <a:latin typeface="Arial"/>
-              </a:rPr>
-              <a:t>Still weak</a:t>
-            </a:r>
-          </a:p>
-        </p:txBody>
-      </p:sp>
-      <p:sp>
-        <p:nvSpPr>
-          <p:cNvPr id="32" name="TextBox 31"/>
-          <p:cNvSpPr txBox="1"/>
-          <p:nvPr/>
-        </p:nvSpPr>
-        <p:spPr>
-          <a:xfrm>
-            <a:off x="4526280" y="4114800"/>
-            <a:ext cx="3154680" cy="685800"/>
-          </a:xfrm>
-          <a:prstGeom prst="rect">
-            <a:avLst/>
-          </a:prstGeom>
-          <a:noFill/>
-        </p:spPr>
-        <p:txBody>
-          <a:bodyPr wrap="square" anchor="t"/>
-          <a:lstStyle/>
-          <a:p>
-            <a:pPr algn="l"/>
-            <a:r>
-              <a:rPr sz="1400" b="0">
-                <a:solidFill>
-                  <a:srgbClr val="5B667A"/>
-                </a:solidFill>
-                <a:latin typeface="Arial"/>
-              </a:rPr>
-              <a:t>Multi-step jailbreaks: acted 0.35, correct type 0.00.</a:t>
-            </a:r>
-          </a:p>
-        </p:txBody>
-      </p:sp>
-      <p:sp>
-        <p:nvSpPr>
-          <p:cNvPr id="33" name="Rectangle 32"/>
-          <p:cNvSpPr/>
-          <p:nvPr/>
-        </p:nvSpPr>
-        <p:spPr>
-          <a:xfrm>
-            <a:off x="8193024" y="3529584"/>
-            <a:ext cx="3611880" cy="1554480"/>
-          </a:xfrm>
-          <a:prstGeom prst="rect">
-            <a:avLst/>
-          </a:prstGeom>
-          <a:solidFill>
-            <a:srgbClr val="0E1726"/>
-          </a:solidFill>
-          <a:ln>
-            <a:noFill/>
-          </a:ln>
-        </p:spPr>
-        <p:style>
-          <a:lnRef idx="1">
-            <a:schemeClr val="accent1"/>
-          </a:lnRef>
-          <a:fillRef idx="3">
-            <a:schemeClr val="accent1"/>
-          </a:fillRef>
-          <a:effectRef idx="2">
-            <a:schemeClr val="accent1"/>
-          </a:effectRef>
-          <a:fontRef idx="minor">
-            <a:schemeClr val="lt1"/>
-          </a:fontRef>
-        </p:style>
-        <p:txBody>
-          <a:bodyPr rtlCol="0" anchor="ctr"/>
-          <a:lstStyle/>
-          <a:p>
-            <a:pPr algn="ctr"/>
-          </a:p>
-        </p:txBody>
-      </p:sp>
-      <p:sp>
-        <p:nvSpPr>
-          <p:cNvPr id="34" name="Rectangle 33"/>
-          <p:cNvSpPr/>
-          <p:nvPr/>
-        </p:nvSpPr>
-        <p:spPr>
-          <a:xfrm>
-            <a:off x="8138160" y="3474720"/>
-            <a:ext cx="3611880" cy="1554480"/>
-          </a:xfrm>
-          <a:prstGeom prst="rect">
-            <a:avLst/>
-          </a:prstGeom>
-          <a:solidFill>
-            <a:srgbClr val="FFFFFF"/>
-          </a:solidFill>
-          <a:ln w="19050">
-            <a:solidFill>
-              <a:srgbClr val="0E1726"/>
-            </a:solidFill>
-          </a:ln>
-        </p:spPr>
-        <p:style>
-          <a:lnRef idx="1">
-            <a:schemeClr val="accent1"/>
-          </a:lnRef>
-          <a:fillRef idx="3">
-            <a:schemeClr val="accent1"/>
-          </a:fillRef>
-          <a:effectRef idx="2">
-            <a:schemeClr val="accent1"/>
-          </a:effectRef>
-          <a:fontRef idx="minor">
-            <a:schemeClr val="lt1"/>
-          </a:fontRef>
-        </p:style>
-        <p:txBody>
-          <a:bodyPr rtlCol="0" anchor="ctr"/>
-          <a:lstStyle/>
-          <a:p>
-            <a:pPr algn="ctr"/>
-          </a:p>
-        </p:txBody>
-      </p:sp>
-      <p:sp>
-        <p:nvSpPr>
-          <p:cNvPr id="35" name="TextBox 34"/>
-          <p:cNvSpPr txBox="1"/>
-          <p:nvPr/>
-        </p:nvSpPr>
-        <p:spPr>
-          <a:xfrm>
-            <a:off x="8366760" y="3657600"/>
-            <a:ext cx="3154680" cy="365760"/>
-          </a:xfrm>
-          <a:prstGeom prst="rect">
-            <a:avLst/>
-          </a:prstGeom>
-          <a:noFill/>
-        </p:spPr>
-        <p:txBody>
-          <a:bodyPr wrap="square" anchor="t"/>
-          <a:lstStyle/>
-          <a:p>
-            <a:pPr algn="l"/>
-            <a:r>
-              <a:rPr sz="1600" b="1">
-                <a:solidFill>
-                  <a:srgbClr val="0E1726"/>
-                </a:solidFill>
-                <a:latin typeface="Arial"/>
-              </a:rPr>
-              <a:t>Other pack</a:t>
-            </a:r>
-          </a:p>
-        </p:txBody>
-      </p:sp>
-      <p:sp>
-        <p:nvSpPr>
-          <p:cNvPr id="36" name="TextBox 35"/>
-          <p:cNvSpPr txBox="1"/>
-          <p:nvPr/>
-        </p:nvSpPr>
-        <p:spPr>
-          <a:xfrm>
-            <a:off x="8366760" y="4114800"/>
-            <a:ext cx="3154680" cy="685800"/>
-          </a:xfrm>
-          <a:prstGeom prst="rect">
-            <a:avLst/>
-          </a:prstGeom>
-          <a:noFill/>
-        </p:spPr>
-        <p:txBody>
-          <a:bodyPr wrap="square" anchor="t"/>
-          <a:lstStyle/>
-          <a:p>
-            <a:pPr algn="l"/>
-            <a:r>
-              <a:rPr sz="1400" b="0">
-                <a:solidFill>
-                  <a:srgbClr val="5B667A"/>
-                </a:solidFill>
-                <a:latin typeface="Arial"/>
-              </a:rPr>
-              <a:t>Imported sentences: acted 0.18, false positives 0 of 32.</a:t>
-            </a:r>
-          </a:p>
-        </p:txBody>
-      </p:sp>
-      <p:sp>
-        <p:nvSpPr>
-          <p:cNvPr id="37" name="TextBox 36"/>
-          <p:cNvSpPr txBox="1"/>
-          <p:nvPr/>
-        </p:nvSpPr>
-        <p:spPr>
-          <a:xfrm>
-            <a:off x="457200" y="5212080"/>
-            <a:ext cx="10972800" cy="320040"/>
-          </a:xfrm>
-          <a:prstGeom prst="rect">
-            <a:avLst/>
-          </a:prstGeom>
-          <a:noFill/>
-        </p:spPr>
-        <p:txBody>
-          <a:bodyPr wrap="square" anchor="t"/>
-          <a:lstStyle/>
-          <a:p>
-            <a:pPr algn="l"/>
-            <a:r>
-              <a:rPr sz="1300" b="0">
-                <a:solidFill>
-                  <a:srgbClr val="5B667A"/>
-                </a:solidFill>
-                <a:latin typeface="Arial"/>
-              </a:rPr>
-              <a:t>Full table: docs/CLAIMS.md  ·  Report: eval/golden/reports/20261011T090211Z</a:t>
+              <a:t>Text scanning off. A tainted send-email is still denied.</a:t>
             </a:r>
           </a:p>
         </p:txBody>
       </p:sp>
       <p:pic>
         <p:nvPicPr>
-          <p:cNvPr id="38" name="Picture 37" descr="favicon-512.png"/>
+          <p:cNvPr id="25" name="Picture 24" descr="favicon-512.png"/>
           <p:cNvPicPr>
             <a:picLocks noChangeAspect="1"/>
           </p:cNvPicPr>
@@ -9789,7 +10077,7 @@
       </p:pic>
       <p:sp>
         <p:nvSpPr>
-          <p:cNvPr id="39" name="TextBox 38"/>
+          <p:cNvPr id="26" name="TextBox 25"/>
           <p:cNvSpPr txBox="1"/>
           <p:nvPr/>
         </p:nvSpPr>
@@ -9822,7 +10110,7 @@
       </p:sp>
       <p:sp>
         <p:nvSpPr>
-          <p:cNvPr id="40" name="TextBox 39"/>
+          <p:cNvPr id="27" name="TextBox 26"/>
           <p:cNvSpPr txBox="1"/>
           <p:nvPr/>
         </p:nvSpPr>
@@ -9848,7 +10136,7 @@
                 </a:solidFill>
                 <a:latin typeface="Arial"/>
               </a:rPr>
-              <a:t>6  /  8</a:t>
+              <a:t>6  /  10</a:t>
             </a:r>
           </a:p>
         </p:txBody>
@@ -9922,8 +10210,8 @@
         </p:nvSpPr>
         <p:spPr>
           <a:xfrm>
-            <a:off x="457200" y="292608"/>
-            <a:ext cx="10972800" cy="457200"/>
+            <a:off x="457200" y="256032"/>
+            <a:ext cx="10972800" cy="411480"/>
           </a:xfrm>
           <a:prstGeom prst="rect">
             <a:avLst/>
@@ -9936,27 +10224,60 @@
           <a:p>
             <a:pPr algn="l"/>
             <a:r>
-              <a:rPr sz="3200" b="1">
+              <a:rPr sz="2800" b="1">
                 <a:solidFill>
                   <a:srgbClr val="0E1726"/>
                 </a:solidFill>
                 <a:latin typeface="Arial"/>
               </a:rPr>
-              <a:t>What we declare</a:t>
-            </a:r>
-          </a:p>
-        </p:txBody>
-      </p:sp>
-      <p:sp>
-        <p:nvSpPr>
-          <p:cNvPr id="4" name="Rectangle 3"/>
+              <a:t>Measured on the frozen golden suite</a:t>
+            </a:r>
+          </a:p>
+        </p:txBody>
+      </p:sp>
+      <p:sp>
+        <p:nvSpPr>
+          <p:cNvPr id="4" name="TextBox 3"/>
+          <p:cNvSpPr txBox="1"/>
+          <p:nvPr/>
+        </p:nvSpPr>
+        <p:spPr>
+          <a:xfrm>
+            <a:off x="457200" y="731520"/>
+            <a:ext cx="10972800" cy="274320"/>
+          </a:xfrm>
+          <a:prstGeom prst="rect">
+            <a:avLst/>
+          </a:prstGeom>
+          <a:noFill/>
+        </p:spPr>
+        <p:txBody>
+          <a:bodyPr wrap="square" anchor="t"/>
+          <a:lstStyle/>
+          <a:p>
+            <a:pPr algn="l"/>
+            <a:r>
+              <a:rPr sz="1400" b="0">
+                <a:solidFill>
+                  <a:srgbClr val="5B667A"/>
+                </a:solidFill>
+                <a:latin typeface="Arial"/>
+              </a:rPr>
+              <a:t>Judge off. Shipped policy. 11 October 2026. Not tuned on these rows.</a:t>
+            </a:r>
+          </a:p>
+        </p:txBody>
+      </p:sp>
+      <p:sp>
+        <p:nvSpPr>
+          <p:cNvPr id="5" name="Rectangle 4"/>
           <p:cNvSpPr/>
           <p:nvPr/>
         </p:nvSpPr>
         <p:spPr>
           <a:xfrm>
-            <a:off x="512064" y="1106424"/>
-            <a:ext cx="5486400" cy="2103120"/>
+            <a:off x="512064" y="1243584"/>
+            <a:ext cx="2743200" cy="1874519"/>
           </a:xfrm>
           <a:prstGeom prst="rect">
             <a:avLst/>
@@ -9992,14 +10313,14 @@
       </p:sp>
       <p:sp>
         <p:nvSpPr>
-          <p:cNvPr id="5" name="Rectangle 4"/>
+          <p:cNvPr id="6" name="Rectangle 5"/>
           <p:cNvSpPr/>
           <p:nvPr/>
         </p:nvSpPr>
         <p:spPr>
           <a:xfrm>
-            <a:off x="457200" y="1051560"/>
-            <a:ext cx="5486400" cy="2103120"/>
+            <a:off x="457200" y="1188720"/>
+            <a:ext cx="2743200" cy="1874519"/>
           </a:xfrm>
           <a:prstGeom prst="rect">
             <a:avLst/>
@@ -10037,80 +10358,113 @@
       </p:sp>
       <p:sp>
         <p:nvSpPr>
-          <p:cNvPr id="6" name="TextBox 5"/>
-          <p:cNvSpPr txBox="1"/>
-          <p:nvPr/>
-        </p:nvSpPr>
-        <p:spPr>
-          <a:xfrm>
-            <a:off x="685800" y="1280160"/>
-            <a:ext cx="5029200" cy="548640"/>
-          </a:xfrm>
-          <a:prstGeom prst="rect">
-            <a:avLst/>
-          </a:prstGeom>
-          <a:noFill/>
-        </p:spPr>
-        <p:txBody>
-          <a:bodyPr wrap="square" anchor="t"/>
-          <a:lstStyle/>
-          <a:p>
-            <a:pPr algn="l"/>
+          <p:cNvPr id="7" name="TextBox 6"/>
+          <p:cNvSpPr txBox="1"/>
+          <p:nvPr/>
+        </p:nvSpPr>
+        <p:spPr>
+          <a:xfrm>
+            <a:off x="594360" y="1325880"/>
+            <a:ext cx="2468880" cy="594360"/>
+          </a:xfrm>
+          <a:prstGeom prst="rect">
+            <a:avLst/>
+          </a:prstGeom>
+          <a:noFill/>
+        </p:spPr>
+        <p:txBody>
+          <a:bodyPr wrap="square" anchor="t"/>
+          <a:lstStyle/>
+          <a:p>
+            <a:pPr algn="ctr"/>
             <a:r>
               <a:rPr sz="3200" b="1">
                 <a:solidFill>
-                  <a:srgbClr val="6A4DFF"/>
-                </a:solidFill>
-                <a:latin typeface="Arial"/>
-              </a:rPr>
-              <a:t>F1  /  D1</a:t>
-            </a:r>
-          </a:p>
-        </p:txBody>
-      </p:sp>
-      <p:sp>
-        <p:nvSpPr>
-          <p:cNvPr id="7" name="TextBox 6"/>
-          <p:cNvSpPr txBox="1"/>
-          <p:nvPr/>
-        </p:nvSpPr>
-        <p:spPr>
-          <a:xfrm>
-            <a:off x="685800" y="1965960"/>
-            <a:ext cx="5029200" cy="914400"/>
-          </a:xfrm>
-          <a:prstGeom prst="rect">
-            <a:avLst/>
-          </a:prstGeom>
-          <a:noFill/>
-        </p:spPr>
-        <p:txBody>
-          <a:bodyPr wrap="square" anchor="t"/>
-          <a:lstStyle/>
-          <a:p>
-            <a:pPr algn="l"/>
-            <a:r>
-              <a:rPr sz="1500" b="0">
+                  <a:srgbClr val="0E1726"/>
+                </a:solidFill>
+                <a:latin typeface="Arial"/>
+              </a:rPr>
+              <a:t>0.61</a:t>
+            </a:r>
+          </a:p>
+        </p:txBody>
+      </p:sp>
+      <p:sp>
+        <p:nvSpPr>
+          <p:cNvPr id="8" name="TextBox 7"/>
+          <p:cNvSpPr txBox="1"/>
+          <p:nvPr/>
+        </p:nvSpPr>
+        <p:spPr>
+          <a:xfrm>
+            <a:off x="594360" y="1965960"/>
+            <a:ext cx="2468880" cy="320040"/>
+          </a:xfrm>
+          <a:prstGeom prst="rect">
+            <a:avLst/>
+          </a:prstGeom>
+          <a:noFill/>
+        </p:spPr>
+        <p:txBody>
+          <a:bodyPr wrap="square" anchor="t"/>
+          <a:lstStyle/>
+          <a:p>
+            <a:pPr algn="ctr"/>
+            <a:r>
+              <a:rPr sz="1400" b="1">
+                <a:solidFill>
+                  <a:srgbClr val="0E1726"/>
+                </a:solidFill>
+                <a:latin typeface="Arial"/>
+              </a:rPr>
+              <a:t>Acted recall</a:t>
+            </a:r>
+          </a:p>
+        </p:txBody>
+      </p:sp>
+      <p:sp>
+        <p:nvSpPr>
+          <p:cNvPr id="9" name="TextBox 8"/>
+          <p:cNvSpPr txBox="1"/>
+          <p:nvPr/>
+        </p:nvSpPr>
+        <p:spPr>
+          <a:xfrm>
+            <a:off x="594360" y="2331720"/>
+            <a:ext cx="2468880" cy="320040"/>
+          </a:xfrm>
+          <a:prstGeom prst="rect">
+            <a:avLst/>
+          </a:prstGeom>
+          <a:noFill/>
+        </p:spPr>
+        <p:txBody>
+          <a:bodyPr wrap="square" anchor="t"/>
+          <a:lstStyle/>
+          <a:p>
+            <a:pPr algn="ctr"/>
+            <a:r>
+              <a:rPr sz="1200" b="0">
                 <a:solidFill>
                   <a:srgbClr val="5B667A"/>
                 </a:solidFill>
                 <a:latin typeface="Arial"/>
               </a:rPr>
-              <a:t>Provisional. Nine attack types and the listed formats are in the product. An independent sealed run has not been scored.</a:t>
-            </a:r>
-          </a:p>
-        </p:txBody>
-      </p:sp>
-      <p:sp>
-        <p:nvSpPr>
-          <p:cNvPr id="8" name="Rectangle 7"/>
+              <a:t>900 attacks</a:t>
+            </a:r>
+          </a:p>
+        </p:txBody>
+      </p:sp>
+      <p:sp>
+        <p:nvSpPr>
+          <p:cNvPr id="10" name="Rectangle 9"/>
           <p:cNvSpPr/>
           <p:nvPr/>
         </p:nvSpPr>
         <p:spPr>
           <a:xfrm>
-            <a:off x="6272783" y="1106424"/>
-            <a:ext cx="5486400" cy="2103120"/>
+            <a:off x="3438144" y="1243584"/>
+            <a:ext cx="2743200" cy="1874519"/>
           </a:xfrm>
           <a:prstGeom prst="rect">
             <a:avLst/>
@@ -10146,14 +10500,14 @@
       </p:sp>
       <p:sp>
         <p:nvSpPr>
-          <p:cNvPr id="9" name="Rectangle 8"/>
+          <p:cNvPr id="11" name="Rectangle 10"/>
           <p:cNvSpPr/>
           <p:nvPr/>
         </p:nvSpPr>
         <p:spPr>
           <a:xfrm>
-            <a:off x="6217920" y="1051560"/>
-            <a:ext cx="5486400" cy="2103120"/>
+            <a:off x="3383280" y="1188720"/>
+            <a:ext cx="2743200" cy="1874519"/>
           </a:xfrm>
           <a:prstGeom prst="rect">
             <a:avLst/>
@@ -10191,80 +10545,113 @@
       </p:sp>
       <p:sp>
         <p:nvSpPr>
-          <p:cNvPr id="10" name="TextBox 9"/>
-          <p:cNvSpPr txBox="1"/>
-          <p:nvPr/>
-        </p:nvSpPr>
-        <p:spPr>
-          <a:xfrm>
-            <a:off x="6446520" y="1280160"/>
-            <a:ext cx="5029200" cy="411480"/>
-          </a:xfrm>
-          <a:prstGeom prst="rect">
-            <a:avLst/>
-          </a:prstGeom>
-          <a:noFill/>
-        </p:spPr>
-        <p:txBody>
-          <a:bodyPr wrap="square" anchor="t"/>
-          <a:lstStyle/>
-          <a:p>
-            <a:pPr algn="l"/>
-            <a:r>
-              <a:rPr sz="2200" b="1">
-                <a:solidFill>
-                  <a:srgbClr val="C62839"/>
-                </a:solidFill>
-                <a:latin typeface="Arial"/>
-              </a:rPr>
-              <a:t>Not claimed</a:t>
-            </a:r>
-          </a:p>
-        </p:txBody>
-      </p:sp>
-      <p:sp>
-        <p:nvSpPr>
-          <p:cNvPr id="11" name="TextBox 10"/>
-          <p:cNvSpPr txBox="1"/>
-          <p:nvPr/>
-        </p:nvSpPr>
-        <p:spPr>
-          <a:xfrm>
-            <a:off x="6446520" y="1874519"/>
-            <a:ext cx="5029200" cy="1005840"/>
-          </a:xfrm>
-          <a:prstGeom prst="rect">
-            <a:avLst/>
-          </a:prstGeom>
-          <a:noFill/>
-        </p:spPr>
-        <p:txBody>
-          <a:bodyPr wrap="square" anchor="t"/>
-          <a:lstStyle/>
-          <a:p>
-            <a:pPr algn="l"/>
-            <a:r>
-              <a:rPr sz="1500" b="0">
+          <p:cNvPr id="12" name="TextBox 11"/>
+          <p:cNvSpPr txBox="1"/>
+          <p:nvPr/>
+        </p:nvSpPr>
+        <p:spPr>
+          <a:xfrm>
+            <a:off x="3520440" y="1325880"/>
+            <a:ext cx="2468880" cy="594360"/>
+          </a:xfrm>
+          <a:prstGeom prst="rect">
+            <a:avLst/>
+          </a:prstGeom>
+          <a:noFill/>
+        </p:spPr>
+        <p:txBody>
+          <a:bodyPr wrap="square" anchor="t"/>
+          <a:lstStyle/>
+          <a:p>
+            <a:pPr algn="ctr"/>
+            <a:r>
+              <a:rPr sz="3200" b="1">
+                <a:solidFill>
+                  <a:srgbClr val="0E1726"/>
+                </a:solidFill>
+                <a:latin typeface="Arial"/>
+              </a:rPr>
+              <a:t>0.48</a:t>
+            </a:r>
+          </a:p>
+        </p:txBody>
+      </p:sp>
+      <p:sp>
+        <p:nvSpPr>
+          <p:cNvPr id="13" name="TextBox 12"/>
+          <p:cNvSpPr txBox="1"/>
+          <p:nvPr/>
+        </p:nvSpPr>
+        <p:spPr>
+          <a:xfrm>
+            <a:off x="3520440" y="1965960"/>
+            <a:ext cx="2468880" cy="320040"/>
+          </a:xfrm>
+          <a:prstGeom prst="rect">
+            <a:avLst/>
+          </a:prstGeom>
+          <a:noFill/>
+        </p:spPr>
+        <p:txBody>
+          <a:bodyPr wrap="square" anchor="t"/>
+          <a:lstStyle/>
+          <a:p>
+            <a:pPr algn="ctr"/>
+            <a:r>
+              <a:rPr sz="1400" b="1">
+                <a:solidFill>
+                  <a:srgbClr val="0E1726"/>
+                </a:solidFill>
+                <a:latin typeface="Arial"/>
+              </a:rPr>
+              <a:t>Correct type</a:t>
+            </a:r>
+          </a:p>
+        </p:txBody>
+      </p:sp>
+      <p:sp>
+        <p:nvSpPr>
+          <p:cNvPr id="14" name="TextBox 13"/>
+          <p:cNvSpPr txBox="1"/>
+          <p:nvPr/>
+        </p:nvSpPr>
+        <p:spPr>
+          <a:xfrm>
+            <a:off x="3520440" y="2331720"/>
+            <a:ext cx="2468880" cy="320040"/>
+          </a:xfrm>
+          <a:prstGeom prst="rect">
+            <a:avLst/>
+          </a:prstGeom>
+          <a:noFill/>
+        </p:spPr>
+        <p:txBody>
+          <a:bodyPr wrap="square" anchor="t"/>
+          <a:lstStyle/>
+          <a:p>
+            <a:pPr algn="ctr"/>
+            <a:r>
+              <a:rPr sz="1200" b="0">
                 <a:solidFill>
                   <a:srgbClr val="5B667A"/>
                 </a:solidFill>
                 <a:latin typeface="Arial"/>
               </a:rPr>
-              <a:t>F3 and D3. Known-pattern recall of 0.95. Held-out recall of 0.85. A length-matched false-positive rate at or under 2 percent.</a:t>
-            </a:r>
-          </a:p>
-        </p:txBody>
-      </p:sp>
-      <p:sp>
-        <p:nvSpPr>
-          <p:cNvPr id="12" name="Rectangle 11"/>
+              <a:t>900 attacks</a:t>
+            </a:r>
+          </a:p>
+        </p:txBody>
+      </p:sp>
+      <p:sp>
+        <p:nvSpPr>
+          <p:cNvPr id="15" name="Rectangle 14"/>
           <p:cNvSpPr/>
           <p:nvPr/>
         </p:nvSpPr>
         <p:spPr>
           <a:xfrm>
-            <a:off x="512064" y="3438144"/>
-            <a:ext cx="11247120" cy="713232"/>
+            <a:off x="6364224" y="1243584"/>
+            <a:ext cx="2743200" cy="1874519"/>
           </a:xfrm>
           <a:prstGeom prst="rect">
             <a:avLst/>
@@ -10300,14 +10687,14 @@
       </p:sp>
       <p:sp>
         <p:nvSpPr>
-          <p:cNvPr id="13" name="Rectangle 12"/>
+          <p:cNvPr id="16" name="Rectangle 15"/>
           <p:cNvSpPr/>
           <p:nvPr/>
         </p:nvSpPr>
         <p:spPr>
           <a:xfrm>
-            <a:off x="457200" y="3383280"/>
-            <a:ext cx="11247120" cy="713232"/>
+            <a:off x="6309360" y="1188720"/>
+            <a:ext cx="2743200" cy="1874519"/>
           </a:xfrm>
           <a:prstGeom prst="rect">
             <a:avLst/>
@@ -10345,47 +10732,113 @@
       </p:sp>
       <p:sp>
         <p:nvSpPr>
-          <p:cNvPr id="14" name="TextBox 13"/>
-          <p:cNvSpPr txBox="1"/>
-          <p:nvPr/>
-        </p:nvSpPr>
-        <p:spPr>
-          <a:xfrm>
-            <a:off x="685800" y="3566160"/>
-            <a:ext cx="10789920" cy="411480"/>
-          </a:xfrm>
-          <a:prstGeom prst="rect">
-            <a:avLst/>
-          </a:prstGeom>
-          <a:noFill/>
-        </p:spPr>
-        <p:txBody>
-          <a:bodyPr wrap="square" anchor="t"/>
-          <a:lstStyle/>
-          <a:p>
-            <a:pPr algn="l"/>
-            <a:r>
-              <a:rPr sz="1500" b="0">
+          <p:cNvPr id="17" name="TextBox 16"/>
+          <p:cNvSpPr txBox="1"/>
+          <p:nvPr/>
+        </p:nvSpPr>
+        <p:spPr>
+          <a:xfrm>
+            <a:off x="6446520" y="1325880"/>
+            <a:ext cx="2468880" cy="594360"/>
+          </a:xfrm>
+          <a:prstGeom prst="rect">
+            <a:avLst/>
+          </a:prstGeom>
+          <a:noFill/>
+        </p:spPr>
+        <p:txBody>
+          <a:bodyPr wrap="square" anchor="t"/>
+          <a:lstStyle/>
+          <a:p>
+            <a:pPr algn="ctr"/>
+            <a:r>
+              <a:rPr sz="3200" b="1">
                 <a:solidFill>
                   <a:srgbClr val="0E1726"/>
                 </a:solidFill>
                 <a:latin typeface="Arial"/>
               </a:rPr>
-              <a:t>Exact white-on-white text is not in the pixels, so OCR cannot read it.</a:t>
-            </a:r>
-          </a:p>
-        </p:txBody>
-      </p:sp>
-      <p:sp>
-        <p:nvSpPr>
-          <p:cNvPr id="15" name="Rectangle 14"/>
+              <a:t>0 / 500</a:t>
+            </a:r>
+          </a:p>
+        </p:txBody>
+      </p:sp>
+      <p:sp>
+        <p:nvSpPr>
+          <p:cNvPr id="18" name="TextBox 17"/>
+          <p:cNvSpPr txBox="1"/>
+          <p:nvPr/>
+        </p:nvSpPr>
+        <p:spPr>
+          <a:xfrm>
+            <a:off x="6446520" y="1965960"/>
+            <a:ext cx="2468880" cy="320040"/>
+          </a:xfrm>
+          <a:prstGeom prst="rect">
+            <a:avLst/>
+          </a:prstGeom>
+          <a:noFill/>
+        </p:spPr>
+        <p:txBody>
+          <a:bodyPr wrap="square" anchor="t"/>
+          <a:lstStyle/>
+          <a:p>
+            <a:pPr algn="ctr"/>
+            <a:r>
+              <a:rPr sz="1400" b="1">
+                <a:solidFill>
+                  <a:srgbClr val="0E1726"/>
+                </a:solidFill>
+                <a:latin typeface="Arial"/>
+              </a:rPr>
+              <a:t>False positives</a:t>
+            </a:r>
+          </a:p>
+        </p:txBody>
+      </p:sp>
+      <p:sp>
+        <p:nvSpPr>
+          <p:cNvPr id="19" name="TextBox 18"/>
+          <p:cNvSpPr txBox="1"/>
+          <p:nvPr/>
+        </p:nvSpPr>
+        <p:spPr>
+          <a:xfrm>
+            <a:off x="6446520" y="2331720"/>
+            <a:ext cx="2468880" cy="320040"/>
+          </a:xfrm>
+          <a:prstGeom prst="rect">
+            <a:avLst/>
+          </a:prstGeom>
+          <a:noFill/>
+        </p:spPr>
+        <p:txBody>
+          <a:bodyPr wrap="square" anchor="t"/>
+          <a:lstStyle/>
+          <a:p>
+            <a:pPr algn="ctr"/>
+            <a:r>
+              <a:rPr sz="1200" b="0">
+                <a:solidFill>
+                  <a:srgbClr val="5B667A"/>
+                </a:solidFill>
+                <a:latin typeface="Arial"/>
+              </a:rPr>
+              <a:t>Ordinary documents</a:t>
+            </a:r>
+          </a:p>
+        </p:txBody>
+      </p:sp>
+      <p:sp>
+        <p:nvSpPr>
+          <p:cNvPr id="20" name="Rectangle 19"/>
           <p:cNvSpPr/>
           <p:nvPr/>
         </p:nvSpPr>
         <p:spPr>
           <a:xfrm>
-            <a:off x="512064" y="4261104"/>
-            <a:ext cx="11247120" cy="713232"/>
+            <a:off x="9290304" y="1243584"/>
+            <a:ext cx="2743200" cy="1874519"/>
           </a:xfrm>
           <a:prstGeom prst="rect">
             <a:avLst/>
@@ -10421,14 +10874,14 @@
       </p:sp>
       <p:sp>
         <p:nvSpPr>
-          <p:cNvPr id="16" name="Rectangle 15"/>
+          <p:cNvPr id="21" name="Rectangle 20"/>
           <p:cNvSpPr/>
           <p:nvPr/>
         </p:nvSpPr>
         <p:spPr>
           <a:xfrm>
-            <a:off x="457200" y="4206240"/>
-            <a:ext cx="11247120" cy="713232"/>
+            <a:off x="9235440" y="1188720"/>
+            <a:ext cx="2743200" cy="1874519"/>
           </a:xfrm>
           <a:prstGeom prst="rect">
             <a:avLst/>
@@ -10466,47 +10919,113 @@
       </p:sp>
       <p:sp>
         <p:nvSpPr>
-          <p:cNvPr id="17" name="TextBox 16"/>
-          <p:cNvSpPr txBox="1"/>
-          <p:nvPr/>
-        </p:nvSpPr>
-        <p:spPr>
-          <a:xfrm>
-            <a:off x="685800" y="4389120"/>
-            <a:ext cx="10789920" cy="411480"/>
-          </a:xfrm>
-          <a:prstGeom prst="rect">
-            <a:avLst/>
-          </a:prstGeom>
-          <a:noFill/>
-        </p:spPr>
-        <p:txBody>
-          <a:bodyPr wrap="square" anchor="t"/>
-          <a:lstStyle/>
-          <a:p>
-            <a:pPr algn="l"/>
-            <a:r>
-              <a:rPr sz="1500" b="0">
+          <p:cNvPr id="22" name="TextBox 21"/>
+          <p:cNvSpPr txBox="1"/>
+          <p:nvPr/>
+        </p:nvSpPr>
+        <p:spPr>
+          <a:xfrm>
+            <a:off x="9372600" y="1325880"/>
+            <a:ext cx="2468880" cy="594360"/>
+          </a:xfrm>
+          <a:prstGeom prst="rect">
+            <a:avLst/>
+          </a:prstGeom>
+          <a:noFill/>
+        </p:spPr>
+        <p:txBody>
+          <a:bodyPr wrap="square" anchor="t"/>
+          <a:lstStyle/>
+          <a:p>
+            <a:pPr algn="ctr"/>
+            <a:r>
+              <a:rPr sz="3200" b="1">
                 <a:solidFill>
                   <a:srgbClr val="0E1726"/>
                 </a:solidFill>
                 <a:latin typeface="Arial"/>
               </a:rPr>
-              <a:t>The Arena agent is scripted. A live language-model agent was not the measured subject.</a:t>
-            </a:r>
-          </a:p>
-        </p:txBody>
-      </p:sp>
-      <p:sp>
-        <p:nvSpPr>
-          <p:cNvPr id="18" name="Rectangle 17"/>
+              <a:t>26 ms</a:t>
+            </a:r>
+          </a:p>
+        </p:txBody>
+      </p:sp>
+      <p:sp>
+        <p:nvSpPr>
+          <p:cNvPr id="23" name="TextBox 22"/>
+          <p:cNvSpPr txBox="1"/>
+          <p:nvPr/>
+        </p:nvSpPr>
+        <p:spPr>
+          <a:xfrm>
+            <a:off x="9372600" y="1965960"/>
+            <a:ext cx="2468880" cy="320040"/>
+          </a:xfrm>
+          <a:prstGeom prst="rect">
+            <a:avLst/>
+          </a:prstGeom>
+          <a:noFill/>
+        </p:spPr>
+        <p:txBody>
+          <a:bodyPr wrap="square" anchor="t"/>
+          <a:lstStyle/>
+          <a:p>
+            <a:pPr algn="ctr"/>
+            <a:r>
+              <a:rPr sz="1400" b="1">
+                <a:solidFill>
+                  <a:srgbClr val="0E1726"/>
+                </a:solidFill>
+                <a:latin typeface="Arial"/>
+              </a:rPr>
+              <a:t>Latency p95</a:t>
+            </a:r>
+          </a:p>
+        </p:txBody>
+      </p:sp>
+      <p:sp>
+        <p:nvSpPr>
+          <p:cNvPr id="24" name="TextBox 23"/>
+          <p:cNvSpPr txBox="1"/>
+          <p:nvPr/>
+        </p:nvSpPr>
+        <p:spPr>
+          <a:xfrm>
+            <a:off x="9372600" y="2331720"/>
+            <a:ext cx="2468880" cy="320040"/>
+          </a:xfrm>
+          <a:prstGeom prst="rect">
+            <a:avLst/>
+          </a:prstGeom>
+          <a:noFill/>
+        </p:spPr>
+        <p:txBody>
+          <a:bodyPr wrap="square" anchor="t"/>
+          <a:lstStyle/>
+          <a:p>
+            <a:pPr algn="ctr"/>
+            <a:r>
+              <a:rPr sz="1200" b="0">
+                <a:solidFill>
+                  <a:srgbClr val="5B667A"/>
+                </a:solidFill>
+                <a:latin typeface="Arial"/>
+              </a:rPr>
+              <a:t>Without the judge</a:t>
+            </a:r>
+          </a:p>
+        </p:txBody>
+      </p:sp>
+      <p:sp>
+        <p:nvSpPr>
+          <p:cNvPr id="25" name="Rectangle 24"/>
           <p:cNvSpPr/>
           <p:nvPr/>
         </p:nvSpPr>
         <p:spPr>
           <a:xfrm>
-            <a:off x="512064" y="5084064"/>
-            <a:ext cx="11247120" cy="713232"/>
+            <a:off x="512064" y="3300984"/>
+            <a:ext cx="3611880" cy="1325880"/>
           </a:xfrm>
           <a:prstGeom prst="rect">
             <a:avLst/>
@@ -10542,14 +11061,14 @@
       </p:sp>
       <p:sp>
         <p:nvSpPr>
-          <p:cNvPr id="19" name="Rectangle 18"/>
+          <p:cNvPr id="26" name="Rectangle 25"/>
           <p:cNvSpPr/>
           <p:nvPr/>
         </p:nvSpPr>
         <p:spPr>
           <a:xfrm>
-            <a:off x="457200" y="5029200"/>
-            <a:ext cx="11247120" cy="713232"/>
+            <a:off x="457200" y="3246120"/>
+            <a:ext cx="3611880" cy="1325880"/>
           </a:xfrm>
           <a:prstGeom prst="rect">
             <a:avLst/>
@@ -10587,14 +11106,14 @@
       </p:sp>
       <p:sp>
         <p:nvSpPr>
-          <p:cNvPr id="20" name="TextBox 19"/>
-          <p:cNvSpPr txBox="1"/>
-          <p:nvPr/>
-        </p:nvSpPr>
-        <p:spPr>
-          <a:xfrm>
-            <a:off x="685800" y="5212080"/>
-            <a:ext cx="10789920" cy="411480"/>
+          <p:cNvPr id="27" name="TextBox 26"/>
+          <p:cNvSpPr txBox="1"/>
+          <p:nvPr/>
+        </p:nvSpPr>
+        <p:spPr>
+          <a:xfrm>
+            <a:off x="685800" y="3383280"/>
+            <a:ext cx="3154680" cy="320040"/>
           </a:xfrm>
           <a:prstGeom prst="rect">
             <a:avLst/>
@@ -10607,20 +11126,427 @@
           <a:p>
             <a:pPr algn="l"/>
             <a:r>
-              <a:rPr sz="1500" b="0">
+              <a:rPr sz="1600" b="1">
                 <a:solidFill>
                   <a:srgbClr val="0E1726"/>
                 </a:solidFill>
                 <a:latin typeface="Arial"/>
               </a:rPr>
-              <a:t>The judge can add a finding. It cannot block a document by itself.</a:t>
+              <a:t>Caught in full</a:t>
+            </a:r>
+          </a:p>
+        </p:txBody>
+      </p:sp>
+      <p:sp>
+        <p:nvSpPr>
+          <p:cNvPr id="28" name="TextBox 27"/>
+          <p:cNvSpPr txBox="1"/>
+          <p:nvPr/>
+        </p:nvSpPr>
+        <p:spPr>
+          <a:xfrm>
+            <a:off x="685800" y="3794760"/>
+            <a:ext cx="3154680" cy="594360"/>
+          </a:xfrm>
+          <a:prstGeom prst="rect">
+            <a:avLst/>
+          </a:prstGeom>
+          <a:noFill/>
+        </p:spPr>
+        <p:txBody>
+          <a:bodyPr wrap="square" anchor="t"/>
+          <a:lstStyle/>
+          <a:p>
+            <a:pPr algn="l"/>
+            <a:r>
+              <a:rPr sz="1400" b="0">
+                <a:solidFill>
+                  <a:srgbClr val="5B667A"/>
+                </a:solidFill>
+                <a:latin typeface="Arial"/>
+              </a:rPr>
+              <a:t>Indirect injection, 100 of 100 on this suite.</a:t>
+            </a:r>
+          </a:p>
+        </p:txBody>
+      </p:sp>
+      <p:sp>
+        <p:nvSpPr>
+          <p:cNvPr id="29" name="Rectangle 28"/>
+          <p:cNvSpPr/>
+          <p:nvPr/>
+        </p:nvSpPr>
+        <p:spPr>
+          <a:xfrm>
+            <a:off x="4352544" y="3300984"/>
+            <a:ext cx="3611880" cy="1325880"/>
+          </a:xfrm>
+          <a:prstGeom prst="rect">
+            <a:avLst/>
+          </a:prstGeom>
+          <a:solidFill>
+            <a:srgbClr val="0E1726"/>
+          </a:solidFill>
+          <a:ln>
+            <a:noFill/>
+          </a:ln>
+        </p:spPr>
+        <p:style>
+          <a:lnRef idx="1">
+            <a:schemeClr val="accent1"/>
+          </a:lnRef>
+          <a:fillRef idx="3">
+            <a:schemeClr val="accent1"/>
+          </a:fillRef>
+          <a:effectRef idx="2">
+            <a:schemeClr val="accent1"/>
+          </a:effectRef>
+          <a:fontRef idx="minor">
+            <a:schemeClr val="lt1"/>
+          </a:fontRef>
+        </p:style>
+        <p:txBody>
+          <a:bodyPr rtlCol="0" anchor="ctr"/>
+          <a:lstStyle/>
+          <a:p>
+            <a:pPr algn="ctr"/>
+          </a:p>
+        </p:txBody>
+      </p:sp>
+      <p:sp>
+        <p:nvSpPr>
+          <p:cNvPr id="30" name="Rectangle 29"/>
+          <p:cNvSpPr/>
+          <p:nvPr/>
+        </p:nvSpPr>
+        <p:spPr>
+          <a:xfrm>
+            <a:off x="4297680" y="3246120"/>
+            <a:ext cx="3611880" cy="1325880"/>
+          </a:xfrm>
+          <a:prstGeom prst="rect">
+            <a:avLst/>
+          </a:prstGeom>
+          <a:solidFill>
+            <a:srgbClr val="FFFFFF"/>
+          </a:solidFill>
+          <a:ln w="19050">
+            <a:solidFill>
+              <a:srgbClr val="0E1726"/>
+            </a:solidFill>
+          </a:ln>
+        </p:spPr>
+        <p:style>
+          <a:lnRef idx="1">
+            <a:schemeClr val="accent1"/>
+          </a:lnRef>
+          <a:fillRef idx="3">
+            <a:schemeClr val="accent1"/>
+          </a:fillRef>
+          <a:effectRef idx="2">
+            <a:schemeClr val="accent1"/>
+          </a:effectRef>
+          <a:fontRef idx="minor">
+            <a:schemeClr val="lt1"/>
+          </a:fontRef>
+        </p:style>
+        <p:txBody>
+          <a:bodyPr rtlCol="0" anchor="ctr"/>
+          <a:lstStyle/>
+          <a:p>
+            <a:pPr algn="ctr"/>
+          </a:p>
+        </p:txBody>
+      </p:sp>
+      <p:sp>
+        <p:nvSpPr>
+          <p:cNvPr id="31" name="TextBox 30"/>
+          <p:cNvSpPr txBox="1"/>
+          <p:nvPr/>
+        </p:nvSpPr>
+        <p:spPr>
+          <a:xfrm>
+            <a:off x="4526280" y="3383280"/>
+            <a:ext cx="3154680" cy="320040"/>
+          </a:xfrm>
+          <a:prstGeom prst="rect">
+            <a:avLst/>
+          </a:prstGeom>
+          <a:noFill/>
+        </p:spPr>
+        <p:txBody>
+          <a:bodyPr wrap="square" anchor="t"/>
+          <a:lstStyle/>
+          <a:p>
+            <a:pPr algn="l"/>
+            <a:r>
+              <a:rPr sz="1600" b="1">
+                <a:solidFill>
+                  <a:srgbClr val="0E1726"/>
+                </a:solidFill>
+                <a:latin typeface="Arial"/>
+              </a:rPr>
+              <a:t>Still weak</a:t>
+            </a:r>
+          </a:p>
+        </p:txBody>
+      </p:sp>
+      <p:sp>
+        <p:nvSpPr>
+          <p:cNvPr id="32" name="TextBox 31"/>
+          <p:cNvSpPr txBox="1"/>
+          <p:nvPr/>
+        </p:nvSpPr>
+        <p:spPr>
+          <a:xfrm>
+            <a:off x="4526280" y="3794760"/>
+            <a:ext cx="3154680" cy="594360"/>
+          </a:xfrm>
+          <a:prstGeom prst="rect">
+            <a:avLst/>
+          </a:prstGeom>
+          <a:noFill/>
+        </p:spPr>
+        <p:txBody>
+          <a:bodyPr wrap="square" anchor="t"/>
+          <a:lstStyle/>
+          <a:p>
+            <a:pPr algn="l"/>
+            <a:r>
+              <a:rPr sz="1400" b="0">
+                <a:solidFill>
+                  <a:srgbClr val="5B667A"/>
+                </a:solidFill>
+                <a:latin typeface="Arial"/>
+              </a:rPr>
+              <a:t>Multi-step jailbreaks: acted 0.35, correct type 0.00.</a:t>
+            </a:r>
+          </a:p>
+        </p:txBody>
+      </p:sp>
+      <p:sp>
+        <p:nvSpPr>
+          <p:cNvPr id="33" name="Rectangle 32"/>
+          <p:cNvSpPr/>
+          <p:nvPr/>
+        </p:nvSpPr>
+        <p:spPr>
+          <a:xfrm>
+            <a:off x="8193024" y="3300984"/>
+            <a:ext cx="3611880" cy="1325880"/>
+          </a:xfrm>
+          <a:prstGeom prst="rect">
+            <a:avLst/>
+          </a:prstGeom>
+          <a:solidFill>
+            <a:srgbClr val="0E1726"/>
+          </a:solidFill>
+          <a:ln>
+            <a:noFill/>
+          </a:ln>
+        </p:spPr>
+        <p:style>
+          <a:lnRef idx="1">
+            <a:schemeClr val="accent1"/>
+          </a:lnRef>
+          <a:fillRef idx="3">
+            <a:schemeClr val="accent1"/>
+          </a:fillRef>
+          <a:effectRef idx="2">
+            <a:schemeClr val="accent1"/>
+          </a:effectRef>
+          <a:fontRef idx="minor">
+            <a:schemeClr val="lt1"/>
+          </a:fontRef>
+        </p:style>
+        <p:txBody>
+          <a:bodyPr rtlCol="0" anchor="ctr"/>
+          <a:lstStyle/>
+          <a:p>
+            <a:pPr algn="ctr"/>
+          </a:p>
+        </p:txBody>
+      </p:sp>
+      <p:sp>
+        <p:nvSpPr>
+          <p:cNvPr id="34" name="Rectangle 33"/>
+          <p:cNvSpPr/>
+          <p:nvPr/>
+        </p:nvSpPr>
+        <p:spPr>
+          <a:xfrm>
+            <a:off x="8138160" y="3246120"/>
+            <a:ext cx="3611880" cy="1325880"/>
+          </a:xfrm>
+          <a:prstGeom prst="rect">
+            <a:avLst/>
+          </a:prstGeom>
+          <a:solidFill>
+            <a:srgbClr val="FFFFFF"/>
+          </a:solidFill>
+          <a:ln w="19050">
+            <a:solidFill>
+              <a:srgbClr val="0E1726"/>
+            </a:solidFill>
+          </a:ln>
+        </p:spPr>
+        <p:style>
+          <a:lnRef idx="1">
+            <a:schemeClr val="accent1"/>
+          </a:lnRef>
+          <a:fillRef idx="3">
+            <a:schemeClr val="accent1"/>
+          </a:fillRef>
+          <a:effectRef idx="2">
+            <a:schemeClr val="accent1"/>
+          </a:effectRef>
+          <a:fontRef idx="minor">
+            <a:schemeClr val="lt1"/>
+          </a:fontRef>
+        </p:style>
+        <p:txBody>
+          <a:bodyPr rtlCol="0" anchor="ctr"/>
+          <a:lstStyle/>
+          <a:p>
+            <a:pPr algn="ctr"/>
+          </a:p>
+        </p:txBody>
+      </p:sp>
+      <p:sp>
+        <p:nvSpPr>
+          <p:cNvPr id="35" name="TextBox 34"/>
+          <p:cNvSpPr txBox="1"/>
+          <p:nvPr/>
+        </p:nvSpPr>
+        <p:spPr>
+          <a:xfrm>
+            <a:off x="8366760" y="3383280"/>
+            <a:ext cx="3154680" cy="320040"/>
+          </a:xfrm>
+          <a:prstGeom prst="rect">
+            <a:avLst/>
+          </a:prstGeom>
+          <a:noFill/>
+        </p:spPr>
+        <p:txBody>
+          <a:bodyPr wrap="square" anchor="t"/>
+          <a:lstStyle/>
+          <a:p>
+            <a:pPr algn="l"/>
+            <a:r>
+              <a:rPr sz="1600" b="1">
+                <a:solidFill>
+                  <a:srgbClr val="0E1726"/>
+                </a:solidFill>
+                <a:latin typeface="Arial"/>
+              </a:rPr>
+              <a:t>Other pack</a:t>
+            </a:r>
+          </a:p>
+        </p:txBody>
+      </p:sp>
+      <p:sp>
+        <p:nvSpPr>
+          <p:cNvPr id="36" name="TextBox 35"/>
+          <p:cNvSpPr txBox="1"/>
+          <p:nvPr/>
+        </p:nvSpPr>
+        <p:spPr>
+          <a:xfrm>
+            <a:off x="8366760" y="3794760"/>
+            <a:ext cx="3154680" cy="594360"/>
+          </a:xfrm>
+          <a:prstGeom prst="rect">
+            <a:avLst/>
+          </a:prstGeom>
+          <a:noFill/>
+        </p:spPr>
+        <p:txBody>
+          <a:bodyPr wrap="square" anchor="t"/>
+          <a:lstStyle/>
+          <a:p>
+            <a:pPr algn="l"/>
+            <a:r>
+              <a:rPr sz="1400" b="0">
+                <a:solidFill>
+                  <a:srgbClr val="5B667A"/>
+                </a:solidFill>
+                <a:latin typeface="Arial"/>
+              </a:rPr>
+              <a:t>Imported sentences: acted 0.18, false positives 0 of 32.</a:t>
+            </a:r>
+          </a:p>
+        </p:txBody>
+      </p:sp>
+      <p:sp>
+        <p:nvSpPr>
+          <p:cNvPr id="37" name="TextBox 36"/>
+          <p:cNvSpPr txBox="1"/>
+          <p:nvPr/>
+        </p:nvSpPr>
+        <p:spPr>
+          <a:xfrm>
+            <a:off x="457200" y="4754880"/>
+            <a:ext cx="11247120" cy="365760"/>
+          </a:xfrm>
+          <a:prstGeom prst="rect">
+            <a:avLst/>
+          </a:prstGeom>
+          <a:noFill/>
+        </p:spPr>
+        <p:txBody>
+          <a:bodyPr wrap="square" anchor="t"/>
+          <a:lstStyle/>
+          <a:p>
+            <a:pPr algn="l"/>
+            <a:r>
+              <a:rPr sz="1400" b="0">
+                <a:solidFill>
+                  <a:srgbClr val="0E1726"/>
+                </a:solidFill>
+                <a:latin typeface="Arial"/>
+              </a:rPr>
+              <a:t>Security: uploads are never executed. Demo tools are mocks. The judge never blocks a document by itself.</a:t>
+            </a:r>
+          </a:p>
+        </p:txBody>
+      </p:sp>
+      <p:sp>
+        <p:nvSpPr>
+          <p:cNvPr id="38" name="TextBox 37"/>
+          <p:cNvSpPr txBox="1"/>
+          <p:nvPr/>
+        </p:nvSpPr>
+        <p:spPr>
+          <a:xfrm>
+            <a:off x="457200" y="5166360"/>
+            <a:ext cx="10972800" cy="274320"/>
+          </a:xfrm>
+          <a:prstGeom prst="rect">
+            <a:avLst/>
+          </a:prstGeom>
+          <a:noFill/>
+        </p:spPr>
+        <p:txBody>
+          <a:bodyPr wrap="square" anchor="t"/>
+          <a:lstStyle/>
+          <a:p>
+            <a:pPr algn="l"/>
+            <a:r>
+              <a:rPr sz="1300" b="0">
+                <a:solidFill>
+                  <a:srgbClr val="5B667A"/>
+                </a:solidFill>
+                <a:latin typeface="Arial"/>
+              </a:rPr>
+              <a:t>Full table: docs/CLAIMS.md  ·  Report: eval/golden/reports/20261011T090211Z</a:t>
             </a:r>
           </a:p>
         </p:txBody>
       </p:sp>
       <p:pic>
         <p:nvPicPr>
-          <p:cNvPr id="21" name="Picture 20" descr="favicon-512.png"/>
+          <p:cNvPr id="39" name="Picture 38" descr="favicon-512.png"/>
           <p:cNvPicPr>
             <a:picLocks noChangeAspect="1"/>
           </p:cNvPicPr>
@@ -10644,7 +11570,7 @@
       </p:pic>
       <p:sp>
         <p:nvSpPr>
-          <p:cNvPr id="22" name="TextBox 21"/>
+          <p:cNvPr id="40" name="TextBox 39"/>
           <p:cNvSpPr txBox="1"/>
           <p:nvPr/>
         </p:nvSpPr>
@@ -10677,7 +11603,7 @@
       </p:sp>
       <p:sp>
         <p:nvSpPr>
-          <p:cNvPr id="23" name="TextBox 22"/>
+          <p:cNvPr id="41" name="TextBox 40"/>
           <p:cNvSpPr txBox="1"/>
           <p:nvPr/>
         </p:nvSpPr>
@@ -10703,7 +11629,7 @@
                 </a:solidFill>
                 <a:latin typeface="Arial"/>
               </a:rPr>
-              <a:t>7  /  8</a:t>
+              <a:t>7  /  10</a:t>
             </a:r>
           </a:p>
         </p:txBody>
@@ -10771,149 +11697,47 @@
       </p:sp>
       <p:sp>
         <p:nvSpPr>
-          <p:cNvPr id="3" name="Rectangle 2"/>
+          <p:cNvPr id="3" name="TextBox 2"/>
+          <p:cNvSpPr txBox="1"/>
+          <p:nvPr/>
+        </p:nvSpPr>
+        <p:spPr>
+          <a:xfrm>
+            <a:off x="457200" y="292608"/>
+            <a:ext cx="10972800" cy="457200"/>
+          </a:xfrm>
+          <a:prstGeom prst="rect">
+            <a:avLst/>
+          </a:prstGeom>
+          <a:noFill/>
+        </p:spPr>
+        <p:txBody>
+          <a:bodyPr wrap="square" anchor="t"/>
+          <a:lstStyle/>
+          <a:p>
+            <a:pPr algn="l"/>
+            <a:r>
+              <a:rPr sz="3200" b="1">
+                <a:solidFill>
+                  <a:srgbClr val="0E1726"/>
+                </a:solidFill>
+                <a:latin typeface="Arial"/>
+              </a:rPr>
+              <a:t>What we declare</a:t>
+            </a:r>
+          </a:p>
+        </p:txBody>
+      </p:sp>
+      <p:sp>
+        <p:nvSpPr>
+          <p:cNvPr id="4" name="Rectangle 3"/>
           <p:cNvSpPr/>
           <p:nvPr/>
         </p:nvSpPr>
         <p:spPr>
           <a:xfrm>
-            <a:off x="0" y="0"/>
-            <a:ext cx="164592" cy="6858000"/>
-          </a:xfrm>
-          <a:prstGeom prst="rect">
-            <a:avLst/>
-          </a:prstGeom>
-          <a:solidFill>
-            <a:srgbClr val="6A4DFF"/>
-          </a:solidFill>
-          <a:ln>
-            <a:solidFill>
-              <a:srgbClr val="6A4DFF"/>
-            </a:solidFill>
-          </a:ln>
-        </p:spPr>
-        <p:style>
-          <a:lnRef idx="1">
-            <a:schemeClr val="accent1"/>
-          </a:lnRef>
-          <a:fillRef idx="3">
-            <a:schemeClr val="accent1"/>
-          </a:fillRef>
-          <a:effectRef idx="2">
-            <a:schemeClr val="accent1"/>
-          </a:effectRef>
-          <a:fontRef idx="minor">
-            <a:schemeClr val="lt1"/>
-          </a:fontRef>
-        </p:style>
-        <p:txBody>
-          <a:bodyPr rtlCol="0" anchor="ctr"/>
-          <a:lstStyle/>
-          <a:p>
-            <a:pPr algn="ctr"/>
-          </a:p>
-        </p:txBody>
-      </p:sp>
-      <p:pic>
-        <p:nvPicPr>
-          <p:cNvPr id="4" name="Picture 3" descr="favicon-512.png"/>
-          <p:cNvPicPr>
-            <a:picLocks noChangeAspect="1"/>
-          </p:cNvPicPr>
-          <p:nvPr/>
-        </p:nvPicPr>
-        <p:blipFill>
-          <a:blip r:embed="rId2"/>
-          <a:stretch>
-            <a:fillRect/>
-          </a:stretch>
-        </p:blipFill>
-        <p:spPr>
-          <a:xfrm>
-            <a:off x="502920" y="1874519"/>
-            <a:ext cx="1051560" cy="1051560"/>
-          </a:xfrm>
-          <a:prstGeom prst="rect">
-            <a:avLst/>
-          </a:prstGeom>
-        </p:spPr>
-      </p:pic>
-      <p:sp>
-        <p:nvSpPr>
-          <p:cNvPr id="5" name="TextBox 4"/>
-          <p:cNvSpPr txBox="1"/>
-          <p:nvPr/>
-        </p:nvSpPr>
-        <p:spPr>
-          <a:xfrm>
-            <a:off x="1783080" y="2011680"/>
-            <a:ext cx="9144000" cy="822960"/>
-          </a:xfrm>
-          <a:prstGeom prst="rect">
-            <a:avLst/>
-          </a:prstGeom>
-          <a:noFill/>
-        </p:spPr>
-        <p:txBody>
-          <a:bodyPr wrap="square" anchor="t"/>
-          <a:lstStyle/>
-          <a:p>
-            <a:pPr algn="l"/>
-            <a:r>
-              <a:rPr sz="4800" b="1">
-                <a:solidFill>
-                  <a:srgbClr val="0E1726"/>
-                </a:solidFill>
-                <a:latin typeface="Arial"/>
-              </a:rPr>
-              <a:t>PromptShield</a:t>
-            </a:r>
-          </a:p>
-        </p:txBody>
-      </p:sp>
-      <p:sp>
-        <p:nvSpPr>
-          <p:cNvPr id="6" name="TextBox 5"/>
-          <p:cNvSpPr txBox="1"/>
-          <p:nvPr/>
-        </p:nvSpPr>
-        <p:spPr>
-          <a:xfrm>
-            <a:off x="502920" y="2926080"/>
-            <a:ext cx="10058400" cy="457200"/>
-          </a:xfrm>
-          <a:prstGeom prst="rect">
-            <a:avLst/>
-          </a:prstGeom>
-          <a:noFill/>
-        </p:spPr>
-        <p:txBody>
-          <a:bodyPr wrap="square" anchor="t"/>
-          <a:lstStyle/>
-          <a:p>
-            <a:pPr algn="l"/>
-            <a:r>
-              <a:rPr sz="2200" b="0">
-                <a:solidFill>
-                  <a:srgbClr val="0E1726"/>
-                </a:solidFill>
-                <a:latin typeface="Arial"/>
-              </a:rPr>
-              <a:t>Check the content. Remove the attack. Keep the document.</a:t>
-            </a:r>
-          </a:p>
-        </p:txBody>
-      </p:sp>
-      <p:sp>
-        <p:nvSpPr>
-          <p:cNvPr id="7" name="Rectangle 6"/>
-          <p:cNvSpPr/>
-          <p:nvPr/>
-        </p:nvSpPr>
-        <p:spPr>
-          <a:xfrm>
-            <a:off x="557784" y="3849624"/>
-            <a:ext cx="6949440" cy="777240"/>
+            <a:off x="512064" y="1106424"/>
+            <a:ext cx="5486400" cy="2103120"/>
           </a:xfrm>
           <a:prstGeom prst="rect">
             <a:avLst/>
@@ -10949,14 +11773,14 @@
       </p:sp>
       <p:sp>
         <p:nvSpPr>
-          <p:cNvPr id="8" name="Rectangle 7"/>
+          <p:cNvPr id="5" name="Rectangle 4"/>
           <p:cNvSpPr/>
           <p:nvPr/>
         </p:nvSpPr>
         <p:spPr>
           <a:xfrm>
-            <a:off x="502920" y="3794760"/>
-            <a:ext cx="6949440" cy="777240"/>
+            <a:off x="457200" y="1051560"/>
+            <a:ext cx="5486400" cy="2103120"/>
           </a:xfrm>
           <a:prstGeom prst="rect">
             <a:avLst/>
@@ -10994,14 +11818,14 @@
       </p:sp>
       <p:sp>
         <p:nvSpPr>
-          <p:cNvPr id="9" name="TextBox 8"/>
-          <p:cNvSpPr txBox="1"/>
-          <p:nvPr/>
-        </p:nvSpPr>
-        <p:spPr>
-          <a:xfrm>
-            <a:off x="685800" y="3904487"/>
-            <a:ext cx="1188720" cy="256032"/>
+          <p:cNvPr id="6" name="TextBox 5"/>
+          <p:cNvSpPr txBox="1"/>
+          <p:nvPr/>
+        </p:nvSpPr>
+        <p:spPr>
+          <a:xfrm>
+            <a:off x="685800" y="1280160"/>
+            <a:ext cx="5029200" cy="548640"/>
           </a:xfrm>
           <a:prstGeom prst="rect">
             <a:avLst/>
@@ -11014,14 +11838,135 @@
           <a:p>
             <a:pPr algn="l"/>
             <a:r>
-              <a:rPr sz="1200" b="1">
+              <a:rPr sz="3200" b="1">
+                <a:solidFill>
+                  <a:srgbClr val="6A4DFF"/>
+                </a:solidFill>
+                <a:latin typeface="Arial"/>
+              </a:rPr>
+              <a:t>F1  /  D1</a:t>
+            </a:r>
+          </a:p>
+        </p:txBody>
+      </p:sp>
+      <p:sp>
+        <p:nvSpPr>
+          <p:cNvPr id="7" name="TextBox 6"/>
+          <p:cNvSpPr txBox="1"/>
+          <p:nvPr/>
+        </p:nvSpPr>
+        <p:spPr>
+          <a:xfrm>
+            <a:off x="685800" y="1965960"/>
+            <a:ext cx="5029200" cy="914400"/>
+          </a:xfrm>
+          <a:prstGeom prst="rect">
+            <a:avLst/>
+          </a:prstGeom>
+          <a:noFill/>
+        </p:spPr>
+        <p:txBody>
+          <a:bodyPr wrap="square" anchor="t"/>
+          <a:lstStyle/>
+          <a:p>
+            <a:pPr algn="l"/>
+            <a:r>
+              <a:rPr sz="1500" b="0">
                 <a:solidFill>
                   <a:srgbClr val="5B667A"/>
                 </a:solidFill>
                 <a:latin typeface="Arial"/>
               </a:rPr>
-              <a:t>GitHub</a:t>
-            </a:r>
+              <a:t>Provisional. Nine attack types and the listed formats are in the product. An independent sealed run has not been scored.</a:t>
+            </a:r>
+          </a:p>
+        </p:txBody>
+      </p:sp>
+      <p:sp>
+        <p:nvSpPr>
+          <p:cNvPr id="8" name="Rectangle 7"/>
+          <p:cNvSpPr/>
+          <p:nvPr/>
+        </p:nvSpPr>
+        <p:spPr>
+          <a:xfrm>
+            <a:off x="6272783" y="1106424"/>
+            <a:ext cx="5486400" cy="2103120"/>
+          </a:xfrm>
+          <a:prstGeom prst="rect">
+            <a:avLst/>
+          </a:prstGeom>
+          <a:solidFill>
+            <a:srgbClr val="0E1726"/>
+          </a:solidFill>
+          <a:ln>
+            <a:noFill/>
+          </a:ln>
+        </p:spPr>
+        <p:style>
+          <a:lnRef idx="1">
+            <a:schemeClr val="accent1"/>
+          </a:lnRef>
+          <a:fillRef idx="3">
+            <a:schemeClr val="accent1"/>
+          </a:fillRef>
+          <a:effectRef idx="2">
+            <a:schemeClr val="accent1"/>
+          </a:effectRef>
+          <a:fontRef idx="minor">
+            <a:schemeClr val="lt1"/>
+          </a:fontRef>
+        </p:style>
+        <p:txBody>
+          <a:bodyPr rtlCol="0" anchor="ctr"/>
+          <a:lstStyle/>
+          <a:p>
+            <a:pPr algn="ctr"/>
+          </a:p>
+        </p:txBody>
+      </p:sp>
+      <p:sp>
+        <p:nvSpPr>
+          <p:cNvPr id="9" name="Rectangle 8"/>
+          <p:cNvSpPr/>
+          <p:nvPr/>
+        </p:nvSpPr>
+        <p:spPr>
+          <a:xfrm>
+            <a:off x="6217920" y="1051560"/>
+            <a:ext cx="5486400" cy="2103120"/>
+          </a:xfrm>
+          <a:prstGeom prst="rect">
+            <a:avLst/>
+          </a:prstGeom>
+          <a:solidFill>
+            <a:srgbClr val="FFFFFF"/>
+          </a:solidFill>
+          <a:ln w="19050">
+            <a:solidFill>
+              <a:srgbClr val="0E1726"/>
+            </a:solidFill>
+          </a:ln>
+        </p:spPr>
+        <p:style>
+          <a:lnRef idx="1">
+            <a:schemeClr val="accent1"/>
+          </a:lnRef>
+          <a:fillRef idx="3">
+            <a:schemeClr val="accent1"/>
+          </a:fillRef>
+          <a:effectRef idx="2">
+            <a:schemeClr val="accent1"/>
+          </a:effectRef>
+          <a:fontRef idx="minor">
+            <a:schemeClr val="lt1"/>
+          </a:fontRef>
+        </p:style>
+        <p:txBody>
+          <a:bodyPr rtlCol="0" anchor="ctr"/>
+          <a:lstStyle/>
+          <a:p>
+            <a:pPr algn="ctr"/>
           </a:p>
         </p:txBody>
       </p:sp>
@@ -11033,8 +11978,8 @@
         </p:nvSpPr>
         <p:spPr>
           <a:xfrm>
-            <a:off x="685800" y="4160520"/>
-            <a:ext cx="6492240" cy="320040"/>
+            <a:off x="6446520" y="1280160"/>
+            <a:ext cx="5029200" cy="411480"/>
           </a:xfrm>
           <a:prstGeom prst="rect">
             <a:avLst/>
@@ -11047,27 +11992,269 @@
           <a:p>
             <a:pPr algn="l"/>
             <a:r>
-              <a:rPr sz="1600" b="1">
+              <a:rPr sz="2200" b="1">
+                <a:solidFill>
+                  <a:srgbClr val="C62839"/>
+                </a:solidFill>
+                <a:latin typeface="Arial"/>
+              </a:rPr>
+              <a:t>Not claimed</a:t>
+            </a:r>
+          </a:p>
+        </p:txBody>
+      </p:sp>
+      <p:sp>
+        <p:nvSpPr>
+          <p:cNvPr id="11" name="TextBox 10"/>
+          <p:cNvSpPr txBox="1"/>
+          <p:nvPr/>
+        </p:nvSpPr>
+        <p:spPr>
+          <a:xfrm>
+            <a:off x="6446520" y="1874519"/>
+            <a:ext cx="5029200" cy="1005840"/>
+          </a:xfrm>
+          <a:prstGeom prst="rect">
+            <a:avLst/>
+          </a:prstGeom>
+          <a:noFill/>
+        </p:spPr>
+        <p:txBody>
+          <a:bodyPr wrap="square" anchor="t"/>
+          <a:lstStyle/>
+          <a:p>
+            <a:pPr algn="l"/>
+            <a:r>
+              <a:rPr sz="1500" b="0">
+                <a:solidFill>
+                  <a:srgbClr val="5B667A"/>
+                </a:solidFill>
+                <a:latin typeface="Arial"/>
+              </a:rPr>
+              <a:t>F3 and D3. Known-pattern recall of 0.95. Held-out recall of 0.85. A length-matched false-positive rate at or under 2 percent.</a:t>
+            </a:r>
+          </a:p>
+        </p:txBody>
+      </p:sp>
+      <p:sp>
+        <p:nvSpPr>
+          <p:cNvPr id="12" name="Rectangle 11"/>
+          <p:cNvSpPr/>
+          <p:nvPr/>
+        </p:nvSpPr>
+        <p:spPr>
+          <a:xfrm>
+            <a:off x="512064" y="3438144"/>
+            <a:ext cx="11247120" cy="713232"/>
+          </a:xfrm>
+          <a:prstGeom prst="rect">
+            <a:avLst/>
+          </a:prstGeom>
+          <a:solidFill>
+            <a:srgbClr val="0E1726"/>
+          </a:solidFill>
+          <a:ln>
+            <a:noFill/>
+          </a:ln>
+        </p:spPr>
+        <p:style>
+          <a:lnRef idx="1">
+            <a:schemeClr val="accent1"/>
+          </a:lnRef>
+          <a:fillRef idx="3">
+            <a:schemeClr val="accent1"/>
+          </a:fillRef>
+          <a:effectRef idx="2">
+            <a:schemeClr val="accent1"/>
+          </a:effectRef>
+          <a:fontRef idx="minor">
+            <a:schemeClr val="lt1"/>
+          </a:fontRef>
+        </p:style>
+        <p:txBody>
+          <a:bodyPr rtlCol="0" anchor="ctr"/>
+          <a:lstStyle/>
+          <a:p>
+            <a:pPr algn="ctr"/>
+          </a:p>
+        </p:txBody>
+      </p:sp>
+      <p:sp>
+        <p:nvSpPr>
+          <p:cNvPr id="13" name="Rectangle 12"/>
+          <p:cNvSpPr/>
+          <p:nvPr/>
+        </p:nvSpPr>
+        <p:spPr>
+          <a:xfrm>
+            <a:off x="457200" y="3383280"/>
+            <a:ext cx="11247120" cy="713232"/>
+          </a:xfrm>
+          <a:prstGeom prst="rect">
+            <a:avLst/>
+          </a:prstGeom>
+          <a:solidFill>
+            <a:srgbClr val="FFFFFF"/>
+          </a:solidFill>
+          <a:ln w="19050">
+            <a:solidFill>
+              <a:srgbClr val="0E1726"/>
+            </a:solidFill>
+          </a:ln>
+        </p:spPr>
+        <p:style>
+          <a:lnRef idx="1">
+            <a:schemeClr val="accent1"/>
+          </a:lnRef>
+          <a:fillRef idx="3">
+            <a:schemeClr val="accent1"/>
+          </a:fillRef>
+          <a:effectRef idx="2">
+            <a:schemeClr val="accent1"/>
+          </a:effectRef>
+          <a:fontRef idx="minor">
+            <a:schemeClr val="lt1"/>
+          </a:fontRef>
+        </p:style>
+        <p:txBody>
+          <a:bodyPr rtlCol="0" anchor="ctr"/>
+          <a:lstStyle/>
+          <a:p>
+            <a:pPr algn="ctr"/>
+          </a:p>
+        </p:txBody>
+      </p:sp>
+      <p:sp>
+        <p:nvSpPr>
+          <p:cNvPr id="14" name="TextBox 13"/>
+          <p:cNvSpPr txBox="1"/>
+          <p:nvPr/>
+        </p:nvSpPr>
+        <p:spPr>
+          <a:xfrm>
+            <a:off x="685800" y="3566160"/>
+            <a:ext cx="10789920" cy="411480"/>
+          </a:xfrm>
+          <a:prstGeom prst="rect">
+            <a:avLst/>
+          </a:prstGeom>
+          <a:noFill/>
+        </p:spPr>
+        <p:txBody>
+          <a:bodyPr wrap="square" anchor="t"/>
+          <a:lstStyle/>
+          <a:p>
+            <a:pPr algn="l"/>
+            <a:r>
+              <a:rPr sz="1500" b="0">
                 <a:solidFill>
                   <a:srgbClr val="0E1726"/>
                 </a:solidFill>
                 <a:latin typeface="Arial"/>
               </a:rPr>
-              <a:t>https://github.com/Sohamsurve/PromptShield.git</a:t>
-            </a:r>
-          </a:p>
-        </p:txBody>
-      </p:sp>
-      <p:sp>
-        <p:nvSpPr>
-          <p:cNvPr id="11" name="TextBox 10"/>
-          <p:cNvSpPr txBox="1"/>
-          <p:nvPr/>
-        </p:nvSpPr>
-        <p:spPr>
-          <a:xfrm>
-            <a:off x="502920" y="4754880"/>
-            <a:ext cx="9144000" cy="365760"/>
+              <a:t>Exact white-on-white text is not in the pixels, so OCR cannot read it.</a:t>
+            </a:r>
+          </a:p>
+        </p:txBody>
+      </p:sp>
+      <p:sp>
+        <p:nvSpPr>
+          <p:cNvPr id="15" name="Rectangle 14"/>
+          <p:cNvSpPr/>
+          <p:nvPr/>
+        </p:nvSpPr>
+        <p:spPr>
+          <a:xfrm>
+            <a:off x="512064" y="4261104"/>
+            <a:ext cx="11247120" cy="713232"/>
+          </a:xfrm>
+          <a:prstGeom prst="rect">
+            <a:avLst/>
+          </a:prstGeom>
+          <a:solidFill>
+            <a:srgbClr val="0E1726"/>
+          </a:solidFill>
+          <a:ln>
+            <a:noFill/>
+          </a:ln>
+        </p:spPr>
+        <p:style>
+          <a:lnRef idx="1">
+            <a:schemeClr val="accent1"/>
+          </a:lnRef>
+          <a:fillRef idx="3">
+            <a:schemeClr val="accent1"/>
+          </a:fillRef>
+          <a:effectRef idx="2">
+            <a:schemeClr val="accent1"/>
+          </a:effectRef>
+          <a:fontRef idx="minor">
+            <a:schemeClr val="lt1"/>
+          </a:fontRef>
+        </p:style>
+        <p:txBody>
+          <a:bodyPr rtlCol="0" anchor="ctr"/>
+          <a:lstStyle/>
+          <a:p>
+            <a:pPr algn="ctr"/>
+          </a:p>
+        </p:txBody>
+      </p:sp>
+      <p:sp>
+        <p:nvSpPr>
+          <p:cNvPr id="16" name="Rectangle 15"/>
+          <p:cNvSpPr/>
+          <p:nvPr/>
+        </p:nvSpPr>
+        <p:spPr>
+          <a:xfrm>
+            <a:off x="457200" y="4206240"/>
+            <a:ext cx="11247120" cy="713232"/>
+          </a:xfrm>
+          <a:prstGeom prst="rect">
+            <a:avLst/>
+          </a:prstGeom>
+          <a:solidFill>
+            <a:srgbClr val="FFFFFF"/>
+          </a:solidFill>
+          <a:ln w="19050">
+            <a:solidFill>
+              <a:srgbClr val="0E1726"/>
+            </a:solidFill>
+          </a:ln>
+        </p:spPr>
+        <p:style>
+          <a:lnRef idx="1">
+            <a:schemeClr val="accent1"/>
+          </a:lnRef>
+          <a:fillRef idx="3">
+            <a:schemeClr val="accent1"/>
+          </a:fillRef>
+          <a:effectRef idx="2">
+            <a:schemeClr val="accent1"/>
+          </a:effectRef>
+          <a:fontRef idx="minor">
+            <a:schemeClr val="lt1"/>
+          </a:fontRef>
+        </p:style>
+        <p:txBody>
+          <a:bodyPr rtlCol="0" anchor="ctr"/>
+          <a:lstStyle/>
+          <a:p>
+            <a:pPr algn="ctr"/>
+          </a:p>
+        </p:txBody>
+      </p:sp>
+      <p:sp>
+        <p:nvSpPr>
+          <p:cNvPr id="17" name="TextBox 16"/>
+          <p:cNvSpPr txBox="1"/>
+          <p:nvPr/>
+        </p:nvSpPr>
+        <p:spPr>
+          <a:xfrm>
+            <a:off x="685800" y="4389120"/>
+            <a:ext cx="10789920" cy="411480"/>
           </a:xfrm>
           <a:prstGeom prst="rect">
             <a:avLst/>
@@ -11080,20 +12267,141 @@
           <a:p>
             <a:pPr algn="l"/>
             <a:r>
-              <a:rPr sz="1800" b="1">
+              <a:rPr sz="1500" b="0">
                 <a:solidFill>
                   <a:srgbClr val="0E1726"/>
                 </a:solidFill>
                 <a:latin typeface="Arial"/>
               </a:rPr>
-              <a:t>Submitted by: Soham Y. Surve</a:t>
+              <a:t>The Arena agent is scripted. A live language-model agent was not the measured subject.</a:t>
+            </a:r>
+          </a:p>
+        </p:txBody>
+      </p:sp>
+      <p:sp>
+        <p:nvSpPr>
+          <p:cNvPr id="18" name="Rectangle 17"/>
+          <p:cNvSpPr/>
+          <p:nvPr/>
+        </p:nvSpPr>
+        <p:spPr>
+          <a:xfrm>
+            <a:off x="512064" y="5084064"/>
+            <a:ext cx="11247120" cy="713232"/>
+          </a:xfrm>
+          <a:prstGeom prst="rect">
+            <a:avLst/>
+          </a:prstGeom>
+          <a:solidFill>
+            <a:srgbClr val="0E1726"/>
+          </a:solidFill>
+          <a:ln>
+            <a:noFill/>
+          </a:ln>
+        </p:spPr>
+        <p:style>
+          <a:lnRef idx="1">
+            <a:schemeClr val="accent1"/>
+          </a:lnRef>
+          <a:fillRef idx="3">
+            <a:schemeClr val="accent1"/>
+          </a:fillRef>
+          <a:effectRef idx="2">
+            <a:schemeClr val="accent1"/>
+          </a:effectRef>
+          <a:fontRef idx="minor">
+            <a:schemeClr val="lt1"/>
+          </a:fontRef>
+        </p:style>
+        <p:txBody>
+          <a:bodyPr rtlCol="0" anchor="ctr"/>
+          <a:lstStyle/>
+          <a:p>
+            <a:pPr algn="ctr"/>
+          </a:p>
+        </p:txBody>
+      </p:sp>
+      <p:sp>
+        <p:nvSpPr>
+          <p:cNvPr id="19" name="Rectangle 18"/>
+          <p:cNvSpPr/>
+          <p:nvPr/>
+        </p:nvSpPr>
+        <p:spPr>
+          <a:xfrm>
+            <a:off x="457200" y="5029200"/>
+            <a:ext cx="11247120" cy="713232"/>
+          </a:xfrm>
+          <a:prstGeom prst="rect">
+            <a:avLst/>
+          </a:prstGeom>
+          <a:solidFill>
+            <a:srgbClr val="FFFFFF"/>
+          </a:solidFill>
+          <a:ln w="19050">
+            <a:solidFill>
+              <a:srgbClr val="0E1726"/>
+            </a:solidFill>
+          </a:ln>
+        </p:spPr>
+        <p:style>
+          <a:lnRef idx="1">
+            <a:schemeClr val="accent1"/>
+          </a:lnRef>
+          <a:fillRef idx="3">
+            <a:schemeClr val="accent1"/>
+          </a:fillRef>
+          <a:effectRef idx="2">
+            <a:schemeClr val="accent1"/>
+          </a:effectRef>
+          <a:fontRef idx="minor">
+            <a:schemeClr val="lt1"/>
+          </a:fontRef>
+        </p:style>
+        <p:txBody>
+          <a:bodyPr rtlCol="0" anchor="ctr"/>
+          <a:lstStyle/>
+          <a:p>
+            <a:pPr algn="ctr"/>
+          </a:p>
+        </p:txBody>
+      </p:sp>
+      <p:sp>
+        <p:nvSpPr>
+          <p:cNvPr id="20" name="TextBox 19"/>
+          <p:cNvSpPr txBox="1"/>
+          <p:nvPr/>
+        </p:nvSpPr>
+        <p:spPr>
+          <a:xfrm>
+            <a:off x="685800" y="5212080"/>
+            <a:ext cx="10789920" cy="411480"/>
+          </a:xfrm>
+          <a:prstGeom prst="rect">
+            <a:avLst/>
+          </a:prstGeom>
+          <a:noFill/>
+        </p:spPr>
+        <p:txBody>
+          <a:bodyPr wrap="square" anchor="t"/>
+          <a:lstStyle/>
+          <a:p>
+            <a:pPr algn="l"/>
+            <a:r>
+              <a:rPr sz="1500" b="0">
+                <a:solidFill>
+                  <a:srgbClr val="0E1726"/>
+                </a:solidFill>
+                <a:latin typeface="Arial"/>
+              </a:rPr>
+              <a:t>The judge can add a finding. It cannot block a document by itself.</a:t>
             </a:r>
           </a:p>
         </p:txBody>
       </p:sp>
       <p:pic>
         <p:nvPicPr>
-          <p:cNvPr id="12" name="Picture 11" descr="favicon-512.png"/>
+          <p:cNvPr id="21" name="Picture 20" descr="favicon-512.png"/>
           <p:cNvPicPr>
             <a:picLocks noChangeAspect="1"/>
           </p:cNvPicPr>
@@ -11117,7 +12425,7 @@
       </p:pic>
       <p:sp>
         <p:nvSpPr>
-          <p:cNvPr id="13" name="TextBox 12"/>
+          <p:cNvPr id="22" name="TextBox 21"/>
           <p:cNvSpPr txBox="1"/>
           <p:nvPr/>
         </p:nvSpPr>
@@ -11150,7 +12458,7 @@
       </p:sp>
       <p:sp>
         <p:nvSpPr>
-          <p:cNvPr id="14" name="TextBox 13"/>
+          <p:cNvPr id="23" name="TextBox 22"/>
           <p:cNvSpPr txBox="1"/>
           <p:nvPr/>
         </p:nvSpPr>
@@ -11176,7 +12484,972 @@
                 </a:solidFill>
                 <a:latin typeface="Arial"/>
               </a:rPr>
-              <a:t>8  /  8</a:t>
+              <a:t>8  /  10</a:t>
+            </a:r>
+          </a:p>
+        </p:txBody>
+      </p:sp>
+    </p:spTree>
+  </p:cSld>
+  <p:clrMapOvr>
+    <a:masterClrMapping/>
+  </p:clrMapOvr>
+</p:sld>
+</file>
+
+<file path=ppt/slides/slide9.xml><?xml version="1.0" encoding="utf-8"?>
+<p:sld xmlns:a="http://schemas.openxmlformats.org/drawingml/2006/main" xmlns:p="http://schemas.openxmlformats.org/presentationml/2006/main" xmlns:r="http://schemas.openxmlformats.org/officeDocument/2006/relationships">
+  <p:cSld>
+    <p:spTree>
+      <p:nvGrpSpPr>
+        <p:cNvPr id="1" name=""/>
+        <p:cNvGrpSpPr/>
+        <p:nvPr/>
+      </p:nvGrpSpPr>
+      <p:grpSpPr/>
+      <p:sp>
+        <p:nvSpPr>
+          <p:cNvPr id="2" name="Rectangle 1"/>
+          <p:cNvSpPr/>
+          <p:nvPr/>
+        </p:nvSpPr>
+        <p:spPr>
+          <a:xfrm>
+            <a:off x="0" y="0"/>
+            <a:ext cx="12191695" cy="6858000"/>
+          </a:xfrm>
+          <a:prstGeom prst="rect">
+            <a:avLst/>
+          </a:prstGeom>
+          <a:solidFill>
+            <a:srgbClr val="F3F5F9"/>
+          </a:solidFill>
+          <a:ln>
+            <a:noFill/>
+          </a:ln>
+        </p:spPr>
+        <p:style>
+          <a:lnRef idx="1">
+            <a:schemeClr val="accent1"/>
+          </a:lnRef>
+          <a:fillRef idx="3">
+            <a:schemeClr val="accent1"/>
+          </a:fillRef>
+          <a:effectRef idx="2">
+            <a:schemeClr val="accent1"/>
+          </a:effectRef>
+          <a:fontRef idx="minor">
+            <a:schemeClr val="lt1"/>
+          </a:fontRef>
+        </p:style>
+        <p:txBody>
+          <a:bodyPr rtlCol="0" anchor="ctr"/>
+          <a:lstStyle/>
+          <a:p>
+            <a:pPr algn="ctr"/>
+          </a:p>
+        </p:txBody>
+      </p:sp>
+      <p:sp>
+        <p:nvSpPr>
+          <p:cNvPr id="3" name="TextBox 2"/>
+          <p:cNvSpPr txBox="1"/>
+          <p:nvPr/>
+        </p:nvSpPr>
+        <p:spPr>
+          <a:xfrm>
+            <a:off x="457200" y="292608"/>
+            <a:ext cx="10972800" cy="457200"/>
+          </a:xfrm>
+          <a:prstGeom prst="rect">
+            <a:avLst/>
+          </a:prstGeom>
+          <a:noFill/>
+        </p:spPr>
+        <p:txBody>
+          <a:bodyPr wrap="square" anchor="t"/>
+          <a:lstStyle/>
+          <a:p>
+            <a:pPr algn="l"/>
+            <a:r>
+              <a:rPr sz="3200" b="1">
+                <a:solidFill>
+                  <a:srgbClr val="0E1726"/>
+                </a:solidFill>
+                <a:latin typeface="Arial"/>
+              </a:rPr>
+              <a:t>Business impact</a:t>
+            </a:r>
+          </a:p>
+        </p:txBody>
+      </p:sp>
+      <p:sp>
+        <p:nvSpPr>
+          <p:cNvPr id="4" name="TextBox 3"/>
+          <p:cNvSpPr txBox="1"/>
+          <p:nvPr/>
+        </p:nvSpPr>
+        <p:spPr>
+          <a:xfrm>
+            <a:off x="457200" y="868680"/>
+            <a:ext cx="10972800" cy="320040"/>
+          </a:xfrm>
+          <a:prstGeom prst="rect">
+            <a:avLst/>
+          </a:prstGeom>
+          <a:noFill/>
+        </p:spPr>
+        <p:txBody>
+          <a:bodyPr wrap="square" anchor="t"/>
+          <a:lstStyle/>
+          <a:p>
+            <a:pPr algn="l"/>
+            <a:r>
+              <a:rPr sz="1600" b="0">
+                <a:solidFill>
+                  <a:srgbClr val="5B667A"/>
+                </a:solidFill>
+                <a:latin typeface="Arial"/>
+              </a:rPr>
+              <a:t>What changes on the path in front of the model. No market numbers.</a:t>
+            </a:r>
+          </a:p>
+        </p:txBody>
+      </p:sp>
+      <p:sp>
+        <p:nvSpPr>
+          <p:cNvPr id="5" name="Rectangle 4"/>
+          <p:cNvSpPr/>
+          <p:nvPr/>
+        </p:nvSpPr>
+        <p:spPr>
+          <a:xfrm>
+            <a:off x="512064" y="1472184"/>
+            <a:ext cx="5577840" cy="1965960"/>
+          </a:xfrm>
+          <a:prstGeom prst="rect">
+            <a:avLst/>
+          </a:prstGeom>
+          <a:solidFill>
+            <a:srgbClr val="0E1726"/>
+          </a:solidFill>
+          <a:ln>
+            <a:noFill/>
+          </a:ln>
+        </p:spPr>
+        <p:style>
+          <a:lnRef idx="1">
+            <a:schemeClr val="accent1"/>
+          </a:lnRef>
+          <a:fillRef idx="3">
+            <a:schemeClr val="accent1"/>
+          </a:fillRef>
+          <a:effectRef idx="2">
+            <a:schemeClr val="accent1"/>
+          </a:effectRef>
+          <a:fontRef idx="minor">
+            <a:schemeClr val="lt1"/>
+          </a:fontRef>
+        </p:style>
+        <p:txBody>
+          <a:bodyPr rtlCol="0" anchor="ctr"/>
+          <a:lstStyle/>
+          <a:p>
+            <a:pPr algn="ctr"/>
+          </a:p>
+        </p:txBody>
+      </p:sp>
+      <p:sp>
+        <p:nvSpPr>
+          <p:cNvPr id="6" name="Rectangle 5"/>
+          <p:cNvSpPr/>
+          <p:nvPr/>
+        </p:nvSpPr>
+        <p:spPr>
+          <a:xfrm>
+            <a:off x="457200" y="1417320"/>
+            <a:ext cx="5577840" cy="1965960"/>
+          </a:xfrm>
+          <a:prstGeom prst="rect">
+            <a:avLst/>
+          </a:prstGeom>
+          <a:solidFill>
+            <a:srgbClr val="FFFFFF"/>
+          </a:solidFill>
+          <a:ln w="19050">
+            <a:solidFill>
+              <a:srgbClr val="0E1726"/>
+            </a:solidFill>
+          </a:ln>
+        </p:spPr>
+        <p:style>
+          <a:lnRef idx="1">
+            <a:schemeClr val="accent1"/>
+          </a:lnRef>
+          <a:fillRef idx="3">
+            <a:schemeClr val="accent1"/>
+          </a:fillRef>
+          <a:effectRef idx="2">
+            <a:schemeClr val="accent1"/>
+          </a:effectRef>
+          <a:fontRef idx="minor">
+            <a:schemeClr val="lt1"/>
+          </a:fontRef>
+        </p:style>
+        <p:txBody>
+          <a:bodyPr rtlCol="0" anchor="ctr"/>
+          <a:lstStyle/>
+          <a:p>
+            <a:pPr algn="ctr"/>
+          </a:p>
+        </p:txBody>
+      </p:sp>
+      <p:sp>
+        <p:nvSpPr>
+          <p:cNvPr id="7" name="TextBox 6"/>
+          <p:cNvSpPr txBox="1"/>
+          <p:nvPr/>
+        </p:nvSpPr>
+        <p:spPr>
+          <a:xfrm>
+            <a:off x="731520" y="1645920"/>
+            <a:ext cx="1097280" cy="365760"/>
+          </a:xfrm>
+          <a:prstGeom prst="rect">
+            <a:avLst/>
+          </a:prstGeom>
+          <a:noFill/>
+        </p:spPr>
+        <p:txBody>
+          <a:bodyPr wrap="square" anchor="t"/>
+          <a:lstStyle/>
+          <a:p>
+            <a:pPr algn="l"/>
+            <a:r>
+              <a:rPr sz="1600" b="1">
+                <a:solidFill>
+                  <a:srgbClr val="6A4DFF"/>
+                </a:solidFill>
+                <a:latin typeface="Arial"/>
+              </a:rPr>
+              <a:t>01</a:t>
+            </a:r>
+          </a:p>
+        </p:txBody>
+      </p:sp>
+      <p:sp>
+        <p:nvSpPr>
+          <p:cNvPr id="8" name="TextBox 7"/>
+          <p:cNvSpPr txBox="1"/>
+          <p:nvPr/>
+        </p:nvSpPr>
+        <p:spPr>
+          <a:xfrm>
+            <a:off x="731520" y="2057400"/>
+            <a:ext cx="5029200" cy="411480"/>
+          </a:xfrm>
+          <a:prstGeom prst="rect">
+            <a:avLst/>
+          </a:prstGeom>
+          <a:noFill/>
+        </p:spPr>
+        <p:txBody>
+          <a:bodyPr wrap="square" anchor="t"/>
+          <a:lstStyle/>
+          <a:p>
+            <a:pPr algn="l"/>
+            <a:r>
+              <a:rPr sz="2000" b="1">
+                <a:solidFill>
+                  <a:srgbClr val="0E1726"/>
+                </a:solidFill>
+                <a:latin typeface="Arial"/>
+              </a:rPr>
+              <a:t>The task stays the user's</a:t>
+            </a:r>
+          </a:p>
+        </p:txBody>
+      </p:sp>
+      <p:sp>
+        <p:nvSpPr>
+          <p:cNvPr id="9" name="TextBox 8"/>
+          <p:cNvSpPr txBox="1"/>
+          <p:nvPr/>
+        </p:nvSpPr>
+        <p:spPr>
+          <a:xfrm>
+            <a:off x="731520" y="2560320"/>
+            <a:ext cx="5029200" cy="640080"/>
+          </a:xfrm>
+          <a:prstGeom prst="rect">
+            <a:avLst/>
+          </a:prstGeom>
+          <a:noFill/>
+        </p:spPr>
+        <p:txBody>
+          <a:bodyPr wrap="square" anchor="t"/>
+          <a:lstStyle/>
+          <a:p>
+            <a:pPr algn="l"/>
+            <a:r>
+              <a:rPr sz="1500" b="0">
+                <a:solidFill>
+                  <a:srgbClr val="5B667A"/>
+                </a:solidFill>
+                <a:latin typeface="Arial"/>
+              </a:rPr>
+              <a:t>The hidden forward does not run. The agent keeps the job it was given.</a:t>
+            </a:r>
+          </a:p>
+        </p:txBody>
+      </p:sp>
+      <p:sp>
+        <p:nvSpPr>
+          <p:cNvPr id="10" name="Rectangle 9"/>
+          <p:cNvSpPr/>
+          <p:nvPr/>
+        </p:nvSpPr>
+        <p:spPr>
+          <a:xfrm>
+            <a:off x="6364224" y="1472184"/>
+            <a:ext cx="5577840" cy="1965960"/>
+          </a:xfrm>
+          <a:prstGeom prst="rect">
+            <a:avLst/>
+          </a:prstGeom>
+          <a:solidFill>
+            <a:srgbClr val="0E1726"/>
+          </a:solidFill>
+          <a:ln>
+            <a:noFill/>
+          </a:ln>
+        </p:spPr>
+        <p:style>
+          <a:lnRef idx="1">
+            <a:schemeClr val="accent1"/>
+          </a:lnRef>
+          <a:fillRef idx="3">
+            <a:schemeClr val="accent1"/>
+          </a:fillRef>
+          <a:effectRef idx="2">
+            <a:schemeClr val="accent1"/>
+          </a:effectRef>
+          <a:fontRef idx="minor">
+            <a:schemeClr val="lt1"/>
+          </a:fontRef>
+        </p:style>
+        <p:txBody>
+          <a:bodyPr rtlCol="0" anchor="ctr"/>
+          <a:lstStyle/>
+          <a:p>
+            <a:pPr algn="ctr"/>
+          </a:p>
+        </p:txBody>
+      </p:sp>
+      <p:sp>
+        <p:nvSpPr>
+          <p:cNvPr id="11" name="Rectangle 10"/>
+          <p:cNvSpPr/>
+          <p:nvPr/>
+        </p:nvSpPr>
+        <p:spPr>
+          <a:xfrm>
+            <a:off x="6309360" y="1417320"/>
+            <a:ext cx="5577840" cy="1965960"/>
+          </a:xfrm>
+          <a:prstGeom prst="rect">
+            <a:avLst/>
+          </a:prstGeom>
+          <a:solidFill>
+            <a:srgbClr val="FFFFFF"/>
+          </a:solidFill>
+          <a:ln w="19050">
+            <a:solidFill>
+              <a:srgbClr val="0E1726"/>
+            </a:solidFill>
+          </a:ln>
+        </p:spPr>
+        <p:style>
+          <a:lnRef idx="1">
+            <a:schemeClr val="accent1"/>
+          </a:lnRef>
+          <a:fillRef idx="3">
+            <a:schemeClr val="accent1"/>
+          </a:fillRef>
+          <a:effectRef idx="2">
+            <a:schemeClr val="accent1"/>
+          </a:effectRef>
+          <a:fontRef idx="minor">
+            <a:schemeClr val="lt1"/>
+          </a:fontRef>
+        </p:style>
+        <p:txBody>
+          <a:bodyPr rtlCol="0" anchor="ctr"/>
+          <a:lstStyle/>
+          <a:p>
+            <a:pPr algn="ctr"/>
+          </a:p>
+        </p:txBody>
+      </p:sp>
+      <p:sp>
+        <p:nvSpPr>
+          <p:cNvPr id="12" name="TextBox 11"/>
+          <p:cNvSpPr txBox="1"/>
+          <p:nvPr/>
+        </p:nvSpPr>
+        <p:spPr>
+          <a:xfrm>
+            <a:off x="6583680" y="1645920"/>
+            <a:ext cx="1097280" cy="365760"/>
+          </a:xfrm>
+          <a:prstGeom prst="rect">
+            <a:avLst/>
+          </a:prstGeom>
+          <a:noFill/>
+        </p:spPr>
+        <p:txBody>
+          <a:bodyPr wrap="square" anchor="t"/>
+          <a:lstStyle/>
+          <a:p>
+            <a:pPr algn="l"/>
+            <a:r>
+              <a:rPr sz="1600" b="1">
+                <a:solidFill>
+                  <a:srgbClr val="6A4DFF"/>
+                </a:solidFill>
+                <a:latin typeface="Arial"/>
+              </a:rPr>
+              <a:t>02</a:t>
+            </a:r>
+          </a:p>
+        </p:txBody>
+      </p:sp>
+      <p:sp>
+        <p:nvSpPr>
+          <p:cNvPr id="13" name="TextBox 12"/>
+          <p:cNvSpPr txBox="1"/>
+          <p:nvPr/>
+        </p:nvSpPr>
+        <p:spPr>
+          <a:xfrm>
+            <a:off x="6583680" y="2057400"/>
+            <a:ext cx="5029200" cy="411480"/>
+          </a:xfrm>
+          <a:prstGeom prst="rect">
+            <a:avLst/>
+          </a:prstGeom>
+          <a:noFill/>
+        </p:spPr>
+        <p:txBody>
+          <a:bodyPr wrap="square" anchor="t"/>
+          <a:lstStyle/>
+          <a:p>
+            <a:pPr algn="l"/>
+            <a:r>
+              <a:rPr sz="2000" b="1">
+                <a:solidFill>
+                  <a:srgbClr val="0E1726"/>
+                </a:solidFill>
+                <a:latin typeface="Arial"/>
+              </a:rPr>
+              <a:t>The document stays usable</a:t>
+            </a:r>
+          </a:p>
+        </p:txBody>
+      </p:sp>
+      <p:sp>
+        <p:nvSpPr>
+          <p:cNvPr id="14" name="TextBox 13"/>
+          <p:cNvSpPr txBox="1"/>
+          <p:nvPr/>
+        </p:nvSpPr>
+        <p:spPr>
+          <a:xfrm>
+            <a:off x="6583680" y="2560320"/>
+            <a:ext cx="5029200" cy="640080"/>
+          </a:xfrm>
+          <a:prstGeom prst="rect">
+            <a:avLst/>
+          </a:prstGeom>
+          <a:noFill/>
+        </p:spPr>
+        <p:txBody>
+          <a:bodyPr wrap="square" anchor="t"/>
+          <a:lstStyle/>
+          <a:p>
+            <a:pPr algn="l"/>
+            <a:r>
+              <a:rPr sz="1500" b="0">
+                <a:solidFill>
+                  <a:srgbClr val="5B667A"/>
+                </a:solidFill>
+                <a:latin typeface="Arial"/>
+              </a:rPr>
+              <a:t>On the frozen suite, 500 ordinary documents stayed allowed.</a:t>
+            </a:r>
+          </a:p>
+        </p:txBody>
+      </p:sp>
+      <p:sp>
+        <p:nvSpPr>
+          <p:cNvPr id="15" name="Rectangle 14"/>
+          <p:cNvSpPr/>
+          <p:nvPr/>
+        </p:nvSpPr>
+        <p:spPr>
+          <a:xfrm>
+            <a:off x="512064" y="3666744"/>
+            <a:ext cx="5577840" cy="1965960"/>
+          </a:xfrm>
+          <a:prstGeom prst="rect">
+            <a:avLst/>
+          </a:prstGeom>
+          <a:solidFill>
+            <a:srgbClr val="0E1726"/>
+          </a:solidFill>
+          <a:ln>
+            <a:noFill/>
+          </a:ln>
+        </p:spPr>
+        <p:style>
+          <a:lnRef idx="1">
+            <a:schemeClr val="accent1"/>
+          </a:lnRef>
+          <a:fillRef idx="3">
+            <a:schemeClr val="accent1"/>
+          </a:fillRef>
+          <a:effectRef idx="2">
+            <a:schemeClr val="accent1"/>
+          </a:effectRef>
+          <a:fontRef idx="minor">
+            <a:schemeClr val="lt1"/>
+          </a:fontRef>
+        </p:style>
+        <p:txBody>
+          <a:bodyPr rtlCol="0" anchor="ctr"/>
+          <a:lstStyle/>
+          <a:p>
+            <a:pPr algn="ctr"/>
+          </a:p>
+        </p:txBody>
+      </p:sp>
+      <p:sp>
+        <p:nvSpPr>
+          <p:cNvPr id="16" name="Rectangle 15"/>
+          <p:cNvSpPr/>
+          <p:nvPr/>
+        </p:nvSpPr>
+        <p:spPr>
+          <a:xfrm>
+            <a:off x="457200" y="3611880"/>
+            <a:ext cx="5577840" cy="1965960"/>
+          </a:xfrm>
+          <a:prstGeom prst="rect">
+            <a:avLst/>
+          </a:prstGeom>
+          <a:solidFill>
+            <a:srgbClr val="FFFFFF"/>
+          </a:solidFill>
+          <a:ln w="19050">
+            <a:solidFill>
+              <a:srgbClr val="0E1726"/>
+            </a:solidFill>
+          </a:ln>
+        </p:spPr>
+        <p:style>
+          <a:lnRef idx="1">
+            <a:schemeClr val="accent1"/>
+          </a:lnRef>
+          <a:fillRef idx="3">
+            <a:schemeClr val="accent1"/>
+          </a:fillRef>
+          <a:effectRef idx="2">
+            <a:schemeClr val="accent1"/>
+          </a:effectRef>
+          <a:fontRef idx="minor">
+            <a:schemeClr val="lt1"/>
+          </a:fontRef>
+        </p:style>
+        <p:txBody>
+          <a:bodyPr rtlCol="0" anchor="ctr"/>
+          <a:lstStyle/>
+          <a:p>
+            <a:pPr algn="ctr"/>
+          </a:p>
+        </p:txBody>
+      </p:sp>
+      <p:sp>
+        <p:nvSpPr>
+          <p:cNvPr id="17" name="TextBox 16"/>
+          <p:cNvSpPr txBox="1"/>
+          <p:nvPr/>
+        </p:nvSpPr>
+        <p:spPr>
+          <a:xfrm>
+            <a:off x="731520" y="3840480"/>
+            <a:ext cx="1097280" cy="365760"/>
+          </a:xfrm>
+          <a:prstGeom prst="rect">
+            <a:avLst/>
+          </a:prstGeom>
+          <a:noFill/>
+        </p:spPr>
+        <p:txBody>
+          <a:bodyPr wrap="square" anchor="t"/>
+          <a:lstStyle/>
+          <a:p>
+            <a:pPr algn="l"/>
+            <a:r>
+              <a:rPr sz="1600" b="1">
+                <a:solidFill>
+                  <a:srgbClr val="6A4DFF"/>
+                </a:solidFill>
+                <a:latin typeface="Arial"/>
+              </a:rPr>
+              <a:t>03</a:t>
+            </a:r>
+          </a:p>
+        </p:txBody>
+      </p:sp>
+      <p:sp>
+        <p:nvSpPr>
+          <p:cNvPr id="18" name="TextBox 17"/>
+          <p:cNvSpPr txBox="1"/>
+          <p:nvPr/>
+        </p:nvSpPr>
+        <p:spPr>
+          <a:xfrm>
+            <a:off x="731520" y="4251960"/>
+            <a:ext cx="5029200" cy="411480"/>
+          </a:xfrm>
+          <a:prstGeom prst="rect">
+            <a:avLst/>
+          </a:prstGeom>
+          <a:noFill/>
+        </p:spPr>
+        <p:txBody>
+          <a:bodyPr wrap="square" anchor="t"/>
+          <a:lstStyle/>
+          <a:p>
+            <a:pPr algn="l"/>
+            <a:r>
+              <a:rPr sz="2000" b="1">
+                <a:solidFill>
+                  <a:srgbClr val="0E1726"/>
+                </a:solidFill>
+                <a:latin typeface="Arial"/>
+              </a:rPr>
+              <a:t>Side effects fail closed</a:t>
+            </a:r>
+          </a:p>
+        </p:txBody>
+      </p:sp>
+      <p:sp>
+        <p:nvSpPr>
+          <p:cNvPr id="19" name="TextBox 18"/>
+          <p:cNvSpPr txBox="1"/>
+          <p:nvPr/>
+        </p:nvSpPr>
+        <p:spPr>
+          <a:xfrm>
+            <a:off x="731520" y="4754880"/>
+            <a:ext cx="5029200" cy="640080"/>
+          </a:xfrm>
+          <a:prstGeom prst="rect">
+            <a:avLst/>
+          </a:prstGeom>
+          <a:noFill/>
+        </p:spPr>
+        <p:txBody>
+          <a:bodyPr wrap="square" anchor="t"/>
+          <a:lstStyle/>
+          <a:p>
+            <a:pPr algn="l"/>
+            <a:r>
+              <a:rPr sz="1500" b="0">
+                <a:solidFill>
+                  <a:srgbClr val="5B667A"/>
+                </a:solidFill>
+                <a:latin typeface="Arial"/>
+              </a:rPr>
+              <a:t>A tainted send-email is denied even when text scanning is off.</a:t>
+            </a:r>
+          </a:p>
+        </p:txBody>
+      </p:sp>
+      <p:sp>
+        <p:nvSpPr>
+          <p:cNvPr id="20" name="Rectangle 19"/>
+          <p:cNvSpPr/>
+          <p:nvPr/>
+        </p:nvSpPr>
+        <p:spPr>
+          <a:xfrm>
+            <a:off x="6364224" y="3666744"/>
+            <a:ext cx="5577840" cy="1965960"/>
+          </a:xfrm>
+          <a:prstGeom prst="rect">
+            <a:avLst/>
+          </a:prstGeom>
+          <a:solidFill>
+            <a:srgbClr val="0E1726"/>
+          </a:solidFill>
+          <a:ln>
+            <a:noFill/>
+          </a:ln>
+        </p:spPr>
+        <p:style>
+          <a:lnRef idx="1">
+            <a:schemeClr val="accent1"/>
+          </a:lnRef>
+          <a:fillRef idx="3">
+            <a:schemeClr val="accent1"/>
+          </a:fillRef>
+          <a:effectRef idx="2">
+            <a:schemeClr val="accent1"/>
+          </a:effectRef>
+          <a:fontRef idx="minor">
+            <a:schemeClr val="lt1"/>
+          </a:fontRef>
+        </p:style>
+        <p:txBody>
+          <a:bodyPr rtlCol="0" anchor="ctr"/>
+          <a:lstStyle/>
+          <a:p>
+            <a:pPr algn="ctr"/>
+          </a:p>
+        </p:txBody>
+      </p:sp>
+      <p:sp>
+        <p:nvSpPr>
+          <p:cNvPr id="21" name="Rectangle 20"/>
+          <p:cNvSpPr/>
+          <p:nvPr/>
+        </p:nvSpPr>
+        <p:spPr>
+          <a:xfrm>
+            <a:off x="6309360" y="3611880"/>
+            <a:ext cx="5577840" cy="1965960"/>
+          </a:xfrm>
+          <a:prstGeom prst="rect">
+            <a:avLst/>
+          </a:prstGeom>
+          <a:solidFill>
+            <a:srgbClr val="FFFFFF"/>
+          </a:solidFill>
+          <a:ln w="19050">
+            <a:solidFill>
+              <a:srgbClr val="0E1726"/>
+            </a:solidFill>
+          </a:ln>
+        </p:spPr>
+        <p:style>
+          <a:lnRef idx="1">
+            <a:schemeClr val="accent1"/>
+          </a:lnRef>
+          <a:fillRef idx="3">
+            <a:schemeClr val="accent1"/>
+          </a:fillRef>
+          <a:effectRef idx="2">
+            <a:schemeClr val="accent1"/>
+          </a:effectRef>
+          <a:fontRef idx="minor">
+            <a:schemeClr val="lt1"/>
+          </a:fontRef>
+        </p:style>
+        <p:txBody>
+          <a:bodyPr rtlCol="0" anchor="ctr"/>
+          <a:lstStyle/>
+          <a:p>
+            <a:pPr algn="ctr"/>
+          </a:p>
+        </p:txBody>
+      </p:sp>
+      <p:sp>
+        <p:nvSpPr>
+          <p:cNvPr id="22" name="TextBox 21"/>
+          <p:cNvSpPr txBox="1"/>
+          <p:nvPr/>
+        </p:nvSpPr>
+        <p:spPr>
+          <a:xfrm>
+            <a:off x="6583680" y="3840480"/>
+            <a:ext cx="1097280" cy="365760"/>
+          </a:xfrm>
+          <a:prstGeom prst="rect">
+            <a:avLst/>
+          </a:prstGeom>
+          <a:noFill/>
+        </p:spPr>
+        <p:txBody>
+          <a:bodyPr wrap="square" anchor="t"/>
+          <a:lstStyle/>
+          <a:p>
+            <a:pPr algn="l"/>
+            <a:r>
+              <a:rPr sz="1600" b="1">
+                <a:solidFill>
+                  <a:srgbClr val="6A4DFF"/>
+                </a:solidFill>
+                <a:latin typeface="Arial"/>
+              </a:rPr>
+              <a:t>04</a:t>
+            </a:r>
+          </a:p>
+        </p:txBody>
+      </p:sp>
+      <p:sp>
+        <p:nvSpPr>
+          <p:cNvPr id="23" name="TextBox 22"/>
+          <p:cNvSpPr txBox="1"/>
+          <p:nvPr/>
+        </p:nvSpPr>
+        <p:spPr>
+          <a:xfrm>
+            <a:off x="6583680" y="4251960"/>
+            <a:ext cx="5029200" cy="411480"/>
+          </a:xfrm>
+          <a:prstGeom prst="rect">
+            <a:avLst/>
+          </a:prstGeom>
+          <a:noFill/>
+        </p:spPr>
+        <p:txBody>
+          <a:bodyPr wrap="square" anchor="t"/>
+          <a:lstStyle/>
+          <a:p>
+            <a:pPr algn="l"/>
+            <a:r>
+              <a:rPr sz="2000" b="1">
+                <a:solidFill>
+                  <a:srgbClr val="0E1726"/>
+                </a:solidFill>
+                <a:latin typeface="Arial"/>
+              </a:rPr>
+              <a:t>Any agent, one check</a:t>
+            </a:r>
+          </a:p>
+        </p:txBody>
+      </p:sp>
+      <p:sp>
+        <p:nvSpPr>
+          <p:cNvPr id="24" name="TextBox 23"/>
+          <p:cNvSpPr txBox="1"/>
+          <p:nvPr/>
+        </p:nvSpPr>
+        <p:spPr>
+          <a:xfrm>
+            <a:off x="6583680" y="4754880"/>
+            <a:ext cx="5029200" cy="640080"/>
+          </a:xfrm>
+          <a:prstGeom prst="rect">
+            <a:avLst/>
+          </a:prstGeom>
+          <a:noFill/>
+        </p:spPr>
+        <p:txBody>
+          <a:bodyPr wrap="square" anchor="t"/>
+          <a:lstStyle/>
+          <a:p>
+            <a:pPr algn="l"/>
+            <a:r>
+              <a:rPr sz="1500" b="0">
+                <a:solidFill>
+                  <a:srgbClr val="5B667A"/>
+                </a:solidFill>
+                <a:latin typeface="Arial"/>
+              </a:rPr>
+              <a:t>The same API sits in front of the model's own client. PromptShield does not replace the model.</a:t>
+            </a:r>
+          </a:p>
+        </p:txBody>
+      </p:sp>
+      <p:pic>
+        <p:nvPicPr>
+          <p:cNvPr id="25" name="Picture 24" descr="favicon-512.png"/>
+          <p:cNvPicPr>
+            <a:picLocks noChangeAspect="1"/>
+          </p:cNvPicPr>
+          <p:nvPr/>
+        </p:nvPicPr>
+        <p:blipFill>
+          <a:blip r:embed="rId2"/>
+          <a:stretch>
+            <a:fillRect/>
+          </a:stretch>
+        </p:blipFill>
+        <p:spPr>
+          <a:xfrm>
+            <a:off x="384048" y="6446520"/>
+            <a:ext cx="292608" cy="292608"/>
+          </a:xfrm>
+          <a:prstGeom prst="rect">
+            <a:avLst/>
+          </a:prstGeom>
+        </p:spPr>
+      </p:pic>
+      <p:sp>
+        <p:nvSpPr>
+          <p:cNvPr id="26" name="TextBox 25"/>
+          <p:cNvSpPr txBox="1"/>
+          <p:nvPr/>
+        </p:nvSpPr>
+        <p:spPr>
+          <a:xfrm>
+            <a:off x="768096" y="6510528"/>
+            <a:ext cx="7315200" cy="256032"/>
+          </a:xfrm>
+          <a:prstGeom prst="rect">
+            <a:avLst/>
+          </a:prstGeom>
+          <a:noFill/>
+        </p:spPr>
+        <p:txBody>
+          <a:bodyPr wrap="square" anchor="t"/>
+          <a:lstStyle/>
+          <a:p>
+            <a:pPr algn="l"/>
+            <a:r>
+              <a:rPr sz="1100" b="0">
+                <a:solidFill>
+                  <a:srgbClr val="5B667A"/>
+                </a:solidFill>
+                <a:latin typeface="Arial"/>
+              </a:rPr>
+              <a:t>PromptShield  ·  ET AI Hackathon  ·  Problem 2</a:t>
+            </a:r>
+          </a:p>
+        </p:txBody>
+      </p:sp>
+      <p:sp>
+        <p:nvSpPr>
+          <p:cNvPr id="27" name="TextBox 26"/>
+          <p:cNvSpPr txBox="1"/>
+          <p:nvPr/>
+        </p:nvSpPr>
+        <p:spPr>
+          <a:xfrm>
+            <a:off x="10424160" y="6510528"/>
+            <a:ext cx="1371600" cy="256032"/>
+          </a:xfrm>
+          <a:prstGeom prst="rect">
+            <a:avLst/>
+          </a:prstGeom>
+          <a:noFill/>
+        </p:spPr>
+        <p:txBody>
+          <a:bodyPr wrap="square" anchor="t"/>
+          <a:lstStyle/>
+          <a:p>
+            <a:pPr algn="ctr"/>
+            <a:r>
+              <a:rPr sz="1100" b="0">
+                <a:solidFill>
+                  <a:srgbClr val="5B667A"/>
+                </a:solidFill>
+                <a:latin typeface="Arial"/>
+              </a:rPr>
+              <a:t>9  /  10</a:t>
             </a:r>
           </a:p>
         </p:txBody>
